--- a/TUIA_Segundo/2Cuatrimestre/4C_MachineLearning/Unidad 2_ Regresión Lineal/Clase 4 - Gradiente Descendiente.pptx
+++ b/TUIA_Segundo/2Cuatrimestre/4C_MachineLearning/Unidad 2_ Regresión Lineal/Clase 4 - Gradiente Descendiente.pptx
@@ -27,23 +27,29 @@
     <p:sldId id="272" r:id="rId22"/>
     <p:sldId id="273" r:id="rId23"/>
     <p:sldId id="274" r:id="rId24"/>
+    <p:sldId id="275" r:id="rId25"/>
+    <p:sldId id="276" r:id="rId26"/>
+    <p:sldId id="277" r:id="rId27"/>
+    <p:sldId id="278" r:id="rId28"/>
+    <p:sldId id="279" r:id="rId29"/>
+    <p:sldId id="280" r:id="rId30"/>
   </p:sldIdLst>
   <p:sldSz cy="5143500" cx="9144000"/>
   <p:notesSz cx="6858000" cy="9144000"/>
   <p:embeddedFontLst>
     <p:embeddedFont>
       <p:font typeface="Raleway"/>
-      <p:regular r:id="rId25"/>
-      <p:bold r:id="rId26"/>
-      <p:italic r:id="rId27"/>
-      <p:boldItalic r:id="rId28"/>
+      <p:regular r:id="rId31"/>
+      <p:bold r:id="rId32"/>
+      <p:italic r:id="rId33"/>
+      <p:boldItalic r:id="rId34"/>
     </p:embeddedFont>
     <p:embeddedFont>
       <p:font typeface="Lato"/>
-      <p:regular r:id="rId29"/>
-      <p:bold r:id="rId30"/>
-      <p:italic r:id="rId31"/>
-      <p:boldItalic r:id="rId32"/>
+      <p:regular r:id="rId35"/>
+      <p:bold r:id="rId36"/>
+      <p:italic r:id="rId37"/>
+      <p:boldItalic r:id="rId38"/>
     </p:embeddedFont>
   </p:embeddedFontLst>
   <p:defaultTextStyle>
@@ -72,7 +78,7 @@
         <a:srgbClr val="000000"/>
       </a:buClr>
       <a:buFont typeface="Arial"/>
-      <a:defRPr b="0" i="0" sz="1400" u="none" cap="none" strike="noStrike">
+      <a:defRPr b="0" i="0" spc="0" sz="1400" u="none" cap="none" strike="noStrike">
         <a:solidFill>
           <a:srgbClr val="000000"/>
         </a:solidFill>
@@ -96,7 +102,7 @@
         <a:srgbClr val="000000"/>
       </a:buClr>
       <a:buFont typeface="Arial"/>
-      <a:defRPr b="0" i="0" sz="1400" u="none" cap="none" strike="noStrike">
+      <a:defRPr b="0" i="0" spc="0" sz="1400" u="none" cap="none" strike="noStrike">
         <a:solidFill>
           <a:srgbClr val="000000"/>
         </a:solidFill>
@@ -120,7 +126,7 @@
         <a:srgbClr val="000000"/>
       </a:buClr>
       <a:buFont typeface="Arial"/>
-      <a:defRPr b="0" i="0" sz="1400" u="none" cap="none" strike="noStrike">
+      <a:defRPr b="0" i="0" spc="0" sz="1400" u="none" cap="none" strike="noStrike">
         <a:solidFill>
           <a:srgbClr val="000000"/>
         </a:solidFill>
@@ -144,7 +150,7 @@
         <a:srgbClr val="000000"/>
       </a:buClr>
       <a:buFont typeface="Arial"/>
-      <a:defRPr b="0" i="0" sz="1400" u="none" cap="none" strike="noStrike">
+      <a:defRPr b="0" i="0" spc="0" sz="1400" u="none" cap="none" strike="noStrike">
         <a:solidFill>
           <a:srgbClr val="000000"/>
         </a:solidFill>
@@ -168,7 +174,7 @@
         <a:srgbClr val="000000"/>
       </a:buClr>
       <a:buFont typeface="Arial"/>
-      <a:defRPr b="0" i="0" sz="1400" u="none" cap="none" strike="noStrike">
+      <a:defRPr b="0" i="0" spc="0" sz="1400" u="none" cap="none" strike="noStrike">
         <a:solidFill>
           <a:srgbClr val="000000"/>
         </a:solidFill>
@@ -192,7 +198,7 @@
         <a:srgbClr val="000000"/>
       </a:buClr>
       <a:buFont typeface="Arial"/>
-      <a:defRPr b="0" i="0" sz="1400" u="none" cap="none" strike="noStrike">
+      <a:defRPr b="0" i="0" spc="0" sz="1400" u="none" cap="none" strike="noStrike">
         <a:solidFill>
           <a:srgbClr val="000000"/>
         </a:solidFill>
@@ -216,7 +222,7 @@
         <a:srgbClr val="000000"/>
       </a:buClr>
       <a:buFont typeface="Arial"/>
-      <a:defRPr b="0" i="0" sz="1400" u="none" cap="none" strike="noStrike">
+      <a:defRPr b="0" i="0" spc="0" sz="1400" u="none" cap="none" strike="noStrike">
         <a:solidFill>
           <a:srgbClr val="000000"/>
         </a:solidFill>
@@ -240,7 +246,7 @@
         <a:srgbClr val="000000"/>
       </a:buClr>
       <a:buFont typeface="Arial"/>
-      <a:defRPr b="0" i="0" sz="1400" u="none" cap="none" strike="noStrike">
+      <a:defRPr b="0" i="0" spc="0" sz="1400" u="none" cap="none" strike="noStrike">
         <a:solidFill>
           <a:srgbClr val="000000"/>
         </a:solidFill>
@@ -264,7 +270,7 @@
         <a:srgbClr val="000000"/>
       </a:buClr>
       <a:buFont typeface="Arial"/>
-      <a:defRPr b="0" i="0" sz="1400" u="none" cap="none" strike="noStrike">
+      <a:defRPr b="0" i="0" spc="0" sz="1400" u="none" cap="none" strike="noStrike">
         <a:solidFill>
           <a:srgbClr val="000000"/>
         </a:solidFill>
@@ -291,7 +297,7 @@
       </p15:sldGuideLst>
     </p:ext>
     <p:ext uri="GoogleSlidesCustomDataVersion2">
-      <go:slidesCustomData xmlns:go="http://customooxmlschemas.google.com/" r:id="rId33" roundtripDataSignature="AMtx7mhQih/8aPmd6MLqAR4rerYWvGIzGw=="/>
+      <go:slidesCustomData xmlns:go="http://customooxmlschemas.google.com/" r:id="rId39" roundtripDataSignature="AMtx7mhuiImu/nzhMYxYvcgasSUwFYloVg=="/>
     </p:ext>
   </p:extLst>
 </p:presentation>
@@ -652,7 +658,7 @@
         <a:srgbClr val="000000"/>
       </a:buClr>
       <a:buFont typeface="Arial"/>
-      <a:defRPr b="0" i="0" sz="1400" u="none" cap="none" strike="noStrike">
+      <a:defRPr b="0" i="0" spc="0" sz="1400" u="none" cap="none" strike="noStrike">
         <a:solidFill>
           <a:srgbClr val="000000"/>
         </a:solidFill>
@@ -676,7 +682,7 @@
         <a:srgbClr val="000000"/>
       </a:buClr>
       <a:buFont typeface="Arial"/>
-      <a:defRPr b="0" i="0" sz="1400" u="none" cap="none" strike="noStrike">
+      <a:defRPr b="0" i="0" spc="0" sz="1400" u="none" cap="none" strike="noStrike">
         <a:solidFill>
           <a:srgbClr val="000000"/>
         </a:solidFill>
@@ -700,7 +706,7 @@
         <a:srgbClr val="000000"/>
       </a:buClr>
       <a:buFont typeface="Arial"/>
-      <a:defRPr b="0" i="0" sz="1400" u="none" cap="none" strike="noStrike">
+      <a:defRPr b="0" i="0" spc="0" sz="1400" u="none" cap="none" strike="noStrike">
         <a:solidFill>
           <a:srgbClr val="000000"/>
         </a:solidFill>
@@ -724,7 +730,7 @@
         <a:srgbClr val="000000"/>
       </a:buClr>
       <a:buFont typeface="Arial"/>
-      <a:defRPr b="0" i="0" sz="1400" u="none" cap="none" strike="noStrike">
+      <a:defRPr b="0" i="0" spc="0" sz="1400" u="none" cap="none" strike="noStrike">
         <a:solidFill>
           <a:srgbClr val="000000"/>
         </a:solidFill>
@@ -748,7 +754,7 @@
         <a:srgbClr val="000000"/>
       </a:buClr>
       <a:buFont typeface="Arial"/>
-      <a:defRPr b="0" i="0" sz="1400" u="none" cap="none" strike="noStrike">
+      <a:defRPr b="0" i="0" spc="0" sz="1400" u="none" cap="none" strike="noStrike">
         <a:solidFill>
           <a:srgbClr val="000000"/>
         </a:solidFill>
@@ -772,7 +778,7 @@
         <a:srgbClr val="000000"/>
       </a:buClr>
       <a:buFont typeface="Arial"/>
-      <a:defRPr b="0" i="0" sz="1400" u="none" cap="none" strike="noStrike">
+      <a:defRPr b="0" i="0" spc="0" sz="1400" u="none" cap="none" strike="noStrike">
         <a:solidFill>
           <a:srgbClr val="000000"/>
         </a:solidFill>
@@ -796,7 +802,7 @@
         <a:srgbClr val="000000"/>
       </a:buClr>
       <a:buFont typeface="Arial"/>
-      <a:defRPr b="0" i="0" sz="1400" u="none" cap="none" strike="noStrike">
+      <a:defRPr b="0" i="0" spc="0" sz="1400" u="none" cap="none" strike="noStrike">
         <a:solidFill>
           <a:srgbClr val="000000"/>
         </a:solidFill>
@@ -820,7 +826,7 @@
         <a:srgbClr val="000000"/>
       </a:buClr>
       <a:buFont typeface="Arial"/>
-      <a:defRPr b="0" i="0" sz="1400" u="none" cap="none" strike="noStrike">
+      <a:defRPr b="0" i="0" spc="0" sz="1400" u="none" cap="none" strike="noStrike">
         <a:solidFill>
           <a:srgbClr val="000000"/>
         </a:solidFill>
@@ -844,7 +850,7 @@
         <a:srgbClr val="000000"/>
       </a:buClr>
       <a:buFont typeface="Arial"/>
-      <a:defRPr b="0" i="0" sz="1400" u="none" cap="none" strike="noStrike">
+      <a:defRPr b="0" i="0" spc="0" sz="1400" u="none" cap="none" strike="noStrike">
         <a:solidFill>
           <a:srgbClr val="000000"/>
         </a:solidFill>
@@ -980,7 +986,7 @@
   <p:cSld>
     <p:spTree>
       <p:nvGrpSpPr>
-        <p:cNvPr id="144" name="Shape 144"/>
+        <p:cNvPr id="143" name="Shape 143"/>
         <p:cNvGrpSpPr/>
         <p:nvPr/>
       </p:nvGrpSpPr>
@@ -994,7 +1000,7 @@
       </p:grpSpPr>
       <p:sp>
         <p:nvSpPr>
-          <p:cNvPr id="145" name="Google Shape;145;p25:notes"/>
+          <p:cNvPr id="144" name="Google Shape;144;p23:notes"/>
           <p:cNvSpPr/>
           <p:nvPr>
             <p:ph idx="2" type="sldImg"/>
@@ -1039,7 +1045,7 @@
       </p:sp>
       <p:sp>
         <p:nvSpPr>
-          <p:cNvPr id="146" name="Google Shape;146;p25:notes"/>
+          <p:cNvPr id="145" name="Google Shape;145;p23:notes"/>
           <p:cNvSpPr txBox="1"/>
           <p:nvPr>
             <p:ph idx="1" type="body"/>
@@ -1097,7 +1103,7 @@
   <p:cSld>
     <p:spTree>
       <p:nvGrpSpPr>
-        <p:cNvPr id="151" name="Shape 151"/>
+        <p:cNvPr id="152" name="Shape 152"/>
         <p:cNvGrpSpPr/>
         <p:nvPr/>
       </p:nvGrpSpPr>
@@ -1111,7 +1117,7 @@
       </p:grpSpPr>
       <p:sp>
         <p:nvSpPr>
-          <p:cNvPr id="152" name="Google Shape;152;p26:notes"/>
+          <p:cNvPr id="153" name="Google Shape;153;p24:notes"/>
           <p:cNvSpPr/>
           <p:nvPr>
             <p:ph idx="2" type="sldImg"/>
@@ -1156,7 +1162,7 @@
       </p:sp>
       <p:sp>
         <p:nvSpPr>
-          <p:cNvPr id="153" name="Google Shape;153;p26:notes"/>
+          <p:cNvPr id="154" name="Google Shape;154;p24:notes"/>
           <p:cNvSpPr txBox="1"/>
           <p:nvPr>
             <p:ph idx="1" type="body"/>
@@ -1214,7 +1220,7 @@
   <p:cSld>
     <p:spTree>
       <p:nvGrpSpPr>
-        <p:cNvPr id="158" name="Shape 158"/>
+        <p:cNvPr id="159" name="Shape 159"/>
         <p:cNvGrpSpPr/>
         <p:nvPr/>
       </p:nvGrpSpPr>
@@ -1228,7 +1234,7 @@
       </p:grpSpPr>
       <p:sp>
         <p:nvSpPr>
-          <p:cNvPr id="159" name="Google Shape;159;p27:notes"/>
+          <p:cNvPr id="160" name="Google Shape;160;g3f4171bfb85_0_0:notes"/>
           <p:cNvSpPr/>
           <p:nvPr>
             <p:ph idx="2" type="sldImg"/>
@@ -1273,7 +1279,7 @@
       </p:sp>
       <p:sp>
         <p:nvSpPr>
-          <p:cNvPr id="160" name="Google Shape;160;p27:notes"/>
+          <p:cNvPr id="161" name="Google Shape;161;g3f4171bfb85_0_0:notes"/>
           <p:cNvSpPr txBox="1"/>
           <p:nvPr>
             <p:ph idx="1" type="body"/>
@@ -1331,7 +1337,7 @@
   <p:cSld>
     <p:spTree>
       <p:nvGrpSpPr>
-        <p:cNvPr id="164" name="Shape 164"/>
+        <p:cNvPr id="165" name="Shape 165"/>
         <p:cNvGrpSpPr/>
         <p:nvPr/>
       </p:nvGrpSpPr>
@@ -1345,7 +1351,7 @@
       </p:grpSpPr>
       <p:sp>
         <p:nvSpPr>
-          <p:cNvPr id="165" name="Google Shape;165;p28:notes"/>
+          <p:cNvPr id="166" name="Google Shape;166;p25:notes"/>
           <p:cNvSpPr/>
           <p:nvPr>
             <p:ph idx="2" type="sldImg"/>
@@ -1390,7 +1396,7 @@
       </p:sp>
       <p:sp>
         <p:nvSpPr>
-          <p:cNvPr id="166" name="Google Shape;166;p28:notes"/>
+          <p:cNvPr id="167" name="Google Shape;167;p25:notes"/>
           <p:cNvSpPr txBox="1"/>
           <p:nvPr>
             <p:ph idx="1" type="body"/>
@@ -1448,7 +1454,7 @@
   <p:cSld>
     <p:spTree>
       <p:nvGrpSpPr>
-        <p:cNvPr id="170" name="Shape 170"/>
+        <p:cNvPr id="172" name="Shape 172"/>
         <p:cNvGrpSpPr/>
         <p:nvPr/>
       </p:nvGrpSpPr>
@@ -1462,7 +1468,7 @@
       </p:grpSpPr>
       <p:sp>
         <p:nvSpPr>
-          <p:cNvPr id="171" name="Google Shape;171;p29:notes"/>
+          <p:cNvPr id="173" name="Google Shape;173;g3f8b106cd52_0_36:notes"/>
           <p:cNvSpPr/>
           <p:nvPr>
             <p:ph idx="2" type="sldImg"/>
@@ -1507,7 +1513,7 @@
       </p:sp>
       <p:sp>
         <p:nvSpPr>
-          <p:cNvPr id="172" name="Google Shape;172;p29:notes"/>
+          <p:cNvPr id="174" name="Google Shape;174;g3f8b106cd52_0_36:notes"/>
           <p:cNvSpPr txBox="1"/>
           <p:nvPr>
             <p:ph idx="1" type="body"/>
@@ -1565,7 +1571,7 @@
   <p:cSld>
     <p:spTree>
       <p:nvGrpSpPr>
-        <p:cNvPr id="176" name="Shape 176"/>
+        <p:cNvPr id="178" name="Shape 178"/>
         <p:cNvGrpSpPr/>
         <p:nvPr/>
       </p:nvGrpSpPr>
@@ -1579,7 +1585,7 @@
       </p:grpSpPr>
       <p:sp>
         <p:nvSpPr>
-          <p:cNvPr id="177" name="Google Shape;177;p30:notes"/>
+          <p:cNvPr id="179" name="Google Shape;179;p26:notes"/>
           <p:cNvSpPr/>
           <p:nvPr>
             <p:ph idx="2" type="sldImg"/>
@@ -1624,7 +1630,7 @@
       </p:sp>
       <p:sp>
         <p:nvSpPr>
-          <p:cNvPr id="178" name="Google Shape;178;p30:notes"/>
+          <p:cNvPr id="180" name="Google Shape;180;p26:notes"/>
           <p:cNvSpPr txBox="1"/>
           <p:nvPr>
             <p:ph idx="1" type="body"/>
@@ -1682,7 +1688,7 @@
   <p:cSld>
     <p:spTree>
       <p:nvGrpSpPr>
-        <p:cNvPr id="181" name="Shape 181"/>
+        <p:cNvPr id="185" name="Shape 185"/>
         <p:cNvGrpSpPr/>
         <p:nvPr/>
       </p:nvGrpSpPr>
@@ -1696,7 +1702,7 @@
       </p:grpSpPr>
       <p:sp>
         <p:nvSpPr>
-          <p:cNvPr id="182" name="Google Shape;182;p31:notes"/>
+          <p:cNvPr id="186" name="Google Shape;186;p27:notes"/>
           <p:cNvSpPr/>
           <p:nvPr>
             <p:ph idx="2" type="sldImg"/>
@@ -1741,7 +1747,7 @@
       </p:sp>
       <p:sp>
         <p:nvSpPr>
-          <p:cNvPr id="183" name="Google Shape;183;p31:notes"/>
+          <p:cNvPr id="187" name="Google Shape;187;p27:notes"/>
           <p:cNvSpPr txBox="1"/>
           <p:nvPr>
             <p:ph idx="1" type="body"/>
@@ -1799,7 +1805,7 @@
   <p:cSld>
     <p:spTree>
       <p:nvGrpSpPr>
-        <p:cNvPr id="187" name="Shape 187"/>
+        <p:cNvPr id="191" name="Shape 191"/>
         <p:cNvGrpSpPr/>
         <p:nvPr/>
       </p:nvGrpSpPr>
@@ -1813,7 +1819,7 @@
       </p:grpSpPr>
       <p:sp>
         <p:nvSpPr>
-          <p:cNvPr id="188" name="Google Shape;188;p32:notes"/>
+          <p:cNvPr id="192" name="Google Shape;192;p28:notes"/>
           <p:cNvSpPr/>
           <p:nvPr>
             <p:ph idx="2" type="sldImg"/>
@@ -1858,7 +1864,7 @@
       </p:sp>
       <p:sp>
         <p:nvSpPr>
-          <p:cNvPr id="189" name="Google Shape;189;p32:notes"/>
+          <p:cNvPr id="193" name="Google Shape;193;p28:notes"/>
           <p:cNvSpPr txBox="1"/>
           <p:nvPr>
             <p:ph idx="1" type="body"/>
@@ -1916,7 +1922,7 @@
   <p:cSld>
     <p:spTree>
       <p:nvGrpSpPr>
-        <p:cNvPr id="193" name="Shape 193"/>
+        <p:cNvPr id="197" name="Shape 197"/>
         <p:cNvGrpSpPr/>
         <p:nvPr/>
       </p:nvGrpSpPr>
@@ -1930,7 +1936,7 @@
       </p:grpSpPr>
       <p:sp>
         <p:nvSpPr>
-          <p:cNvPr id="194" name="Google Shape;194;p33:notes"/>
+          <p:cNvPr id="198" name="Google Shape;198;p29:notes"/>
           <p:cNvSpPr/>
           <p:nvPr>
             <p:ph idx="2" type="sldImg"/>
@@ -1975,7 +1981,7 @@
       </p:sp>
       <p:sp>
         <p:nvSpPr>
-          <p:cNvPr id="195" name="Google Shape;195;p33:notes"/>
+          <p:cNvPr id="199" name="Google Shape;199;p29:notes"/>
           <p:cNvSpPr txBox="1"/>
           <p:nvPr>
             <p:ph idx="1" type="body"/>
@@ -2033,7 +2039,7 @@
   <p:cSld>
     <p:spTree>
       <p:nvGrpSpPr>
-        <p:cNvPr id="199" name="Shape 199"/>
+        <p:cNvPr id="203" name="Shape 203"/>
         <p:cNvGrpSpPr/>
         <p:nvPr/>
       </p:nvGrpSpPr>
@@ -2047,7 +2053,7 @@
       </p:grpSpPr>
       <p:sp>
         <p:nvSpPr>
-          <p:cNvPr id="200" name="Google Shape;200;p34:notes"/>
+          <p:cNvPr id="204" name="Google Shape;204;p30:notes"/>
           <p:cNvSpPr/>
           <p:nvPr>
             <p:ph idx="2" type="sldImg"/>
@@ -2092,7 +2098,7 @@
       </p:sp>
       <p:sp>
         <p:nvSpPr>
-          <p:cNvPr id="201" name="Google Shape;201;p34:notes"/>
+          <p:cNvPr id="205" name="Google Shape;205;p30:notes"/>
           <p:cNvSpPr txBox="1"/>
           <p:nvPr>
             <p:ph idx="1" type="body"/>
@@ -2262,6 +2268,708 @@
 </p:notes>
 </file>
 
+<file path=ppt/notesSlides/notesSlide20.xml><?xml version="1.0" encoding="utf-8"?>
+<p:notes xmlns:a="http://schemas.openxmlformats.org/drawingml/2006/main" xmlns:r="http://schemas.openxmlformats.org/officeDocument/2006/relationships" xmlns:mc="http://schemas.openxmlformats.org/markup-compatibility/2006" xmlns:mv="urn:schemas-microsoft-com:mac:vml" xmlns:p="http://schemas.openxmlformats.org/presentationml/2006/main" xmlns:c="http://schemas.openxmlformats.org/drawingml/2006/chart" xmlns:dgm="http://schemas.openxmlformats.org/drawingml/2006/diagram" xmlns:o="urn:schemas-microsoft-com:office:office" xmlns:v="urn:schemas-microsoft-com:vml" xmlns:pvml="urn:schemas-microsoft-com:office:powerpoint" xmlns:com="http://schemas.openxmlformats.org/drawingml/2006/compatibility" xmlns:p14="http://schemas.microsoft.com/office/powerpoint/2010/main" xmlns:p15="http://schemas.microsoft.com/office/powerpoint/2012/main" xmlns:ahyp="http://schemas.microsoft.com/office/drawing/2018/hyperlinkcolor" showMasterPhAnim="0" showMasterSp="0">
+  <p:cSld>
+    <p:spTree>
+      <p:nvGrpSpPr>
+        <p:cNvPr id="209" name="Shape 209"/>
+        <p:cNvGrpSpPr/>
+        <p:nvPr/>
+      </p:nvGrpSpPr>
+      <p:grpSpPr>
+        <a:xfrm>
+          <a:off x="0" y="0"/>
+          <a:ext cx="0" cy="0"/>
+          <a:chOff x="0" y="0"/>
+          <a:chExt cx="0" cy="0"/>
+        </a:xfrm>
+      </p:grpSpPr>
+      <p:sp>
+        <p:nvSpPr>
+          <p:cNvPr id="210" name="Google Shape;210;g3f8b106cd52_0_49:notes"/>
+          <p:cNvSpPr/>
+          <p:nvPr>
+            <p:ph idx="2" type="sldImg"/>
+          </p:nvPr>
+        </p:nvSpPr>
+        <p:spPr>
+          <a:xfrm>
+            <a:off x="381300" y="685800"/>
+            <a:ext cx="6096000" cy="3429000"/>
+          </a:xfrm>
+          <a:custGeom>
+            <a:rect b="b" l="l" r="r" t="t"/>
+            <a:pathLst>
+              <a:path extrusionOk="0" h="120000" w="120000">
+                <a:moveTo>
+                  <a:pt x="0" y="0"/>
+                </a:moveTo>
+                <a:lnTo>
+                  <a:pt x="120000" y="0"/>
+                </a:lnTo>
+                <a:lnTo>
+                  <a:pt x="120000" y="120000"/>
+                </a:lnTo>
+                <a:lnTo>
+                  <a:pt x="0" y="120000"/>
+                </a:lnTo>
+                <a:close/>
+              </a:path>
+            </a:pathLst>
+          </a:custGeom>
+          <a:noFill/>
+          <a:ln cap="flat" cmpd="sng" w="9525">
+            <a:solidFill>
+              <a:srgbClr val="000000"/>
+            </a:solidFill>
+            <a:prstDash val="solid"/>
+            <a:round/>
+            <a:headEnd len="sm" w="sm" type="none"/>
+            <a:tailEnd len="sm" w="sm" type="none"/>
+          </a:ln>
+        </p:spPr>
+      </p:sp>
+      <p:sp>
+        <p:nvSpPr>
+          <p:cNvPr id="211" name="Google Shape;211;g3f8b106cd52_0_49:notes"/>
+          <p:cNvSpPr txBox="1"/>
+          <p:nvPr>
+            <p:ph idx="1" type="body"/>
+          </p:nvPr>
+        </p:nvSpPr>
+        <p:spPr>
+          <a:xfrm>
+            <a:off x="685800" y="4343400"/>
+            <a:ext cx="5486400" cy="4114800"/>
+          </a:xfrm>
+          <a:prstGeom prst="rect">
+            <a:avLst/>
+          </a:prstGeom>
+          <a:noFill/>
+          <a:ln>
+            <a:noFill/>
+          </a:ln>
+        </p:spPr>
+        <p:txBody>
+          <a:bodyPr anchorCtr="0" anchor="t" bIns="91425" lIns="91425" spcFirstLastPara="1" rIns="91425" wrap="square" tIns="91425">
+            <a:noAutofit/>
+          </a:bodyPr>
+          <a:lstStyle/>
+          <a:p>
+            <a:pPr indent="0" lvl="0" marL="0" rtl="0" algn="l">
+              <a:lnSpc>
+                <a:spcPct val="100000"/>
+              </a:lnSpc>
+              <a:spcBef>
+                <a:spcPts val="0"/>
+              </a:spcBef>
+              <a:spcAft>
+                <a:spcPts val="0"/>
+              </a:spcAft>
+              <a:buSzPts val="1100"/>
+              <a:buNone/>
+            </a:pPr>
+            <a:r>
+              <a:t/>
+            </a:r>
+            <a:endParaRPr/>
+          </a:p>
+        </p:txBody>
+      </p:sp>
+    </p:spTree>
+  </p:cSld>
+  <p:clrMapOvr>
+    <a:masterClrMapping/>
+  </p:clrMapOvr>
+</p:notes>
+</file>
+
+<file path=ppt/notesSlides/notesSlide21.xml><?xml version="1.0" encoding="utf-8"?>
+<p:notes xmlns:a="http://schemas.openxmlformats.org/drawingml/2006/main" xmlns:r="http://schemas.openxmlformats.org/officeDocument/2006/relationships" xmlns:mc="http://schemas.openxmlformats.org/markup-compatibility/2006" xmlns:mv="urn:schemas-microsoft-com:mac:vml" xmlns:p="http://schemas.openxmlformats.org/presentationml/2006/main" xmlns:c="http://schemas.openxmlformats.org/drawingml/2006/chart" xmlns:dgm="http://schemas.openxmlformats.org/drawingml/2006/diagram" xmlns:o="urn:schemas-microsoft-com:office:office" xmlns:v="urn:schemas-microsoft-com:vml" xmlns:pvml="urn:schemas-microsoft-com:office:powerpoint" xmlns:com="http://schemas.openxmlformats.org/drawingml/2006/compatibility" xmlns:p14="http://schemas.microsoft.com/office/powerpoint/2010/main" xmlns:p15="http://schemas.microsoft.com/office/powerpoint/2012/main" xmlns:ahyp="http://schemas.microsoft.com/office/drawing/2018/hyperlinkcolor" showMasterPhAnim="0" showMasterSp="0">
+  <p:cSld>
+    <p:spTree>
+      <p:nvGrpSpPr>
+        <p:cNvPr id="215" name="Shape 215"/>
+        <p:cNvGrpSpPr/>
+        <p:nvPr/>
+      </p:nvGrpSpPr>
+      <p:grpSpPr>
+        <a:xfrm>
+          <a:off x="0" y="0"/>
+          <a:ext cx="0" cy="0"/>
+          <a:chOff x="0" y="0"/>
+          <a:chExt cx="0" cy="0"/>
+        </a:xfrm>
+      </p:grpSpPr>
+      <p:sp>
+        <p:nvSpPr>
+          <p:cNvPr id="216" name="Google Shape;216;p31:notes"/>
+          <p:cNvSpPr/>
+          <p:nvPr>
+            <p:ph idx="2" type="sldImg"/>
+          </p:nvPr>
+        </p:nvSpPr>
+        <p:spPr>
+          <a:xfrm>
+            <a:off x="381300" y="685800"/>
+            <a:ext cx="6096000" cy="3429000"/>
+          </a:xfrm>
+          <a:custGeom>
+            <a:rect b="b" l="l" r="r" t="t"/>
+            <a:pathLst>
+              <a:path extrusionOk="0" h="120000" w="120000">
+                <a:moveTo>
+                  <a:pt x="0" y="0"/>
+                </a:moveTo>
+                <a:lnTo>
+                  <a:pt x="120000" y="0"/>
+                </a:lnTo>
+                <a:lnTo>
+                  <a:pt x="120000" y="120000"/>
+                </a:lnTo>
+                <a:lnTo>
+                  <a:pt x="0" y="120000"/>
+                </a:lnTo>
+                <a:close/>
+              </a:path>
+            </a:pathLst>
+          </a:custGeom>
+          <a:noFill/>
+          <a:ln cap="flat" cmpd="sng" w="9525">
+            <a:solidFill>
+              <a:srgbClr val="000000"/>
+            </a:solidFill>
+            <a:prstDash val="solid"/>
+            <a:round/>
+            <a:headEnd len="sm" w="sm" type="none"/>
+            <a:tailEnd len="sm" w="sm" type="none"/>
+          </a:ln>
+        </p:spPr>
+      </p:sp>
+      <p:sp>
+        <p:nvSpPr>
+          <p:cNvPr id="217" name="Google Shape;217;p31:notes"/>
+          <p:cNvSpPr txBox="1"/>
+          <p:nvPr>
+            <p:ph idx="1" type="body"/>
+          </p:nvPr>
+        </p:nvSpPr>
+        <p:spPr>
+          <a:xfrm>
+            <a:off x="685800" y="4343400"/>
+            <a:ext cx="5486400" cy="4114800"/>
+          </a:xfrm>
+          <a:prstGeom prst="rect">
+            <a:avLst/>
+          </a:prstGeom>
+          <a:noFill/>
+          <a:ln>
+            <a:noFill/>
+          </a:ln>
+        </p:spPr>
+        <p:txBody>
+          <a:bodyPr anchorCtr="0" anchor="t" bIns="91425" lIns="91425" spcFirstLastPara="1" rIns="91425" wrap="square" tIns="91425">
+            <a:noAutofit/>
+          </a:bodyPr>
+          <a:lstStyle/>
+          <a:p>
+            <a:pPr indent="0" lvl="0" marL="0" rtl="0" algn="l">
+              <a:lnSpc>
+                <a:spcPct val="100000"/>
+              </a:lnSpc>
+              <a:spcBef>
+                <a:spcPts val="0"/>
+              </a:spcBef>
+              <a:spcAft>
+                <a:spcPts val="0"/>
+              </a:spcAft>
+              <a:buSzPts val="1100"/>
+              <a:buNone/>
+            </a:pPr>
+            <a:r>
+              <a:t/>
+            </a:r>
+            <a:endParaRPr/>
+          </a:p>
+        </p:txBody>
+      </p:sp>
+    </p:spTree>
+  </p:cSld>
+  <p:clrMapOvr>
+    <a:masterClrMapping/>
+  </p:clrMapOvr>
+</p:notes>
+</file>
+
+<file path=ppt/notesSlides/notesSlide22.xml><?xml version="1.0" encoding="utf-8"?>
+<p:notes xmlns:a="http://schemas.openxmlformats.org/drawingml/2006/main" xmlns:r="http://schemas.openxmlformats.org/officeDocument/2006/relationships" xmlns:mc="http://schemas.openxmlformats.org/markup-compatibility/2006" xmlns:mv="urn:schemas-microsoft-com:mac:vml" xmlns:p="http://schemas.openxmlformats.org/presentationml/2006/main" xmlns:c="http://schemas.openxmlformats.org/drawingml/2006/chart" xmlns:dgm="http://schemas.openxmlformats.org/drawingml/2006/diagram" xmlns:o="urn:schemas-microsoft-com:office:office" xmlns:v="urn:schemas-microsoft-com:vml" xmlns:pvml="urn:schemas-microsoft-com:office:powerpoint" xmlns:com="http://schemas.openxmlformats.org/drawingml/2006/compatibility" xmlns:p14="http://schemas.microsoft.com/office/powerpoint/2010/main" xmlns:p15="http://schemas.microsoft.com/office/powerpoint/2012/main" xmlns:ahyp="http://schemas.microsoft.com/office/drawing/2018/hyperlinkcolor" showMasterPhAnim="0" showMasterSp="0">
+  <p:cSld>
+    <p:spTree>
+      <p:nvGrpSpPr>
+        <p:cNvPr id="221" name="Shape 221"/>
+        <p:cNvGrpSpPr/>
+        <p:nvPr/>
+      </p:nvGrpSpPr>
+      <p:grpSpPr>
+        <a:xfrm>
+          <a:off x="0" y="0"/>
+          <a:ext cx="0" cy="0"/>
+          <a:chOff x="0" y="0"/>
+          <a:chExt cx="0" cy="0"/>
+        </a:xfrm>
+      </p:grpSpPr>
+      <p:sp>
+        <p:nvSpPr>
+          <p:cNvPr id="222" name="Google Shape;222;p32:notes"/>
+          <p:cNvSpPr/>
+          <p:nvPr>
+            <p:ph idx="2" type="sldImg"/>
+          </p:nvPr>
+        </p:nvSpPr>
+        <p:spPr>
+          <a:xfrm>
+            <a:off x="381300" y="685800"/>
+            <a:ext cx="6096000" cy="3429000"/>
+          </a:xfrm>
+          <a:custGeom>
+            <a:rect b="b" l="l" r="r" t="t"/>
+            <a:pathLst>
+              <a:path extrusionOk="0" h="120000" w="120000">
+                <a:moveTo>
+                  <a:pt x="0" y="0"/>
+                </a:moveTo>
+                <a:lnTo>
+                  <a:pt x="120000" y="0"/>
+                </a:lnTo>
+                <a:lnTo>
+                  <a:pt x="120000" y="120000"/>
+                </a:lnTo>
+                <a:lnTo>
+                  <a:pt x="0" y="120000"/>
+                </a:lnTo>
+                <a:close/>
+              </a:path>
+            </a:pathLst>
+          </a:custGeom>
+          <a:noFill/>
+          <a:ln cap="flat" cmpd="sng" w="9525">
+            <a:solidFill>
+              <a:srgbClr val="000000"/>
+            </a:solidFill>
+            <a:prstDash val="solid"/>
+            <a:round/>
+            <a:headEnd len="sm" w="sm" type="none"/>
+            <a:tailEnd len="sm" w="sm" type="none"/>
+          </a:ln>
+        </p:spPr>
+      </p:sp>
+      <p:sp>
+        <p:nvSpPr>
+          <p:cNvPr id="223" name="Google Shape;223;p32:notes"/>
+          <p:cNvSpPr txBox="1"/>
+          <p:nvPr>
+            <p:ph idx="1" type="body"/>
+          </p:nvPr>
+        </p:nvSpPr>
+        <p:spPr>
+          <a:xfrm>
+            <a:off x="685800" y="4343400"/>
+            <a:ext cx="5486400" cy="4114800"/>
+          </a:xfrm>
+          <a:prstGeom prst="rect">
+            <a:avLst/>
+          </a:prstGeom>
+          <a:noFill/>
+          <a:ln>
+            <a:noFill/>
+          </a:ln>
+        </p:spPr>
+        <p:txBody>
+          <a:bodyPr anchorCtr="0" anchor="t" bIns="91425" lIns="91425" spcFirstLastPara="1" rIns="91425" wrap="square" tIns="91425">
+            <a:noAutofit/>
+          </a:bodyPr>
+          <a:lstStyle/>
+          <a:p>
+            <a:pPr indent="0" lvl="0" marL="0" rtl="0" algn="l">
+              <a:lnSpc>
+                <a:spcPct val="100000"/>
+              </a:lnSpc>
+              <a:spcBef>
+                <a:spcPts val="0"/>
+              </a:spcBef>
+              <a:spcAft>
+                <a:spcPts val="0"/>
+              </a:spcAft>
+              <a:buSzPts val="1100"/>
+              <a:buNone/>
+            </a:pPr>
+            <a:r>
+              <a:t/>
+            </a:r>
+            <a:endParaRPr/>
+          </a:p>
+        </p:txBody>
+      </p:sp>
+    </p:spTree>
+  </p:cSld>
+  <p:clrMapOvr>
+    <a:masterClrMapping/>
+  </p:clrMapOvr>
+</p:notes>
+</file>
+
+<file path=ppt/notesSlides/notesSlide23.xml><?xml version="1.0" encoding="utf-8"?>
+<p:notes xmlns:a="http://schemas.openxmlformats.org/drawingml/2006/main" xmlns:r="http://schemas.openxmlformats.org/officeDocument/2006/relationships" xmlns:mc="http://schemas.openxmlformats.org/markup-compatibility/2006" xmlns:mv="urn:schemas-microsoft-com:mac:vml" xmlns:p="http://schemas.openxmlformats.org/presentationml/2006/main" xmlns:c="http://schemas.openxmlformats.org/drawingml/2006/chart" xmlns:dgm="http://schemas.openxmlformats.org/drawingml/2006/diagram" xmlns:o="urn:schemas-microsoft-com:office:office" xmlns:v="urn:schemas-microsoft-com:vml" xmlns:pvml="urn:schemas-microsoft-com:office:powerpoint" xmlns:com="http://schemas.openxmlformats.org/drawingml/2006/compatibility" xmlns:p14="http://schemas.microsoft.com/office/powerpoint/2010/main" xmlns:p15="http://schemas.microsoft.com/office/powerpoint/2012/main" xmlns:ahyp="http://schemas.microsoft.com/office/drawing/2018/hyperlinkcolor" showMasterPhAnim="0" showMasterSp="0">
+  <p:cSld>
+    <p:spTree>
+      <p:nvGrpSpPr>
+        <p:cNvPr id="227" name="Shape 227"/>
+        <p:cNvGrpSpPr/>
+        <p:nvPr/>
+      </p:nvGrpSpPr>
+      <p:grpSpPr>
+        <a:xfrm>
+          <a:off x="0" y="0"/>
+          <a:ext cx="0" cy="0"/>
+          <a:chOff x="0" y="0"/>
+          <a:chExt cx="0" cy="0"/>
+        </a:xfrm>
+      </p:grpSpPr>
+      <p:sp>
+        <p:nvSpPr>
+          <p:cNvPr id="228" name="Google Shape;228;g3f4171bfb85_0_12:notes"/>
+          <p:cNvSpPr/>
+          <p:nvPr>
+            <p:ph idx="2" type="sldImg"/>
+          </p:nvPr>
+        </p:nvSpPr>
+        <p:spPr>
+          <a:xfrm>
+            <a:off x="381300" y="685800"/>
+            <a:ext cx="6096000" cy="3429000"/>
+          </a:xfrm>
+          <a:custGeom>
+            <a:rect b="b" l="l" r="r" t="t"/>
+            <a:pathLst>
+              <a:path extrusionOk="0" h="120000" w="120000">
+                <a:moveTo>
+                  <a:pt x="0" y="0"/>
+                </a:moveTo>
+                <a:lnTo>
+                  <a:pt x="120000" y="0"/>
+                </a:lnTo>
+                <a:lnTo>
+                  <a:pt x="120000" y="120000"/>
+                </a:lnTo>
+                <a:lnTo>
+                  <a:pt x="0" y="120000"/>
+                </a:lnTo>
+                <a:close/>
+              </a:path>
+            </a:pathLst>
+          </a:custGeom>
+          <a:noFill/>
+          <a:ln cap="flat" cmpd="sng" w="9525">
+            <a:solidFill>
+              <a:srgbClr val="000000"/>
+            </a:solidFill>
+            <a:prstDash val="solid"/>
+            <a:round/>
+            <a:headEnd len="sm" w="sm" type="none"/>
+            <a:tailEnd len="sm" w="sm" type="none"/>
+          </a:ln>
+        </p:spPr>
+      </p:sp>
+      <p:sp>
+        <p:nvSpPr>
+          <p:cNvPr id="229" name="Google Shape;229;g3f4171bfb85_0_12:notes"/>
+          <p:cNvSpPr txBox="1"/>
+          <p:nvPr>
+            <p:ph idx="1" type="body"/>
+          </p:nvPr>
+        </p:nvSpPr>
+        <p:spPr>
+          <a:xfrm>
+            <a:off x="685800" y="4343400"/>
+            <a:ext cx="5486400" cy="4114800"/>
+          </a:xfrm>
+          <a:prstGeom prst="rect">
+            <a:avLst/>
+          </a:prstGeom>
+          <a:noFill/>
+          <a:ln>
+            <a:noFill/>
+          </a:ln>
+        </p:spPr>
+        <p:txBody>
+          <a:bodyPr anchorCtr="0" anchor="t" bIns="91425" lIns="91425" spcFirstLastPara="1" rIns="91425" wrap="square" tIns="91425">
+            <a:noAutofit/>
+          </a:bodyPr>
+          <a:lstStyle/>
+          <a:p>
+            <a:pPr indent="0" lvl="0" marL="0" rtl="0" algn="l">
+              <a:lnSpc>
+                <a:spcPct val="100000"/>
+              </a:lnSpc>
+              <a:spcBef>
+                <a:spcPts val="0"/>
+              </a:spcBef>
+              <a:spcAft>
+                <a:spcPts val="0"/>
+              </a:spcAft>
+              <a:buSzPts val="1100"/>
+              <a:buNone/>
+            </a:pPr>
+            <a:r>
+              <a:t/>
+            </a:r>
+            <a:endParaRPr/>
+          </a:p>
+        </p:txBody>
+      </p:sp>
+    </p:spTree>
+  </p:cSld>
+  <p:clrMapOvr>
+    <a:masterClrMapping/>
+  </p:clrMapOvr>
+</p:notes>
+</file>
+
+<file path=ppt/notesSlides/notesSlide24.xml><?xml version="1.0" encoding="utf-8"?>
+<p:notes xmlns:a="http://schemas.openxmlformats.org/drawingml/2006/main" xmlns:r="http://schemas.openxmlformats.org/officeDocument/2006/relationships" xmlns:mc="http://schemas.openxmlformats.org/markup-compatibility/2006" xmlns:mv="urn:schemas-microsoft-com:mac:vml" xmlns:p="http://schemas.openxmlformats.org/presentationml/2006/main" xmlns:c="http://schemas.openxmlformats.org/drawingml/2006/chart" xmlns:dgm="http://schemas.openxmlformats.org/drawingml/2006/diagram" xmlns:o="urn:schemas-microsoft-com:office:office" xmlns:v="urn:schemas-microsoft-com:vml" xmlns:pvml="urn:schemas-microsoft-com:office:powerpoint" xmlns:com="http://schemas.openxmlformats.org/drawingml/2006/compatibility" xmlns:p14="http://schemas.microsoft.com/office/powerpoint/2010/main" xmlns:p15="http://schemas.microsoft.com/office/powerpoint/2012/main" xmlns:ahyp="http://schemas.microsoft.com/office/drawing/2018/hyperlinkcolor" showMasterPhAnim="0" showMasterSp="0">
+  <p:cSld>
+    <p:spTree>
+      <p:nvGrpSpPr>
+        <p:cNvPr id="233" name="Shape 233"/>
+        <p:cNvGrpSpPr/>
+        <p:nvPr/>
+      </p:nvGrpSpPr>
+      <p:grpSpPr>
+        <a:xfrm>
+          <a:off x="0" y="0"/>
+          <a:ext cx="0" cy="0"/>
+          <a:chOff x="0" y="0"/>
+          <a:chExt cx="0" cy="0"/>
+        </a:xfrm>
+      </p:grpSpPr>
+      <p:sp>
+        <p:nvSpPr>
+          <p:cNvPr id="234" name="Google Shape;234;p33:notes"/>
+          <p:cNvSpPr/>
+          <p:nvPr>
+            <p:ph idx="2" type="sldImg"/>
+          </p:nvPr>
+        </p:nvSpPr>
+        <p:spPr>
+          <a:xfrm>
+            <a:off x="381300" y="685800"/>
+            <a:ext cx="6096000" cy="3429000"/>
+          </a:xfrm>
+          <a:custGeom>
+            <a:rect b="b" l="l" r="r" t="t"/>
+            <a:pathLst>
+              <a:path extrusionOk="0" h="120000" w="120000">
+                <a:moveTo>
+                  <a:pt x="0" y="0"/>
+                </a:moveTo>
+                <a:lnTo>
+                  <a:pt x="120000" y="0"/>
+                </a:lnTo>
+                <a:lnTo>
+                  <a:pt x="120000" y="120000"/>
+                </a:lnTo>
+                <a:lnTo>
+                  <a:pt x="0" y="120000"/>
+                </a:lnTo>
+                <a:close/>
+              </a:path>
+            </a:pathLst>
+          </a:custGeom>
+          <a:noFill/>
+          <a:ln cap="flat" cmpd="sng" w="9525">
+            <a:solidFill>
+              <a:srgbClr val="000000"/>
+            </a:solidFill>
+            <a:prstDash val="solid"/>
+            <a:round/>
+            <a:headEnd len="sm" w="sm" type="none"/>
+            <a:tailEnd len="sm" w="sm" type="none"/>
+          </a:ln>
+        </p:spPr>
+      </p:sp>
+      <p:sp>
+        <p:nvSpPr>
+          <p:cNvPr id="235" name="Google Shape;235;p33:notes"/>
+          <p:cNvSpPr txBox="1"/>
+          <p:nvPr>
+            <p:ph idx="1" type="body"/>
+          </p:nvPr>
+        </p:nvSpPr>
+        <p:spPr>
+          <a:xfrm>
+            <a:off x="685800" y="4343400"/>
+            <a:ext cx="5486400" cy="4114800"/>
+          </a:xfrm>
+          <a:prstGeom prst="rect">
+            <a:avLst/>
+          </a:prstGeom>
+          <a:noFill/>
+          <a:ln>
+            <a:noFill/>
+          </a:ln>
+        </p:spPr>
+        <p:txBody>
+          <a:bodyPr anchorCtr="0" anchor="t" bIns="91425" lIns="91425" spcFirstLastPara="1" rIns="91425" wrap="square" tIns="91425">
+            <a:noAutofit/>
+          </a:bodyPr>
+          <a:lstStyle/>
+          <a:p>
+            <a:pPr indent="0" lvl="0" marL="0" rtl="0" algn="l">
+              <a:lnSpc>
+                <a:spcPct val="100000"/>
+              </a:lnSpc>
+              <a:spcBef>
+                <a:spcPts val="0"/>
+              </a:spcBef>
+              <a:spcAft>
+                <a:spcPts val="0"/>
+              </a:spcAft>
+              <a:buSzPts val="1100"/>
+              <a:buNone/>
+            </a:pPr>
+            <a:r>
+              <a:t/>
+            </a:r>
+            <a:endParaRPr/>
+          </a:p>
+        </p:txBody>
+      </p:sp>
+    </p:spTree>
+  </p:cSld>
+  <p:clrMapOvr>
+    <a:masterClrMapping/>
+  </p:clrMapOvr>
+</p:notes>
+</file>
+
+<file path=ppt/notesSlides/notesSlide25.xml><?xml version="1.0" encoding="utf-8"?>
+<p:notes xmlns:a="http://schemas.openxmlformats.org/drawingml/2006/main" xmlns:r="http://schemas.openxmlformats.org/officeDocument/2006/relationships" xmlns:mc="http://schemas.openxmlformats.org/markup-compatibility/2006" xmlns:mv="urn:schemas-microsoft-com:mac:vml" xmlns:p="http://schemas.openxmlformats.org/presentationml/2006/main" xmlns:c="http://schemas.openxmlformats.org/drawingml/2006/chart" xmlns:dgm="http://schemas.openxmlformats.org/drawingml/2006/diagram" xmlns:o="urn:schemas-microsoft-com:office:office" xmlns:v="urn:schemas-microsoft-com:vml" xmlns:pvml="urn:schemas-microsoft-com:office:powerpoint" xmlns:com="http://schemas.openxmlformats.org/drawingml/2006/compatibility" xmlns:p14="http://schemas.microsoft.com/office/powerpoint/2010/main" xmlns:p15="http://schemas.microsoft.com/office/powerpoint/2012/main" xmlns:ahyp="http://schemas.microsoft.com/office/drawing/2018/hyperlinkcolor" showMasterPhAnim="0" showMasterSp="0">
+  <p:cSld>
+    <p:spTree>
+      <p:nvGrpSpPr>
+        <p:cNvPr id="239" name="Shape 239"/>
+        <p:cNvGrpSpPr/>
+        <p:nvPr/>
+      </p:nvGrpSpPr>
+      <p:grpSpPr>
+        <a:xfrm>
+          <a:off x="0" y="0"/>
+          <a:ext cx="0" cy="0"/>
+          <a:chOff x="0" y="0"/>
+          <a:chExt cx="0" cy="0"/>
+        </a:xfrm>
+      </p:grpSpPr>
+      <p:sp>
+        <p:nvSpPr>
+          <p:cNvPr id="240" name="Google Shape;240;p34:notes"/>
+          <p:cNvSpPr/>
+          <p:nvPr>
+            <p:ph idx="2" type="sldImg"/>
+          </p:nvPr>
+        </p:nvSpPr>
+        <p:spPr>
+          <a:xfrm>
+            <a:off x="381300" y="685800"/>
+            <a:ext cx="6096000" cy="3429000"/>
+          </a:xfrm>
+          <a:custGeom>
+            <a:rect b="b" l="l" r="r" t="t"/>
+            <a:pathLst>
+              <a:path extrusionOk="0" h="120000" w="120000">
+                <a:moveTo>
+                  <a:pt x="0" y="0"/>
+                </a:moveTo>
+                <a:lnTo>
+                  <a:pt x="120000" y="0"/>
+                </a:lnTo>
+                <a:lnTo>
+                  <a:pt x="120000" y="120000"/>
+                </a:lnTo>
+                <a:lnTo>
+                  <a:pt x="0" y="120000"/>
+                </a:lnTo>
+                <a:close/>
+              </a:path>
+            </a:pathLst>
+          </a:custGeom>
+          <a:noFill/>
+          <a:ln cap="flat" cmpd="sng" w="9525">
+            <a:solidFill>
+              <a:srgbClr val="000000"/>
+            </a:solidFill>
+            <a:prstDash val="solid"/>
+            <a:round/>
+            <a:headEnd len="sm" w="sm" type="none"/>
+            <a:tailEnd len="sm" w="sm" type="none"/>
+          </a:ln>
+        </p:spPr>
+      </p:sp>
+      <p:sp>
+        <p:nvSpPr>
+          <p:cNvPr id="241" name="Google Shape;241;p34:notes"/>
+          <p:cNvSpPr txBox="1"/>
+          <p:nvPr>
+            <p:ph idx="1" type="body"/>
+          </p:nvPr>
+        </p:nvSpPr>
+        <p:spPr>
+          <a:xfrm>
+            <a:off x="685800" y="4343400"/>
+            <a:ext cx="5486400" cy="4114800"/>
+          </a:xfrm>
+          <a:prstGeom prst="rect">
+            <a:avLst/>
+          </a:prstGeom>
+          <a:noFill/>
+          <a:ln>
+            <a:noFill/>
+          </a:ln>
+        </p:spPr>
+        <p:txBody>
+          <a:bodyPr anchorCtr="0" anchor="t" bIns="91425" lIns="91425" spcFirstLastPara="1" rIns="91425" wrap="square" tIns="91425">
+            <a:noAutofit/>
+          </a:bodyPr>
+          <a:lstStyle/>
+          <a:p>
+            <a:pPr indent="0" lvl="0" marL="0" rtl="0" algn="l">
+              <a:lnSpc>
+                <a:spcPct val="100000"/>
+              </a:lnSpc>
+              <a:spcBef>
+                <a:spcPts val="0"/>
+              </a:spcBef>
+              <a:spcAft>
+                <a:spcPts val="0"/>
+              </a:spcAft>
+              <a:buSzPts val="1100"/>
+              <a:buNone/>
+            </a:pPr>
+            <a:r>
+              <a:t/>
+            </a:r>
+            <a:endParaRPr/>
+          </a:p>
+        </p:txBody>
+      </p:sp>
+    </p:spTree>
+  </p:cSld>
+  <p:clrMapOvr>
+    <a:masterClrMapping/>
+  </p:clrMapOvr>
+</p:notes>
+</file>
+
 <file path=ppt/notesSlides/notesSlide3.xml><?xml version="1.0" encoding="utf-8"?>
 <p:notes xmlns:a="http://schemas.openxmlformats.org/drawingml/2006/main" xmlns:r="http://schemas.openxmlformats.org/officeDocument/2006/relationships" xmlns:mc="http://schemas.openxmlformats.org/markup-compatibility/2006" xmlns:mv="urn:schemas-microsoft-com:mac:vml" xmlns:p="http://schemas.openxmlformats.org/presentationml/2006/main" xmlns:c="http://schemas.openxmlformats.org/drawingml/2006/chart" xmlns:dgm="http://schemas.openxmlformats.org/drawingml/2006/diagram" xmlns:o="urn:schemas-microsoft-com:office:office" xmlns:v="urn:schemas-microsoft-com:vml" xmlns:pvml="urn:schemas-microsoft-com:office:powerpoint" xmlns:com="http://schemas.openxmlformats.org/drawingml/2006/compatibility" xmlns:p14="http://schemas.microsoft.com/office/powerpoint/2010/main" xmlns:p15="http://schemas.microsoft.com/office/powerpoint/2012/main" xmlns:ahyp="http://schemas.microsoft.com/office/drawing/2018/hyperlinkcolor" showMasterPhAnim="0" showMasterSp="0">
   <p:cSld>
@@ -2398,7 +3106,205 @@
       </p:grpSpPr>
       <p:sp>
         <p:nvSpPr>
-          <p:cNvPr id="100" name="Google Shape;100;p19:notes"/>
+          <p:cNvPr id="100" name="Google Shape;100;g3f8b106cd52_0_2:notes"/>
+          <p:cNvSpPr/>
+          <p:nvPr>
+            <p:ph idx="2" type="sldImg"/>
+          </p:nvPr>
+        </p:nvSpPr>
+        <p:spPr>
+          <a:xfrm>
+            <a:off x="381300" y="685800"/>
+            <a:ext cx="6096000" cy="3429000"/>
+          </a:xfrm>
+          <a:custGeom>
+            <a:rect b="b" l="l" r="r" t="t"/>
+            <a:pathLst>
+              <a:path extrusionOk="0" h="120000" w="120000">
+                <a:moveTo>
+                  <a:pt x="0" y="0"/>
+                </a:moveTo>
+                <a:lnTo>
+                  <a:pt x="120000" y="0"/>
+                </a:lnTo>
+                <a:lnTo>
+                  <a:pt x="120000" y="120000"/>
+                </a:lnTo>
+                <a:lnTo>
+                  <a:pt x="0" y="120000"/>
+                </a:lnTo>
+                <a:close/>
+              </a:path>
+            </a:pathLst>
+          </a:custGeom>
+        </p:spPr>
+      </p:sp>
+      <p:sp>
+        <p:nvSpPr>
+          <p:cNvPr id="101" name="Google Shape;101;g3f8b106cd52_0_2:notes"/>
+          <p:cNvSpPr txBox="1"/>
+          <p:nvPr>
+            <p:ph idx="1" type="body"/>
+          </p:nvPr>
+        </p:nvSpPr>
+        <p:spPr>
+          <a:xfrm>
+            <a:off x="685800" y="4343400"/>
+            <a:ext cx="5486400" cy="4114800"/>
+          </a:xfrm>
+          <a:prstGeom prst="rect">
+            <a:avLst/>
+          </a:prstGeom>
+        </p:spPr>
+        <p:txBody>
+          <a:bodyPr anchorCtr="0" anchor="t" bIns="91425" lIns="91425" spcFirstLastPara="1" rIns="91425" wrap="square" tIns="91425">
+            <a:noAutofit/>
+          </a:bodyPr>
+          <a:lstStyle/>
+          <a:p>
+            <a:pPr indent="0" lvl="0" marL="0" rtl="0" algn="l">
+              <a:spcBef>
+                <a:spcPts val="0"/>
+              </a:spcBef>
+              <a:spcAft>
+                <a:spcPts val="0"/>
+              </a:spcAft>
+              <a:buNone/>
+            </a:pPr>
+            <a:r>
+              <a:t/>
+            </a:r>
+            <a:endParaRPr/>
+          </a:p>
+        </p:txBody>
+      </p:sp>
+    </p:spTree>
+  </p:cSld>
+  <p:clrMapOvr>
+    <a:masterClrMapping/>
+  </p:clrMapOvr>
+</p:notes>
+</file>
+
+<file path=ppt/notesSlides/notesSlide5.xml><?xml version="1.0" encoding="utf-8"?>
+<p:notes xmlns:a="http://schemas.openxmlformats.org/drawingml/2006/main" xmlns:r="http://schemas.openxmlformats.org/officeDocument/2006/relationships" xmlns:mc="http://schemas.openxmlformats.org/markup-compatibility/2006" xmlns:mv="urn:schemas-microsoft-com:mac:vml" xmlns:p="http://schemas.openxmlformats.org/presentationml/2006/main" xmlns:c="http://schemas.openxmlformats.org/drawingml/2006/chart" xmlns:dgm="http://schemas.openxmlformats.org/drawingml/2006/diagram" xmlns:o="urn:schemas-microsoft-com:office:office" xmlns:v="urn:schemas-microsoft-com:vml" xmlns:pvml="urn:schemas-microsoft-com:office:powerpoint" xmlns:com="http://schemas.openxmlformats.org/drawingml/2006/compatibility" xmlns:p14="http://schemas.microsoft.com/office/powerpoint/2010/main" xmlns:p15="http://schemas.microsoft.com/office/powerpoint/2012/main" xmlns:ahyp="http://schemas.microsoft.com/office/drawing/2018/hyperlinkcolor" showMasterPhAnim="0" showMasterSp="0">
+  <p:cSld>
+    <p:spTree>
+      <p:nvGrpSpPr>
+        <p:cNvPr id="108" name="Shape 108"/>
+        <p:cNvGrpSpPr/>
+        <p:nvPr/>
+      </p:nvGrpSpPr>
+      <p:grpSpPr>
+        <a:xfrm>
+          <a:off x="0" y="0"/>
+          <a:ext cx="0" cy="0"/>
+          <a:chOff x="0" y="0"/>
+          <a:chExt cx="0" cy="0"/>
+        </a:xfrm>
+      </p:grpSpPr>
+      <p:sp>
+        <p:nvSpPr>
+          <p:cNvPr id="109" name="Google Shape;109;g3f8b106cd52_0_27:notes"/>
+          <p:cNvSpPr/>
+          <p:nvPr>
+            <p:ph idx="2" type="sldImg"/>
+          </p:nvPr>
+        </p:nvSpPr>
+        <p:spPr>
+          <a:xfrm>
+            <a:off x="381300" y="685800"/>
+            <a:ext cx="6096000" cy="3429000"/>
+          </a:xfrm>
+          <a:custGeom>
+            <a:rect b="b" l="l" r="r" t="t"/>
+            <a:pathLst>
+              <a:path extrusionOk="0" h="120000" w="120000">
+                <a:moveTo>
+                  <a:pt x="0" y="0"/>
+                </a:moveTo>
+                <a:lnTo>
+                  <a:pt x="120000" y="0"/>
+                </a:lnTo>
+                <a:lnTo>
+                  <a:pt x="120000" y="120000"/>
+                </a:lnTo>
+                <a:lnTo>
+                  <a:pt x="0" y="120000"/>
+                </a:lnTo>
+                <a:close/>
+              </a:path>
+            </a:pathLst>
+          </a:custGeom>
+        </p:spPr>
+      </p:sp>
+      <p:sp>
+        <p:nvSpPr>
+          <p:cNvPr id="110" name="Google Shape;110;g3f8b106cd52_0_27:notes"/>
+          <p:cNvSpPr txBox="1"/>
+          <p:nvPr>
+            <p:ph idx="1" type="body"/>
+          </p:nvPr>
+        </p:nvSpPr>
+        <p:spPr>
+          <a:xfrm>
+            <a:off x="685800" y="4343400"/>
+            <a:ext cx="5486400" cy="4114800"/>
+          </a:xfrm>
+          <a:prstGeom prst="rect">
+            <a:avLst/>
+          </a:prstGeom>
+        </p:spPr>
+        <p:txBody>
+          <a:bodyPr anchorCtr="0" anchor="t" bIns="91425" lIns="91425" spcFirstLastPara="1" rIns="91425" wrap="square" tIns="91425">
+            <a:noAutofit/>
+          </a:bodyPr>
+          <a:lstStyle/>
+          <a:p>
+            <a:pPr indent="0" lvl="0" marL="0" rtl="0" algn="l">
+              <a:spcBef>
+                <a:spcPts val="0"/>
+              </a:spcBef>
+              <a:spcAft>
+                <a:spcPts val="0"/>
+              </a:spcAft>
+              <a:buNone/>
+            </a:pPr>
+            <a:r>
+              <a:t/>
+            </a:r>
+            <a:endParaRPr/>
+          </a:p>
+        </p:txBody>
+      </p:sp>
+    </p:spTree>
+  </p:cSld>
+  <p:clrMapOvr>
+    <a:masterClrMapping/>
+  </p:clrMapOvr>
+</p:notes>
+</file>
+
+<file path=ppt/notesSlides/notesSlide6.xml><?xml version="1.0" encoding="utf-8"?>
+<p:notes xmlns:a="http://schemas.openxmlformats.org/drawingml/2006/main" xmlns:r="http://schemas.openxmlformats.org/officeDocument/2006/relationships" xmlns:mc="http://schemas.openxmlformats.org/markup-compatibility/2006" xmlns:mv="urn:schemas-microsoft-com:mac:vml" xmlns:p="http://schemas.openxmlformats.org/presentationml/2006/main" xmlns:c="http://schemas.openxmlformats.org/drawingml/2006/chart" xmlns:dgm="http://schemas.openxmlformats.org/drawingml/2006/diagram" xmlns:o="urn:schemas-microsoft-com:office:office" xmlns:v="urn:schemas-microsoft-com:vml" xmlns:pvml="urn:schemas-microsoft-com:office:powerpoint" xmlns:com="http://schemas.openxmlformats.org/drawingml/2006/compatibility" xmlns:p14="http://schemas.microsoft.com/office/powerpoint/2010/main" xmlns:p15="http://schemas.microsoft.com/office/powerpoint/2012/main" xmlns:ahyp="http://schemas.microsoft.com/office/drawing/2018/hyperlinkcolor" showMasterPhAnim="0" showMasterSp="0">
+  <p:cSld>
+    <p:spTree>
+      <p:nvGrpSpPr>
+        <p:cNvPr id="114" name="Shape 114"/>
+        <p:cNvGrpSpPr/>
+        <p:nvPr/>
+      </p:nvGrpSpPr>
+      <p:grpSpPr>
+        <a:xfrm>
+          <a:off x="0" y="0"/>
+          <a:ext cx="0" cy="0"/>
+          <a:chOff x="0" y="0"/>
+          <a:chExt cx="0" cy="0"/>
+        </a:xfrm>
+      </p:grpSpPr>
+      <p:sp>
+        <p:nvSpPr>
+          <p:cNvPr id="115" name="Google Shape;115;p19:notes"/>
           <p:cNvSpPr/>
           <p:nvPr>
             <p:ph idx="2" type="sldImg"/>
@@ -2443,7 +3349,7 @@
       </p:sp>
       <p:sp>
         <p:nvSpPr>
-          <p:cNvPr id="101" name="Google Shape;101;p19:notes"/>
+          <p:cNvPr id="116" name="Google Shape;116;p19:notes"/>
           <p:cNvSpPr txBox="1"/>
           <p:nvPr>
             <p:ph idx="1" type="body"/>
@@ -2496,12 +3402,12 @@
 </p:notes>
 </file>
 
-<file path=ppt/notesSlides/notesSlide5.xml><?xml version="1.0" encoding="utf-8"?>
+<file path=ppt/notesSlides/notesSlide7.xml><?xml version="1.0" encoding="utf-8"?>
 <p:notes xmlns:a="http://schemas.openxmlformats.org/drawingml/2006/main" xmlns:r="http://schemas.openxmlformats.org/officeDocument/2006/relationships" xmlns:mc="http://schemas.openxmlformats.org/markup-compatibility/2006" xmlns:mv="urn:schemas-microsoft-com:mac:vml" xmlns:p="http://schemas.openxmlformats.org/presentationml/2006/main" xmlns:c="http://schemas.openxmlformats.org/drawingml/2006/chart" xmlns:dgm="http://schemas.openxmlformats.org/drawingml/2006/diagram" xmlns:o="urn:schemas-microsoft-com:office:office" xmlns:v="urn:schemas-microsoft-com:vml" xmlns:pvml="urn:schemas-microsoft-com:office:powerpoint" xmlns:com="http://schemas.openxmlformats.org/drawingml/2006/compatibility" xmlns:p14="http://schemas.microsoft.com/office/powerpoint/2010/main" xmlns:p15="http://schemas.microsoft.com/office/powerpoint/2012/main" xmlns:ahyp="http://schemas.microsoft.com/office/drawing/2018/hyperlinkcolor" showMasterPhAnim="0" showMasterSp="0">
   <p:cSld>
     <p:spTree>
       <p:nvGrpSpPr>
-        <p:cNvPr id="106" name="Shape 106"/>
+        <p:cNvPr id="120" name="Shape 120"/>
         <p:cNvGrpSpPr/>
         <p:nvPr/>
       </p:nvGrpSpPr>
@@ -2515,7 +3421,7 @@
       </p:grpSpPr>
       <p:sp>
         <p:nvSpPr>
-          <p:cNvPr id="107" name="Google Shape;107;p20:notes"/>
+          <p:cNvPr id="121" name="Google Shape;121;p20:notes"/>
           <p:cNvSpPr/>
           <p:nvPr>
             <p:ph idx="2" type="sldImg"/>
@@ -2560,7 +3466,7 @@
       </p:sp>
       <p:sp>
         <p:nvSpPr>
-          <p:cNvPr id="108" name="Google Shape;108;p20:notes"/>
+          <p:cNvPr id="122" name="Google Shape;122;p20:notes"/>
           <p:cNvSpPr txBox="1"/>
           <p:nvPr>
             <p:ph idx="1" type="body"/>
@@ -2613,12 +3519,12 @@
 </p:notes>
 </file>
 
-<file path=ppt/notesSlides/notesSlide6.xml><?xml version="1.0" encoding="utf-8"?>
+<file path=ppt/notesSlides/notesSlide8.xml><?xml version="1.0" encoding="utf-8"?>
 <p:notes xmlns:a="http://schemas.openxmlformats.org/drawingml/2006/main" xmlns:r="http://schemas.openxmlformats.org/officeDocument/2006/relationships" xmlns:mc="http://schemas.openxmlformats.org/markup-compatibility/2006" xmlns:mv="urn:schemas-microsoft-com:mac:vml" xmlns:p="http://schemas.openxmlformats.org/presentationml/2006/main" xmlns:c="http://schemas.openxmlformats.org/drawingml/2006/chart" xmlns:dgm="http://schemas.openxmlformats.org/drawingml/2006/diagram" xmlns:o="urn:schemas-microsoft-com:office:office" xmlns:v="urn:schemas-microsoft-com:vml" xmlns:pvml="urn:schemas-microsoft-com:office:powerpoint" xmlns:com="http://schemas.openxmlformats.org/drawingml/2006/compatibility" xmlns:p14="http://schemas.microsoft.com/office/powerpoint/2010/main" xmlns:p15="http://schemas.microsoft.com/office/powerpoint/2012/main" xmlns:ahyp="http://schemas.microsoft.com/office/drawing/2018/hyperlinkcolor" showMasterPhAnim="0" showMasterSp="0">
   <p:cSld>
     <p:spTree>
       <p:nvGrpSpPr>
-        <p:cNvPr id="113" name="Shape 113"/>
+        <p:cNvPr id="128" name="Shape 128"/>
         <p:cNvGrpSpPr/>
         <p:nvPr/>
       </p:nvGrpSpPr>
@@ -2632,7 +3538,7 @@
       </p:grpSpPr>
       <p:sp>
         <p:nvSpPr>
-          <p:cNvPr id="114" name="Google Shape;114;p21:notes"/>
+          <p:cNvPr id="129" name="Google Shape;129;p21:notes"/>
           <p:cNvSpPr/>
           <p:nvPr>
             <p:ph idx="2" type="sldImg"/>
@@ -2677,7 +3583,7 @@
       </p:sp>
       <p:sp>
         <p:nvSpPr>
-          <p:cNvPr id="115" name="Google Shape;115;p21:notes"/>
+          <p:cNvPr id="130" name="Google Shape;130;p21:notes"/>
           <p:cNvSpPr txBox="1"/>
           <p:nvPr>
             <p:ph idx="1" type="body"/>
@@ -2730,12 +3636,12 @@
 </p:notes>
 </file>
 
-<file path=ppt/notesSlides/notesSlide7.xml><?xml version="1.0" encoding="utf-8"?>
+<file path=ppt/notesSlides/notesSlide9.xml><?xml version="1.0" encoding="utf-8"?>
 <p:notes xmlns:a="http://schemas.openxmlformats.org/drawingml/2006/main" xmlns:r="http://schemas.openxmlformats.org/officeDocument/2006/relationships" xmlns:mc="http://schemas.openxmlformats.org/markup-compatibility/2006" xmlns:mv="urn:schemas-microsoft-com:mac:vml" xmlns:p="http://schemas.openxmlformats.org/presentationml/2006/main" xmlns:c="http://schemas.openxmlformats.org/drawingml/2006/chart" xmlns:dgm="http://schemas.openxmlformats.org/drawingml/2006/diagram" xmlns:o="urn:schemas-microsoft-com:office:office" xmlns:v="urn:schemas-microsoft-com:vml" xmlns:pvml="urn:schemas-microsoft-com:office:powerpoint" xmlns:com="http://schemas.openxmlformats.org/drawingml/2006/compatibility" xmlns:p14="http://schemas.microsoft.com/office/powerpoint/2010/main" xmlns:p15="http://schemas.microsoft.com/office/powerpoint/2012/main" xmlns:ahyp="http://schemas.microsoft.com/office/drawing/2018/hyperlinkcolor" showMasterPhAnim="0" showMasterSp="0">
   <p:cSld>
     <p:spTree>
       <p:nvGrpSpPr>
-        <p:cNvPr id="120" name="Shape 120"/>
+        <p:cNvPr id="135" name="Shape 135"/>
         <p:cNvGrpSpPr/>
         <p:nvPr/>
       </p:nvGrpSpPr>
@@ -2749,7 +3655,7 @@
       </p:grpSpPr>
       <p:sp>
         <p:nvSpPr>
-          <p:cNvPr id="121" name="Google Shape;121;p22:notes"/>
+          <p:cNvPr id="136" name="Google Shape;136;p22:notes"/>
           <p:cNvSpPr/>
           <p:nvPr>
             <p:ph idx="2" type="sldImg"/>
@@ -2794,241 +3700,7 @@
       </p:sp>
       <p:sp>
         <p:nvSpPr>
-          <p:cNvPr id="122" name="Google Shape;122;p22:notes"/>
-          <p:cNvSpPr txBox="1"/>
-          <p:nvPr>
-            <p:ph idx="1" type="body"/>
-          </p:nvPr>
-        </p:nvSpPr>
-        <p:spPr>
-          <a:xfrm>
-            <a:off x="685800" y="4343400"/>
-            <a:ext cx="5486400" cy="4114800"/>
-          </a:xfrm>
-          <a:prstGeom prst="rect">
-            <a:avLst/>
-          </a:prstGeom>
-          <a:noFill/>
-          <a:ln>
-            <a:noFill/>
-          </a:ln>
-        </p:spPr>
-        <p:txBody>
-          <a:bodyPr anchorCtr="0" anchor="t" bIns="91425" lIns="91425" spcFirstLastPara="1" rIns="91425" wrap="square" tIns="91425">
-            <a:noAutofit/>
-          </a:bodyPr>
-          <a:lstStyle/>
-          <a:p>
-            <a:pPr indent="0" lvl="0" marL="0" rtl="0" algn="l">
-              <a:lnSpc>
-                <a:spcPct val="100000"/>
-              </a:lnSpc>
-              <a:spcBef>
-                <a:spcPts val="0"/>
-              </a:spcBef>
-              <a:spcAft>
-                <a:spcPts val="0"/>
-              </a:spcAft>
-              <a:buSzPts val="1100"/>
-              <a:buNone/>
-            </a:pPr>
-            <a:r>
-              <a:t/>
-            </a:r>
-            <a:endParaRPr/>
-          </a:p>
-        </p:txBody>
-      </p:sp>
-    </p:spTree>
-  </p:cSld>
-  <p:clrMapOvr>
-    <a:masterClrMapping/>
-  </p:clrMapOvr>
-</p:notes>
-</file>
-
-<file path=ppt/notesSlides/notesSlide8.xml><?xml version="1.0" encoding="utf-8"?>
-<p:notes xmlns:a="http://schemas.openxmlformats.org/drawingml/2006/main" xmlns:r="http://schemas.openxmlformats.org/officeDocument/2006/relationships" xmlns:mc="http://schemas.openxmlformats.org/markup-compatibility/2006" xmlns:mv="urn:schemas-microsoft-com:mac:vml" xmlns:p="http://schemas.openxmlformats.org/presentationml/2006/main" xmlns:c="http://schemas.openxmlformats.org/drawingml/2006/chart" xmlns:dgm="http://schemas.openxmlformats.org/drawingml/2006/diagram" xmlns:o="urn:schemas-microsoft-com:office:office" xmlns:v="urn:schemas-microsoft-com:vml" xmlns:pvml="urn:schemas-microsoft-com:office:powerpoint" xmlns:com="http://schemas.openxmlformats.org/drawingml/2006/compatibility" xmlns:p14="http://schemas.microsoft.com/office/powerpoint/2010/main" xmlns:p15="http://schemas.microsoft.com/office/powerpoint/2012/main" xmlns:ahyp="http://schemas.microsoft.com/office/drawing/2018/hyperlinkcolor" showMasterPhAnim="0" showMasterSp="0">
-  <p:cSld>
-    <p:spTree>
-      <p:nvGrpSpPr>
-        <p:cNvPr id="128" name="Shape 128"/>
-        <p:cNvGrpSpPr/>
-        <p:nvPr/>
-      </p:nvGrpSpPr>
-      <p:grpSpPr>
-        <a:xfrm>
-          <a:off x="0" y="0"/>
-          <a:ext cx="0" cy="0"/>
-          <a:chOff x="0" y="0"/>
-          <a:chExt cx="0" cy="0"/>
-        </a:xfrm>
-      </p:grpSpPr>
-      <p:sp>
-        <p:nvSpPr>
-          <p:cNvPr id="129" name="Google Shape;129;p23:notes"/>
-          <p:cNvSpPr/>
-          <p:nvPr>
-            <p:ph idx="2" type="sldImg"/>
-          </p:nvPr>
-        </p:nvSpPr>
-        <p:spPr>
-          <a:xfrm>
-            <a:off x="381300" y="685800"/>
-            <a:ext cx="6096000" cy="3429000"/>
-          </a:xfrm>
-          <a:custGeom>
-            <a:rect b="b" l="l" r="r" t="t"/>
-            <a:pathLst>
-              <a:path extrusionOk="0" h="120000" w="120000">
-                <a:moveTo>
-                  <a:pt x="0" y="0"/>
-                </a:moveTo>
-                <a:lnTo>
-                  <a:pt x="120000" y="0"/>
-                </a:lnTo>
-                <a:lnTo>
-                  <a:pt x="120000" y="120000"/>
-                </a:lnTo>
-                <a:lnTo>
-                  <a:pt x="0" y="120000"/>
-                </a:lnTo>
-                <a:close/>
-              </a:path>
-            </a:pathLst>
-          </a:custGeom>
-          <a:noFill/>
-          <a:ln cap="flat" cmpd="sng" w="9525">
-            <a:solidFill>
-              <a:srgbClr val="000000"/>
-            </a:solidFill>
-            <a:prstDash val="solid"/>
-            <a:round/>
-            <a:headEnd len="sm" w="sm" type="none"/>
-            <a:tailEnd len="sm" w="sm" type="none"/>
-          </a:ln>
-        </p:spPr>
-      </p:sp>
-      <p:sp>
-        <p:nvSpPr>
-          <p:cNvPr id="130" name="Google Shape;130;p23:notes"/>
-          <p:cNvSpPr txBox="1"/>
-          <p:nvPr>
-            <p:ph idx="1" type="body"/>
-          </p:nvPr>
-        </p:nvSpPr>
-        <p:spPr>
-          <a:xfrm>
-            <a:off x="685800" y="4343400"/>
-            <a:ext cx="5486400" cy="4114800"/>
-          </a:xfrm>
-          <a:prstGeom prst="rect">
-            <a:avLst/>
-          </a:prstGeom>
-          <a:noFill/>
-          <a:ln>
-            <a:noFill/>
-          </a:ln>
-        </p:spPr>
-        <p:txBody>
-          <a:bodyPr anchorCtr="0" anchor="t" bIns="91425" lIns="91425" spcFirstLastPara="1" rIns="91425" wrap="square" tIns="91425">
-            <a:noAutofit/>
-          </a:bodyPr>
-          <a:lstStyle/>
-          <a:p>
-            <a:pPr indent="0" lvl="0" marL="0" rtl="0" algn="l">
-              <a:lnSpc>
-                <a:spcPct val="100000"/>
-              </a:lnSpc>
-              <a:spcBef>
-                <a:spcPts val="0"/>
-              </a:spcBef>
-              <a:spcAft>
-                <a:spcPts val="0"/>
-              </a:spcAft>
-              <a:buSzPts val="1100"/>
-              <a:buNone/>
-            </a:pPr>
-            <a:r>
-              <a:t/>
-            </a:r>
-            <a:endParaRPr/>
-          </a:p>
-        </p:txBody>
-      </p:sp>
-    </p:spTree>
-  </p:cSld>
-  <p:clrMapOvr>
-    <a:masterClrMapping/>
-  </p:clrMapOvr>
-</p:notes>
-</file>
-
-<file path=ppt/notesSlides/notesSlide9.xml><?xml version="1.0" encoding="utf-8"?>
-<p:notes xmlns:a="http://schemas.openxmlformats.org/drawingml/2006/main" xmlns:r="http://schemas.openxmlformats.org/officeDocument/2006/relationships" xmlns:mc="http://schemas.openxmlformats.org/markup-compatibility/2006" xmlns:mv="urn:schemas-microsoft-com:mac:vml" xmlns:p="http://schemas.openxmlformats.org/presentationml/2006/main" xmlns:c="http://schemas.openxmlformats.org/drawingml/2006/chart" xmlns:dgm="http://schemas.openxmlformats.org/drawingml/2006/diagram" xmlns:o="urn:schemas-microsoft-com:office:office" xmlns:v="urn:schemas-microsoft-com:vml" xmlns:pvml="urn:schemas-microsoft-com:office:powerpoint" xmlns:com="http://schemas.openxmlformats.org/drawingml/2006/compatibility" xmlns:p14="http://schemas.microsoft.com/office/powerpoint/2010/main" xmlns:p15="http://schemas.microsoft.com/office/powerpoint/2012/main" xmlns:ahyp="http://schemas.microsoft.com/office/drawing/2018/hyperlinkcolor" showMasterPhAnim="0" showMasterSp="0">
-  <p:cSld>
-    <p:spTree>
-      <p:nvGrpSpPr>
-        <p:cNvPr id="137" name="Shape 137"/>
-        <p:cNvGrpSpPr/>
-        <p:nvPr/>
-      </p:nvGrpSpPr>
-      <p:grpSpPr>
-        <a:xfrm>
-          <a:off x="0" y="0"/>
-          <a:ext cx="0" cy="0"/>
-          <a:chOff x="0" y="0"/>
-          <a:chExt cx="0" cy="0"/>
-        </a:xfrm>
-      </p:grpSpPr>
-      <p:sp>
-        <p:nvSpPr>
-          <p:cNvPr id="138" name="Google Shape;138;p24:notes"/>
-          <p:cNvSpPr/>
-          <p:nvPr>
-            <p:ph idx="2" type="sldImg"/>
-          </p:nvPr>
-        </p:nvSpPr>
-        <p:spPr>
-          <a:xfrm>
-            <a:off x="381300" y="685800"/>
-            <a:ext cx="6096000" cy="3429000"/>
-          </a:xfrm>
-          <a:custGeom>
-            <a:rect b="b" l="l" r="r" t="t"/>
-            <a:pathLst>
-              <a:path extrusionOk="0" h="120000" w="120000">
-                <a:moveTo>
-                  <a:pt x="0" y="0"/>
-                </a:moveTo>
-                <a:lnTo>
-                  <a:pt x="120000" y="0"/>
-                </a:lnTo>
-                <a:lnTo>
-                  <a:pt x="120000" y="120000"/>
-                </a:lnTo>
-                <a:lnTo>
-                  <a:pt x="0" y="120000"/>
-                </a:lnTo>
-                <a:close/>
-              </a:path>
-            </a:pathLst>
-          </a:custGeom>
-          <a:noFill/>
-          <a:ln cap="flat" cmpd="sng" w="9525">
-            <a:solidFill>
-              <a:srgbClr val="000000"/>
-            </a:solidFill>
-            <a:prstDash val="solid"/>
-            <a:round/>
-            <a:headEnd len="sm" w="sm" type="none"/>
-            <a:tailEnd len="sm" w="sm" type="none"/>
-          </a:ln>
-        </p:spPr>
-      </p:sp>
-      <p:sp>
-        <p:nvSpPr>
-          <p:cNvPr id="139" name="Google Shape;139;p24:notes"/>
+          <p:cNvPr id="137" name="Google Shape;137;p22:notes"/>
           <p:cNvSpPr txBox="1"/>
           <p:nvPr>
             <p:ph idx="1" type="body"/>
@@ -5087,8 +5759,15 @@
 </file>
 
 <file path=ppt/slideLayouts/slideLayout2.xml><?xml version="1.0" encoding="utf-8"?>
-<p:sldLayout xmlns:a="http://schemas.openxmlformats.org/drawingml/2006/main" xmlns:r="http://schemas.openxmlformats.org/officeDocument/2006/relationships" xmlns:mc="http://schemas.openxmlformats.org/markup-compatibility/2006" xmlns:mv="urn:schemas-microsoft-com:mac:vml" xmlns:p="http://schemas.openxmlformats.org/presentationml/2006/main" xmlns:c="http://schemas.openxmlformats.org/drawingml/2006/chart" xmlns:dgm="http://schemas.openxmlformats.org/drawingml/2006/diagram" xmlns:o="urn:schemas-microsoft-com:office:office" xmlns:v="urn:schemas-microsoft-com:vml" xmlns:pvml="urn:schemas-microsoft-com:office:powerpoint" xmlns:com="http://schemas.openxmlformats.org/drawingml/2006/compatibility" xmlns:p14="http://schemas.microsoft.com/office/powerpoint/2010/main" xmlns:p15="http://schemas.microsoft.com/office/powerpoint/2012/main" xmlns:ahyp="http://schemas.microsoft.com/office/drawing/2018/hyperlinkcolor" matchingName="Title and body" type="tx">
-  <p:cSld name="TITLE_AND_BODY">
+<p:sldLayout xmlns:a="http://schemas.openxmlformats.org/drawingml/2006/main" xmlns:r="http://schemas.openxmlformats.org/officeDocument/2006/relationships" xmlns:mc="http://schemas.openxmlformats.org/markup-compatibility/2006" xmlns:mv="urn:schemas-microsoft-com:mac:vml" xmlns:p="http://schemas.openxmlformats.org/presentationml/2006/main" xmlns:c="http://schemas.openxmlformats.org/drawingml/2006/chart" xmlns:dgm="http://schemas.openxmlformats.org/drawingml/2006/diagram" xmlns:o="urn:schemas-microsoft-com:office:office" xmlns:v="urn:schemas-microsoft-com:vml" xmlns:pvml="urn:schemas-microsoft-com:office:powerpoint" xmlns:com="http://schemas.openxmlformats.org/drawingml/2006/compatibility" xmlns:p14="http://schemas.microsoft.com/office/powerpoint/2010/main" xmlns:p15="http://schemas.microsoft.com/office/powerpoint/2012/main" xmlns:ahyp="http://schemas.microsoft.com/office/drawing/2018/hyperlinkcolor" matchingName="Section header" type="secHead">
+  <p:cSld name="SECTION_HEADER">
+    <p:bg>
+      <p:bgPr>
+        <a:solidFill>
+          <a:schemeClr val="dk1"/>
+        </a:solidFill>
+      </p:bgPr>
+    </p:bg>
     <p:spTree>
       <p:nvGrpSpPr>
         <p:cNvPr id="17" name="Shape 17"/>
@@ -5103,9 +5782,665 @@
           <a:chExt cx="0" cy="0"/>
         </a:xfrm>
       </p:grpSpPr>
+      <p:grpSp>
+        <p:nvGrpSpPr>
+          <p:cNvPr id="18" name="Google Shape;18;p60"/>
+          <p:cNvGrpSpPr/>
+          <p:nvPr/>
+        </p:nvGrpSpPr>
+        <p:grpSpPr>
+          <a:xfrm>
+            <a:off x="830392" y="1191256"/>
+            <a:ext cx="745763" cy="45826"/>
+            <a:chOff x="4580561" y="2589004"/>
+            <a:chExt cx="1064464" cy="25200"/>
+          </a:xfrm>
+        </p:grpSpPr>
+        <p:sp>
+          <p:nvSpPr>
+            <p:cNvPr id="19" name="Google Shape;19;p60"/>
+            <p:cNvSpPr/>
+            <p:nvPr/>
+          </p:nvSpPr>
+          <p:spPr>
+            <a:xfrm rot="-5400000">
+              <a:off x="5366325" y="2335504"/>
+              <a:ext cx="25200" cy="532200"/>
+            </a:xfrm>
+            <a:prstGeom prst="rect">
+              <a:avLst/>
+            </a:prstGeom>
+            <a:solidFill>
+              <a:schemeClr val="lt1"/>
+            </a:solidFill>
+            <a:ln>
+              <a:noFill/>
+            </a:ln>
+          </p:spPr>
+          <p:txBody>
+            <a:bodyPr anchorCtr="0" anchor="ctr" bIns="91425" lIns="91425" spcFirstLastPara="1" rIns="91425" wrap="square" tIns="91425">
+              <a:noAutofit/>
+            </a:bodyPr>
+            <a:lstStyle/>
+            <a:p>
+              <a:pPr indent="0" lvl="0" marL="0" marR="0" rtl="0" algn="l">
+                <a:lnSpc>
+                  <a:spcPct val="100000"/>
+                </a:lnSpc>
+                <a:spcBef>
+                  <a:spcPts val="0"/>
+                </a:spcBef>
+                <a:spcAft>
+                  <a:spcPts val="0"/>
+                </a:spcAft>
+                <a:buClr>
+                  <a:srgbClr val="000000"/>
+                </a:buClr>
+                <a:buSzPts val="1400"/>
+                <a:buFont typeface="Arial"/>
+                <a:buNone/>
+              </a:pPr>
+              <a:r>
+                <a:t/>
+              </a:r>
+              <a:endParaRPr b="0" i="0" sz="1400" u="none" cap="none" strike="noStrike">
+                <a:solidFill>
+                  <a:srgbClr val="000000"/>
+                </a:solidFill>
+                <a:latin typeface="Arial"/>
+                <a:ea typeface="Arial"/>
+                <a:cs typeface="Arial"/>
+                <a:sym typeface="Arial"/>
+              </a:endParaRPr>
+            </a:p>
+          </p:txBody>
+        </p:sp>
+        <p:sp>
+          <p:nvSpPr>
+            <p:cNvPr id="20" name="Google Shape;20;p60"/>
+            <p:cNvSpPr/>
+            <p:nvPr/>
+          </p:nvSpPr>
+          <p:spPr>
+            <a:xfrm rot="-5400000">
+              <a:off x="4836311" y="2333254"/>
+              <a:ext cx="25200" cy="536700"/>
+            </a:xfrm>
+            <a:prstGeom prst="rect">
+              <a:avLst/>
+            </a:prstGeom>
+            <a:solidFill>
+              <a:schemeClr val="lt1"/>
+            </a:solidFill>
+            <a:ln>
+              <a:noFill/>
+            </a:ln>
+          </p:spPr>
+          <p:txBody>
+            <a:bodyPr anchorCtr="0" anchor="ctr" bIns="91425" lIns="91425" spcFirstLastPara="1" rIns="91425" wrap="square" tIns="91425">
+              <a:noAutofit/>
+            </a:bodyPr>
+            <a:lstStyle/>
+            <a:p>
+              <a:pPr indent="0" lvl="0" marL="0" marR="0" rtl="0" algn="l">
+                <a:lnSpc>
+                  <a:spcPct val="100000"/>
+                </a:lnSpc>
+                <a:spcBef>
+                  <a:spcPts val="0"/>
+                </a:spcBef>
+                <a:spcAft>
+                  <a:spcPts val="0"/>
+                </a:spcAft>
+                <a:buClr>
+                  <a:srgbClr val="000000"/>
+                </a:buClr>
+                <a:buSzPts val="1400"/>
+                <a:buFont typeface="Arial"/>
+                <a:buNone/>
+              </a:pPr>
+              <a:r>
+                <a:t/>
+              </a:r>
+              <a:endParaRPr b="0" i="0" sz="1400" u="none" cap="none" strike="noStrike">
+                <a:solidFill>
+                  <a:srgbClr val="000000"/>
+                </a:solidFill>
+                <a:latin typeface="Arial"/>
+                <a:ea typeface="Arial"/>
+                <a:cs typeface="Arial"/>
+                <a:sym typeface="Arial"/>
+              </a:endParaRPr>
+            </a:p>
+          </p:txBody>
+        </p:sp>
+      </p:grpSp>
       <p:sp>
         <p:nvSpPr>
-          <p:cNvPr id="18" name="Google Shape;18;p58"/>
+          <p:cNvPr id="21" name="Google Shape;21;p60"/>
+          <p:cNvSpPr txBox="1"/>
+          <p:nvPr>
+            <p:ph type="title"/>
+          </p:nvPr>
+        </p:nvSpPr>
+        <p:spPr>
+          <a:xfrm>
+            <a:off x="729450" y="1322450"/>
+            <a:ext cx="7688400" cy="1518600"/>
+          </a:xfrm>
+          <a:prstGeom prst="rect">
+            <a:avLst/>
+          </a:prstGeom>
+          <a:noFill/>
+          <a:ln>
+            <a:noFill/>
+          </a:ln>
+        </p:spPr>
+        <p:txBody>
+          <a:bodyPr anchorCtr="0" anchor="t" bIns="91425" lIns="91425" spcFirstLastPara="1" rIns="91425" wrap="square" tIns="91425">
+            <a:normAutofit/>
+          </a:bodyPr>
+          <a:lstStyle>
+            <a:lvl1pPr lvl="0" algn="l">
+              <a:lnSpc>
+                <a:spcPct val="100000"/>
+              </a:lnSpc>
+              <a:spcBef>
+                <a:spcPts val="0"/>
+              </a:spcBef>
+              <a:spcAft>
+                <a:spcPts val="0"/>
+              </a:spcAft>
+              <a:buClr>
+                <a:schemeClr val="lt1"/>
+              </a:buClr>
+              <a:buSzPts val="3600"/>
+              <a:buNone/>
+              <a:defRPr sz="3600">
+                <a:solidFill>
+                  <a:schemeClr val="lt1"/>
+                </a:solidFill>
+              </a:defRPr>
+            </a:lvl1pPr>
+            <a:lvl2pPr lvl="1" algn="l">
+              <a:lnSpc>
+                <a:spcPct val="100000"/>
+              </a:lnSpc>
+              <a:spcBef>
+                <a:spcPts val="0"/>
+              </a:spcBef>
+              <a:spcAft>
+                <a:spcPts val="0"/>
+              </a:spcAft>
+              <a:buClr>
+                <a:schemeClr val="lt1"/>
+              </a:buClr>
+              <a:buSzPts val="3600"/>
+              <a:buNone/>
+              <a:defRPr sz="3600">
+                <a:solidFill>
+                  <a:schemeClr val="lt1"/>
+                </a:solidFill>
+              </a:defRPr>
+            </a:lvl2pPr>
+            <a:lvl3pPr lvl="2" algn="l">
+              <a:lnSpc>
+                <a:spcPct val="100000"/>
+              </a:lnSpc>
+              <a:spcBef>
+                <a:spcPts val="0"/>
+              </a:spcBef>
+              <a:spcAft>
+                <a:spcPts val="0"/>
+              </a:spcAft>
+              <a:buClr>
+                <a:schemeClr val="lt1"/>
+              </a:buClr>
+              <a:buSzPts val="3600"/>
+              <a:buNone/>
+              <a:defRPr sz="3600">
+                <a:solidFill>
+                  <a:schemeClr val="lt1"/>
+                </a:solidFill>
+              </a:defRPr>
+            </a:lvl3pPr>
+            <a:lvl4pPr lvl="3" algn="l">
+              <a:lnSpc>
+                <a:spcPct val="100000"/>
+              </a:lnSpc>
+              <a:spcBef>
+                <a:spcPts val="0"/>
+              </a:spcBef>
+              <a:spcAft>
+                <a:spcPts val="0"/>
+              </a:spcAft>
+              <a:buClr>
+                <a:schemeClr val="lt1"/>
+              </a:buClr>
+              <a:buSzPts val="3600"/>
+              <a:buNone/>
+              <a:defRPr sz="3600">
+                <a:solidFill>
+                  <a:schemeClr val="lt1"/>
+                </a:solidFill>
+              </a:defRPr>
+            </a:lvl4pPr>
+            <a:lvl5pPr lvl="4" algn="l">
+              <a:lnSpc>
+                <a:spcPct val="100000"/>
+              </a:lnSpc>
+              <a:spcBef>
+                <a:spcPts val="0"/>
+              </a:spcBef>
+              <a:spcAft>
+                <a:spcPts val="0"/>
+              </a:spcAft>
+              <a:buClr>
+                <a:schemeClr val="lt1"/>
+              </a:buClr>
+              <a:buSzPts val="3600"/>
+              <a:buNone/>
+              <a:defRPr sz="3600">
+                <a:solidFill>
+                  <a:schemeClr val="lt1"/>
+                </a:solidFill>
+              </a:defRPr>
+            </a:lvl5pPr>
+            <a:lvl6pPr lvl="5" algn="l">
+              <a:lnSpc>
+                <a:spcPct val="100000"/>
+              </a:lnSpc>
+              <a:spcBef>
+                <a:spcPts val="0"/>
+              </a:spcBef>
+              <a:spcAft>
+                <a:spcPts val="0"/>
+              </a:spcAft>
+              <a:buClr>
+                <a:schemeClr val="lt1"/>
+              </a:buClr>
+              <a:buSzPts val="3600"/>
+              <a:buNone/>
+              <a:defRPr sz="3600">
+                <a:solidFill>
+                  <a:schemeClr val="lt1"/>
+                </a:solidFill>
+              </a:defRPr>
+            </a:lvl6pPr>
+            <a:lvl7pPr lvl="6" algn="l">
+              <a:lnSpc>
+                <a:spcPct val="100000"/>
+              </a:lnSpc>
+              <a:spcBef>
+                <a:spcPts val="0"/>
+              </a:spcBef>
+              <a:spcAft>
+                <a:spcPts val="0"/>
+              </a:spcAft>
+              <a:buClr>
+                <a:schemeClr val="lt1"/>
+              </a:buClr>
+              <a:buSzPts val="3600"/>
+              <a:buNone/>
+              <a:defRPr sz="3600">
+                <a:solidFill>
+                  <a:schemeClr val="lt1"/>
+                </a:solidFill>
+              </a:defRPr>
+            </a:lvl7pPr>
+            <a:lvl8pPr lvl="7" algn="l">
+              <a:lnSpc>
+                <a:spcPct val="100000"/>
+              </a:lnSpc>
+              <a:spcBef>
+                <a:spcPts val="0"/>
+              </a:spcBef>
+              <a:spcAft>
+                <a:spcPts val="0"/>
+              </a:spcAft>
+              <a:buClr>
+                <a:schemeClr val="lt1"/>
+              </a:buClr>
+              <a:buSzPts val="3600"/>
+              <a:buNone/>
+              <a:defRPr sz="3600">
+                <a:solidFill>
+                  <a:schemeClr val="lt1"/>
+                </a:solidFill>
+              </a:defRPr>
+            </a:lvl8pPr>
+            <a:lvl9pPr lvl="8" algn="l">
+              <a:lnSpc>
+                <a:spcPct val="100000"/>
+              </a:lnSpc>
+              <a:spcBef>
+                <a:spcPts val="0"/>
+              </a:spcBef>
+              <a:spcAft>
+                <a:spcPts val="0"/>
+              </a:spcAft>
+              <a:buClr>
+                <a:schemeClr val="lt1"/>
+              </a:buClr>
+              <a:buSzPts val="3600"/>
+              <a:buNone/>
+              <a:defRPr sz="3600">
+                <a:solidFill>
+                  <a:schemeClr val="lt1"/>
+                </a:solidFill>
+              </a:defRPr>
+            </a:lvl9pPr>
+          </a:lstStyle>
+          <a:p/>
+        </p:txBody>
+      </p:sp>
+      <p:sp>
+        <p:nvSpPr>
+          <p:cNvPr id="22" name="Google Shape;22;p60"/>
+          <p:cNvSpPr txBox="1"/>
+          <p:nvPr>
+            <p:ph idx="12" type="sldNum"/>
+          </p:nvPr>
+        </p:nvSpPr>
+        <p:spPr>
+          <a:xfrm>
+            <a:off x="8536302" y="4749851"/>
+            <a:ext cx="548700" cy="393600"/>
+          </a:xfrm>
+          <a:prstGeom prst="rect">
+            <a:avLst/>
+          </a:prstGeom>
+          <a:noFill/>
+          <a:ln>
+            <a:noFill/>
+          </a:ln>
+        </p:spPr>
+        <p:txBody>
+          <a:bodyPr anchorCtr="0" anchor="ctr" bIns="91425" lIns="91425" spcFirstLastPara="1" rIns="91425" wrap="square" tIns="91425">
+            <a:normAutofit/>
+          </a:bodyPr>
+          <a:lstStyle>
+            <a:lvl1pPr indent="0" lvl="0" marL="0" marR="0" algn="r">
+              <a:lnSpc>
+                <a:spcPct val="100000"/>
+              </a:lnSpc>
+              <a:spcBef>
+                <a:spcPts val="0"/>
+              </a:spcBef>
+              <a:spcAft>
+                <a:spcPts val="0"/>
+              </a:spcAft>
+              <a:buClr>
+                <a:srgbClr val="000000"/>
+              </a:buClr>
+              <a:buSzPts val="1000"/>
+              <a:buFont typeface="Arial"/>
+              <a:buNone/>
+              <a:defRPr b="0" i="0" sz="1000" u="none" cap="none" strike="noStrike">
+                <a:solidFill>
+                  <a:schemeClr val="lt1"/>
+                </a:solidFill>
+                <a:latin typeface="Lato"/>
+                <a:ea typeface="Lato"/>
+                <a:cs typeface="Lato"/>
+                <a:sym typeface="Lato"/>
+              </a:defRPr>
+            </a:lvl1pPr>
+            <a:lvl2pPr indent="0" lvl="1" marL="0" marR="0" algn="r">
+              <a:lnSpc>
+                <a:spcPct val="100000"/>
+              </a:lnSpc>
+              <a:spcBef>
+                <a:spcPts val="0"/>
+              </a:spcBef>
+              <a:spcAft>
+                <a:spcPts val="0"/>
+              </a:spcAft>
+              <a:buClr>
+                <a:srgbClr val="000000"/>
+              </a:buClr>
+              <a:buSzPts val="1000"/>
+              <a:buFont typeface="Arial"/>
+              <a:buNone/>
+              <a:defRPr b="0" i="0" sz="1000" u="none" cap="none" strike="noStrike">
+                <a:solidFill>
+                  <a:schemeClr val="lt1"/>
+                </a:solidFill>
+                <a:latin typeface="Lato"/>
+                <a:ea typeface="Lato"/>
+                <a:cs typeface="Lato"/>
+                <a:sym typeface="Lato"/>
+              </a:defRPr>
+            </a:lvl2pPr>
+            <a:lvl3pPr indent="0" lvl="2" marL="0" marR="0" algn="r">
+              <a:lnSpc>
+                <a:spcPct val="100000"/>
+              </a:lnSpc>
+              <a:spcBef>
+                <a:spcPts val="0"/>
+              </a:spcBef>
+              <a:spcAft>
+                <a:spcPts val="0"/>
+              </a:spcAft>
+              <a:buClr>
+                <a:srgbClr val="000000"/>
+              </a:buClr>
+              <a:buSzPts val="1000"/>
+              <a:buFont typeface="Arial"/>
+              <a:buNone/>
+              <a:defRPr b="0" i="0" sz="1000" u="none" cap="none" strike="noStrike">
+                <a:solidFill>
+                  <a:schemeClr val="lt1"/>
+                </a:solidFill>
+                <a:latin typeface="Lato"/>
+                <a:ea typeface="Lato"/>
+                <a:cs typeface="Lato"/>
+                <a:sym typeface="Lato"/>
+              </a:defRPr>
+            </a:lvl3pPr>
+            <a:lvl4pPr indent="0" lvl="3" marL="0" marR="0" algn="r">
+              <a:lnSpc>
+                <a:spcPct val="100000"/>
+              </a:lnSpc>
+              <a:spcBef>
+                <a:spcPts val="0"/>
+              </a:spcBef>
+              <a:spcAft>
+                <a:spcPts val="0"/>
+              </a:spcAft>
+              <a:buClr>
+                <a:srgbClr val="000000"/>
+              </a:buClr>
+              <a:buSzPts val="1000"/>
+              <a:buFont typeface="Arial"/>
+              <a:buNone/>
+              <a:defRPr b="0" i="0" sz="1000" u="none" cap="none" strike="noStrike">
+                <a:solidFill>
+                  <a:schemeClr val="lt1"/>
+                </a:solidFill>
+                <a:latin typeface="Lato"/>
+                <a:ea typeface="Lato"/>
+                <a:cs typeface="Lato"/>
+                <a:sym typeface="Lato"/>
+              </a:defRPr>
+            </a:lvl4pPr>
+            <a:lvl5pPr indent="0" lvl="4" marL="0" marR="0" algn="r">
+              <a:lnSpc>
+                <a:spcPct val="100000"/>
+              </a:lnSpc>
+              <a:spcBef>
+                <a:spcPts val="0"/>
+              </a:spcBef>
+              <a:spcAft>
+                <a:spcPts val="0"/>
+              </a:spcAft>
+              <a:buClr>
+                <a:srgbClr val="000000"/>
+              </a:buClr>
+              <a:buSzPts val="1000"/>
+              <a:buFont typeface="Arial"/>
+              <a:buNone/>
+              <a:defRPr b="0" i="0" sz="1000" u="none" cap="none" strike="noStrike">
+                <a:solidFill>
+                  <a:schemeClr val="lt1"/>
+                </a:solidFill>
+                <a:latin typeface="Lato"/>
+                <a:ea typeface="Lato"/>
+                <a:cs typeface="Lato"/>
+                <a:sym typeface="Lato"/>
+              </a:defRPr>
+            </a:lvl5pPr>
+            <a:lvl6pPr indent="0" lvl="5" marL="0" marR="0" algn="r">
+              <a:lnSpc>
+                <a:spcPct val="100000"/>
+              </a:lnSpc>
+              <a:spcBef>
+                <a:spcPts val="0"/>
+              </a:spcBef>
+              <a:spcAft>
+                <a:spcPts val="0"/>
+              </a:spcAft>
+              <a:buClr>
+                <a:srgbClr val="000000"/>
+              </a:buClr>
+              <a:buSzPts val="1000"/>
+              <a:buFont typeface="Arial"/>
+              <a:buNone/>
+              <a:defRPr b="0" i="0" sz="1000" u="none" cap="none" strike="noStrike">
+                <a:solidFill>
+                  <a:schemeClr val="lt1"/>
+                </a:solidFill>
+                <a:latin typeface="Lato"/>
+                <a:ea typeface="Lato"/>
+                <a:cs typeface="Lato"/>
+                <a:sym typeface="Lato"/>
+              </a:defRPr>
+            </a:lvl6pPr>
+            <a:lvl7pPr indent="0" lvl="6" marL="0" marR="0" algn="r">
+              <a:lnSpc>
+                <a:spcPct val="100000"/>
+              </a:lnSpc>
+              <a:spcBef>
+                <a:spcPts val="0"/>
+              </a:spcBef>
+              <a:spcAft>
+                <a:spcPts val="0"/>
+              </a:spcAft>
+              <a:buClr>
+                <a:srgbClr val="000000"/>
+              </a:buClr>
+              <a:buSzPts val="1000"/>
+              <a:buFont typeface="Arial"/>
+              <a:buNone/>
+              <a:defRPr b="0" i="0" sz="1000" u="none" cap="none" strike="noStrike">
+                <a:solidFill>
+                  <a:schemeClr val="lt1"/>
+                </a:solidFill>
+                <a:latin typeface="Lato"/>
+                <a:ea typeface="Lato"/>
+                <a:cs typeface="Lato"/>
+                <a:sym typeface="Lato"/>
+              </a:defRPr>
+            </a:lvl7pPr>
+            <a:lvl8pPr indent="0" lvl="7" marL="0" marR="0" algn="r">
+              <a:lnSpc>
+                <a:spcPct val="100000"/>
+              </a:lnSpc>
+              <a:spcBef>
+                <a:spcPts val="0"/>
+              </a:spcBef>
+              <a:spcAft>
+                <a:spcPts val="0"/>
+              </a:spcAft>
+              <a:buClr>
+                <a:srgbClr val="000000"/>
+              </a:buClr>
+              <a:buSzPts val="1000"/>
+              <a:buFont typeface="Arial"/>
+              <a:buNone/>
+              <a:defRPr b="0" i="0" sz="1000" u="none" cap="none" strike="noStrike">
+                <a:solidFill>
+                  <a:schemeClr val="lt1"/>
+                </a:solidFill>
+                <a:latin typeface="Lato"/>
+                <a:ea typeface="Lato"/>
+                <a:cs typeface="Lato"/>
+                <a:sym typeface="Lato"/>
+              </a:defRPr>
+            </a:lvl8pPr>
+            <a:lvl9pPr indent="0" lvl="8" marL="0" marR="0" algn="r">
+              <a:lnSpc>
+                <a:spcPct val="100000"/>
+              </a:lnSpc>
+              <a:spcBef>
+                <a:spcPts val="0"/>
+              </a:spcBef>
+              <a:spcAft>
+                <a:spcPts val="0"/>
+              </a:spcAft>
+              <a:buClr>
+                <a:srgbClr val="000000"/>
+              </a:buClr>
+              <a:buSzPts val="1000"/>
+              <a:buFont typeface="Arial"/>
+              <a:buNone/>
+              <a:defRPr b="0" i="0" sz="1000" u="none" cap="none" strike="noStrike">
+                <a:solidFill>
+                  <a:schemeClr val="lt1"/>
+                </a:solidFill>
+                <a:latin typeface="Lato"/>
+                <a:ea typeface="Lato"/>
+                <a:cs typeface="Lato"/>
+                <a:sym typeface="Lato"/>
+              </a:defRPr>
+            </a:lvl9pPr>
+          </a:lstStyle>
+          <a:p>
+            <a:pPr indent="0" lvl="0" marL="0" rtl="0" algn="r">
+              <a:spcBef>
+                <a:spcPts val="0"/>
+              </a:spcBef>
+              <a:spcAft>
+                <a:spcPts val="0"/>
+              </a:spcAft>
+              <a:buNone/>
+            </a:pPr>
+            <a:fld id="{00000000-1234-1234-1234-123412341234}" type="slidenum">
+              <a:rPr lang="es-419"/>
+              <a:t>‹#›</a:t>
+            </a:fld>
+            <a:endParaRPr/>
+          </a:p>
+        </p:txBody>
+      </p:sp>
+    </p:spTree>
+  </p:cSld>
+  <p:clrMapOvr>
+    <a:masterClrMapping/>
+  </p:clrMapOvr>
+</p:sldLayout>
+</file>
+
+<file path=ppt/slideLayouts/slideLayout3.xml><?xml version="1.0" encoding="utf-8"?>
+<p:sldLayout xmlns:a="http://schemas.openxmlformats.org/drawingml/2006/main" xmlns:r="http://schemas.openxmlformats.org/officeDocument/2006/relationships" xmlns:mc="http://schemas.openxmlformats.org/markup-compatibility/2006" xmlns:mv="urn:schemas-microsoft-com:mac:vml" xmlns:p="http://schemas.openxmlformats.org/presentationml/2006/main" xmlns:c="http://schemas.openxmlformats.org/drawingml/2006/chart" xmlns:dgm="http://schemas.openxmlformats.org/drawingml/2006/diagram" xmlns:o="urn:schemas-microsoft-com:office:office" xmlns:v="urn:schemas-microsoft-com:vml" xmlns:pvml="urn:schemas-microsoft-com:office:powerpoint" xmlns:com="http://schemas.openxmlformats.org/drawingml/2006/compatibility" xmlns:p14="http://schemas.microsoft.com/office/powerpoint/2010/main" xmlns:p15="http://schemas.microsoft.com/office/powerpoint/2012/main" xmlns:ahyp="http://schemas.microsoft.com/office/drawing/2018/hyperlinkcolor" matchingName="Title and body" type="tx">
+  <p:cSld name="TITLE_AND_BODY">
+    <p:spTree>
+      <p:nvGrpSpPr>
+        <p:cNvPr id="23" name="Shape 23"/>
+        <p:cNvGrpSpPr/>
+        <p:nvPr/>
+      </p:nvGrpSpPr>
+      <p:grpSpPr>
+        <a:xfrm>
+          <a:off x="0" y="0"/>
+          <a:ext cx="0" cy="0"/>
+          <a:chOff x="0" y="0"/>
+          <a:chExt cx="0" cy="0"/>
+        </a:xfrm>
+      </p:grpSpPr>
+      <p:sp>
+        <p:nvSpPr>
+          <p:cNvPr id="24" name="Google Shape;24;p58"/>
           <p:cNvSpPr/>
           <p:nvPr/>
         </p:nvSpPr>
@@ -5164,7 +6499,7 @@
       </p:sp>
       <p:grpSp>
         <p:nvGrpSpPr>
-          <p:cNvPr id="19" name="Google Shape;19;p58"/>
+          <p:cNvPr id="25" name="Google Shape;25;p58"/>
           <p:cNvGrpSpPr/>
           <p:nvPr/>
         </p:nvGrpSpPr>
@@ -5178,7 +6513,7 @@
         </p:grpSpPr>
         <p:sp>
           <p:nvSpPr>
-            <p:cNvPr id="20" name="Google Shape;20;p58"/>
+            <p:cNvPr id="26" name="Google Shape;26;p58"/>
             <p:cNvSpPr/>
             <p:nvPr/>
           </p:nvSpPr>
@@ -5237,7 +6572,7 @@
         </p:sp>
         <p:sp>
           <p:nvSpPr>
-            <p:cNvPr id="21" name="Google Shape;21;p58"/>
+            <p:cNvPr id="27" name="Google Shape;27;p58"/>
             <p:cNvSpPr/>
             <p:nvPr/>
           </p:nvSpPr>
@@ -5297,7 +6632,7 @@
       </p:grpSp>
       <p:sp>
         <p:nvSpPr>
-          <p:cNvPr id="22" name="Google Shape;22;p58"/>
+          <p:cNvPr id="28" name="Google Shape;28;p58"/>
           <p:cNvSpPr txBox="1"/>
           <p:nvPr>
             <p:ph type="title"/>
@@ -5453,7 +6788,7 @@
       </p:sp>
       <p:sp>
         <p:nvSpPr>
-          <p:cNvPr id="23" name="Google Shape;23;p58"/>
+          <p:cNvPr id="29" name="Google Shape;29;p58"/>
           <p:cNvSpPr txBox="1"/>
           <p:nvPr>
             <p:ph idx="1" type="body"/>
@@ -5609,7 +6944,7 @@
       </p:sp>
       <p:sp>
         <p:nvSpPr>
-          <p:cNvPr id="24" name="Google Shape;24;p58"/>
+          <p:cNvPr id="30" name="Google Shape;30;p58"/>
           <p:cNvSpPr txBox="1"/>
           <p:nvPr>
             <p:ph idx="12" type="sldNum"/>
@@ -5894,12 +7229,12 @@
 </p:sldLayout>
 </file>
 
-<file path=ppt/slideLayouts/slideLayout3.xml><?xml version="1.0" encoding="utf-8"?>
+<file path=ppt/slideLayouts/slideLayout4.xml><?xml version="1.0" encoding="utf-8"?>
 <p:sldLayout xmlns:a="http://schemas.openxmlformats.org/drawingml/2006/main" xmlns:r="http://schemas.openxmlformats.org/officeDocument/2006/relationships" xmlns:mc="http://schemas.openxmlformats.org/markup-compatibility/2006" xmlns:mv="urn:schemas-microsoft-com:mac:vml" xmlns:p="http://schemas.openxmlformats.org/presentationml/2006/main" xmlns:c="http://schemas.openxmlformats.org/drawingml/2006/chart" xmlns:dgm="http://schemas.openxmlformats.org/drawingml/2006/diagram" xmlns:o="urn:schemas-microsoft-com:office:office" xmlns:v="urn:schemas-microsoft-com:vml" xmlns:pvml="urn:schemas-microsoft-com:office:powerpoint" xmlns:com="http://schemas.openxmlformats.org/drawingml/2006/compatibility" xmlns:p14="http://schemas.microsoft.com/office/powerpoint/2010/main" xmlns:p15="http://schemas.microsoft.com/office/powerpoint/2012/main" xmlns:ahyp="http://schemas.microsoft.com/office/drawing/2018/hyperlinkcolor" matchingName="Section title and description">
   <p:cSld name="SECTION_TITLE_AND_DESCRIPTION">
     <p:spTree>
       <p:nvGrpSpPr>
-        <p:cNvPr id="25" name="Shape 25"/>
+        <p:cNvPr id="31" name="Shape 31"/>
         <p:cNvGrpSpPr/>
         <p:nvPr/>
       </p:nvGrpSpPr>
@@ -5913,7 +7248,7 @@
       </p:grpSpPr>
       <p:sp>
         <p:nvSpPr>
-          <p:cNvPr id="26" name="Google Shape;26;p59"/>
+          <p:cNvPr id="32" name="Google Shape;32;p59"/>
           <p:cNvSpPr/>
           <p:nvPr/>
         </p:nvSpPr>
@@ -5972,7 +7307,7 @@
       </p:sp>
       <p:grpSp>
         <p:nvGrpSpPr>
-          <p:cNvPr id="27" name="Google Shape;27;p59"/>
+          <p:cNvPr id="33" name="Google Shape;33;p59"/>
           <p:cNvGrpSpPr/>
           <p:nvPr/>
         </p:nvGrpSpPr>
@@ -5986,7 +7321,7 @@
         </p:grpSpPr>
         <p:sp>
           <p:nvSpPr>
-            <p:cNvPr id="28" name="Google Shape;28;p59"/>
+            <p:cNvPr id="34" name="Google Shape;34;p59"/>
             <p:cNvSpPr/>
             <p:nvPr/>
           </p:nvSpPr>
@@ -6045,7 +7380,7 @@
         </p:sp>
         <p:sp>
           <p:nvSpPr>
-            <p:cNvPr id="29" name="Google Shape;29;p59"/>
+            <p:cNvPr id="35" name="Google Shape;35;p59"/>
             <p:cNvSpPr/>
             <p:nvPr/>
           </p:nvSpPr>
@@ -6105,7 +7440,7 @@
       </p:grpSp>
       <p:sp>
         <p:nvSpPr>
-          <p:cNvPr id="30" name="Google Shape;30;p59"/>
+          <p:cNvPr id="36" name="Google Shape;36;p59"/>
           <p:cNvSpPr txBox="1"/>
           <p:nvPr>
             <p:ph type="title"/>
@@ -6261,7 +7596,7 @@
       </p:sp>
       <p:sp>
         <p:nvSpPr>
-          <p:cNvPr id="31" name="Google Shape;31;p59"/>
+          <p:cNvPr id="37" name="Google Shape;37;p59"/>
           <p:cNvSpPr txBox="1"/>
           <p:nvPr>
             <p:ph idx="1" type="subTitle"/>
@@ -6417,7 +7752,7 @@
       </p:sp>
       <p:sp>
         <p:nvSpPr>
-          <p:cNvPr id="32" name="Google Shape;32;p59"/>
+          <p:cNvPr id="38" name="Google Shape;38;p59"/>
           <p:cNvSpPr txBox="1"/>
           <p:nvPr>
             <p:ph idx="2" type="body"/>
@@ -6573,7 +7908,7 @@
       </p:sp>
       <p:sp>
         <p:nvSpPr>
-          <p:cNvPr id="33" name="Google Shape;33;p59"/>
+          <p:cNvPr id="39" name="Google Shape;39;p59"/>
           <p:cNvSpPr txBox="1"/>
           <p:nvPr>
             <p:ph idx="12" type="sldNum"/>
@@ -6824,669 +8159,6 @@
               <a:defRPr b="0" i="0" sz="1000" u="none" cap="none" strike="noStrike">
                 <a:solidFill>
                   <a:schemeClr val="accent1"/>
-                </a:solidFill>
-                <a:latin typeface="Lato"/>
-                <a:ea typeface="Lato"/>
-                <a:cs typeface="Lato"/>
-                <a:sym typeface="Lato"/>
-              </a:defRPr>
-            </a:lvl9pPr>
-          </a:lstStyle>
-          <a:p>
-            <a:pPr indent="0" lvl="0" marL="0" rtl="0" algn="r">
-              <a:spcBef>
-                <a:spcPts val="0"/>
-              </a:spcBef>
-              <a:spcAft>
-                <a:spcPts val="0"/>
-              </a:spcAft>
-              <a:buNone/>
-            </a:pPr>
-            <a:fld id="{00000000-1234-1234-1234-123412341234}" type="slidenum">
-              <a:rPr lang="es-419"/>
-              <a:t>‹#›</a:t>
-            </a:fld>
-            <a:endParaRPr/>
-          </a:p>
-        </p:txBody>
-      </p:sp>
-    </p:spTree>
-  </p:cSld>
-  <p:clrMapOvr>
-    <a:masterClrMapping/>
-  </p:clrMapOvr>
-</p:sldLayout>
-</file>
-
-<file path=ppt/slideLayouts/slideLayout4.xml><?xml version="1.0" encoding="utf-8"?>
-<p:sldLayout xmlns:a="http://schemas.openxmlformats.org/drawingml/2006/main" xmlns:r="http://schemas.openxmlformats.org/officeDocument/2006/relationships" xmlns:mc="http://schemas.openxmlformats.org/markup-compatibility/2006" xmlns:mv="urn:schemas-microsoft-com:mac:vml" xmlns:p="http://schemas.openxmlformats.org/presentationml/2006/main" xmlns:c="http://schemas.openxmlformats.org/drawingml/2006/chart" xmlns:dgm="http://schemas.openxmlformats.org/drawingml/2006/diagram" xmlns:o="urn:schemas-microsoft-com:office:office" xmlns:v="urn:schemas-microsoft-com:vml" xmlns:pvml="urn:schemas-microsoft-com:office:powerpoint" xmlns:com="http://schemas.openxmlformats.org/drawingml/2006/compatibility" xmlns:p14="http://schemas.microsoft.com/office/powerpoint/2010/main" xmlns:p15="http://schemas.microsoft.com/office/powerpoint/2012/main" xmlns:ahyp="http://schemas.microsoft.com/office/drawing/2018/hyperlinkcolor" matchingName="Section header" type="secHead">
-  <p:cSld name="SECTION_HEADER">
-    <p:bg>
-      <p:bgPr>
-        <a:solidFill>
-          <a:schemeClr val="dk1"/>
-        </a:solidFill>
-      </p:bgPr>
-    </p:bg>
-    <p:spTree>
-      <p:nvGrpSpPr>
-        <p:cNvPr id="34" name="Shape 34"/>
-        <p:cNvGrpSpPr/>
-        <p:nvPr/>
-      </p:nvGrpSpPr>
-      <p:grpSpPr>
-        <a:xfrm>
-          <a:off x="0" y="0"/>
-          <a:ext cx="0" cy="0"/>
-          <a:chOff x="0" y="0"/>
-          <a:chExt cx="0" cy="0"/>
-        </a:xfrm>
-      </p:grpSpPr>
-      <p:grpSp>
-        <p:nvGrpSpPr>
-          <p:cNvPr id="35" name="Google Shape;35;p60"/>
-          <p:cNvGrpSpPr/>
-          <p:nvPr/>
-        </p:nvGrpSpPr>
-        <p:grpSpPr>
-          <a:xfrm>
-            <a:off x="830392" y="1191256"/>
-            <a:ext cx="745763" cy="45826"/>
-            <a:chOff x="4580561" y="2589004"/>
-            <a:chExt cx="1064464" cy="25200"/>
-          </a:xfrm>
-        </p:grpSpPr>
-        <p:sp>
-          <p:nvSpPr>
-            <p:cNvPr id="36" name="Google Shape;36;p60"/>
-            <p:cNvSpPr/>
-            <p:nvPr/>
-          </p:nvSpPr>
-          <p:spPr>
-            <a:xfrm rot="-5400000">
-              <a:off x="5366325" y="2335504"/>
-              <a:ext cx="25200" cy="532200"/>
-            </a:xfrm>
-            <a:prstGeom prst="rect">
-              <a:avLst/>
-            </a:prstGeom>
-            <a:solidFill>
-              <a:schemeClr val="lt1"/>
-            </a:solidFill>
-            <a:ln>
-              <a:noFill/>
-            </a:ln>
-          </p:spPr>
-          <p:txBody>
-            <a:bodyPr anchorCtr="0" anchor="ctr" bIns="91425" lIns="91425" spcFirstLastPara="1" rIns="91425" wrap="square" tIns="91425">
-              <a:noAutofit/>
-            </a:bodyPr>
-            <a:lstStyle/>
-            <a:p>
-              <a:pPr indent="0" lvl="0" marL="0" marR="0" rtl="0" algn="l">
-                <a:lnSpc>
-                  <a:spcPct val="100000"/>
-                </a:lnSpc>
-                <a:spcBef>
-                  <a:spcPts val="0"/>
-                </a:spcBef>
-                <a:spcAft>
-                  <a:spcPts val="0"/>
-                </a:spcAft>
-                <a:buClr>
-                  <a:srgbClr val="000000"/>
-                </a:buClr>
-                <a:buSzPts val="1400"/>
-                <a:buFont typeface="Arial"/>
-                <a:buNone/>
-              </a:pPr>
-              <a:r>
-                <a:t/>
-              </a:r>
-              <a:endParaRPr b="0" i="0" sz="1400" u="none" cap="none" strike="noStrike">
-                <a:solidFill>
-                  <a:srgbClr val="000000"/>
-                </a:solidFill>
-                <a:latin typeface="Arial"/>
-                <a:ea typeface="Arial"/>
-                <a:cs typeface="Arial"/>
-                <a:sym typeface="Arial"/>
-              </a:endParaRPr>
-            </a:p>
-          </p:txBody>
-        </p:sp>
-        <p:sp>
-          <p:nvSpPr>
-            <p:cNvPr id="37" name="Google Shape;37;p60"/>
-            <p:cNvSpPr/>
-            <p:nvPr/>
-          </p:nvSpPr>
-          <p:spPr>
-            <a:xfrm rot="-5400000">
-              <a:off x="4836311" y="2333254"/>
-              <a:ext cx="25200" cy="536700"/>
-            </a:xfrm>
-            <a:prstGeom prst="rect">
-              <a:avLst/>
-            </a:prstGeom>
-            <a:solidFill>
-              <a:schemeClr val="lt1"/>
-            </a:solidFill>
-            <a:ln>
-              <a:noFill/>
-            </a:ln>
-          </p:spPr>
-          <p:txBody>
-            <a:bodyPr anchorCtr="0" anchor="ctr" bIns="91425" lIns="91425" spcFirstLastPara="1" rIns="91425" wrap="square" tIns="91425">
-              <a:noAutofit/>
-            </a:bodyPr>
-            <a:lstStyle/>
-            <a:p>
-              <a:pPr indent="0" lvl="0" marL="0" marR="0" rtl="0" algn="l">
-                <a:lnSpc>
-                  <a:spcPct val="100000"/>
-                </a:lnSpc>
-                <a:spcBef>
-                  <a:spcPts val="0"/>
-                </a:spcBef>
-                <a:spcAft>
-                  <a:spcPts val="0"/>
-                </a:spcAft>
-                <a:buClr>
-                  <a:srgbClr val="000000"/>
-                </a:buClr>
-                <a:buSzPts val="1400"/>
-                <a:buFont typeface="Arial"/>
-                <a:buNone/>
-              </a:pPr>
-              <a:r>
-                <a:t/>
-              </a:r>
-              <a:endParaRPr b="0" i="0" sz="1400" u="none" cap="none" strike="noStrike">
-                <a:solidFill>
-                  <a:srgbClr val="000000"/>
-                </a:solidFill>
-                <a:latin typeface="Arial"/>
-                <a:ea typeface="Arial"/>
-                <a:cs typeface="Arial"/>
-                <a:sym typeface="Arial"/>
-              </a:endParaRPr>
-            </a:p>
-          </p:txBody>
-        </p:sp>
-      </p:grpSp>
-      <p:sp>
-        <p:nvSpPr>
-          <p:cNvPr id="38" name="Google Shape;38;p60"/>
-          <p:cNvSpPr txBox="1"/>
-          <p:nvPr>
-            <p:ph type="title"/>
-          </p:nvPr>
-        </p:nvSpPr>
-        <p:spPr>
-          <a:xfrm>
-            <a:off x="729450" y="1322450"/>
-            <a:ext cx="7688400" cy="1518600"/>
-          </a:xfrm>
-          <a:prstGeom prst="rect">
-            <a:avLst/>
-          </a:prstGeom>
-          <a:noFill/>
-          <a:ln>
-            <a:noFill/>
-          </a:ln>
-        </p:spPr>
-        <p:txBody>
-          <a:bodyPr anchorCtr="0" anchor="t" bIns="91425" lIns="91425" spcFirstLastPara="1" rIns="91425" wrap="square" tIns="91425">
-            <a:normAutofit/>
-          </a:bodyPr>
-          <a:lstStyle>
-            <a:lvl1pPr lvl="0" algn="l">
-              <a:lnSpc>
-                <a:spcPct val="100000"/>
-              </a:lnSpc>
-              <a:spcBef>
-                <a:spcPts val="0"/>
-              </a:spcBef>
-              <a:spcAft>
-                <a:spcPts val="0"/>
-              </a:spcAft>
-              <a:buClr>
-                <a:schemeClr val="lt1"/>
-              </a:buClr>
-              <a:buSzPts val="3600"/>
-              <a:buNone/>
-              <a:defRPr sz="3600">
-                <a:solidFill>
-                  <a:schemeClr val="lt1"/>
-                </a:solidFill>
-              </a:defRPr>
-            </a:lvl1pPr>
-            <a:lvl2pPr lvl="1" algn="l">
-              <a:lnSpc>
-                <a:spcPct val="100000"/>
-              </a:lnSpc>
-              <a:spcBef>
-                <a:spcPts val="0"/>
-              </a:spcBef>
-              <a:spcAft>
-                <a:spcPts val="0"/>
-              </a:spcAft>
-              <a:buClr>
-                <a:schemeClr val="lt1"/>
-              </a:buClr>
-              <a:buSzPts val="3600"/>
-              <a:buNone/>
-              <a:defRPr sz="3600">
-                <a:solidFill>
-                  <a:schemeClr val="lt1"/>
-                </a:solidFill>
-              </a:defRPr>
-            </a:lvl2pPr>
-            <a:lvl3pPr lvl="2" algn="l">
-              <a:lnSpc>
-                <a:spcPct val="100000"/>
-              </a:lnSpc>
-              <a:spcBef>
-                <a:spcPts val="0"/>
-              </a:spcBef>
-              <a:spcAft>
-                <a:spcPts val="0"/>
-              </a:spcAft>
-              <a:buClr>
-                <a:schemeClr val="lt1"/>
-              </a:buClr>
-              <a:buSzPts val="3600"/>
-              <a:buNone/>
-              <a:defRPr sz="3600">
-                <a:solidFill>
-                  <a:schemeClr val="lt1"/>
-                </a:solidFill>
-              </a:defRPr>
-            </a:lvl3pPr>
-            <a:lvl4pPr lvl="3" algn="l">
-              <a:lnSpc>
-                <a:spcPct val="100000"/>
-              </a:lnSpc>
-              <a:spcBef>
-                <a:spcPts val="0"/>
-              </a:spcBef>
-              <a:spcAft>
-                <a:spcPts val="0"/>
-              </a:spcAft>
-              <a:buClr>
-                <a:schemeClr val="lt1"/>
-              </a:buClr>
-              <a:buSzPts val="3600"/>
-              <a:buNone/>
-              <a:defRPr sz="3600">
-                <a:solidFill>
-                  <a:schemeClr val="lt1"/>
-                </a:solidFill>
-              </a:defRPr>
-            </a:lvl4pPr>
-            <a:lvl5pPr lvl="4" algn="l">
-              <a:lnSpc>
-                <a:spcPct val="100000"/>
-              </a:lnSpc>
-              <a:spcBef>
-                <a:spcPts val="0"/>
-              </a:spcBef>
-              <a:spcAft>
-                <a:spcPts val="0"/>
-              </a:spcAft>
-              <a:buClr>
-                <a:schemeClr val="lt1"/>
-              </a:buClr>
-              <a:buSzPts val="3600"/>
-              <a:buNone/>
-              <a:defRPr sz="3600">
-                <a:solidFill>
-                  <a:schemeClr val="lt1"/>
-                </a:solidFill>
-              </a:defRPr>
-            </a:lvl5pPr>
-            <a:lvl6pPr lvl="5" algn="l">
-              <a:lnSpc>
-                <a:spcPct val="100000"/>
-              </a:lnSpc>
-              <a:spcBef>
-                <a:spcPts val="0"/>
-              </a:spcBef>
-              <a:spcAft>
-                <a:spcPts val="0"/>
-              </a:spcAft>
-              <a:buClr>
-                <a:schemeClr val="lt1"/>
-              </a:buClr>
-              <a:buSzPts val="3600"/>
-              <a:buNone/>
-              <a:defRPr sz="3600">
-                <a:solidFill>
-                  <a:schemeClr val="lt1"/>
-                </a:solidFill>
-              </a:defRPr>
-            </a:lvl6pPr>
-            <a:lvl7pPr lvl="6" algn="l">
-              <a:lnSpc>
-                <a:spcPct val="100000"/>
-              </a:lnSpc>
-              <a:spcBef>
-                <a:spcPts val="0"/>
-              </a:spcBef>
-              <a:spcAft>
-                <a:spcPts val="0"/>
-              </a:spcAft>
-              <a:buClr>
-                <a:schemeClr val="lt1"/>
-              </a:buClr>
-              <a:buSzPts val="3600"/>
-              <a:buNone/>
-              <a:defRPr sz="3600">
-                <a:solidFill>
-                  <a:schemeClr val="lt1"/>
-                </a:solidFill>
-              </a:defRPr>
-            </a:lvl7pPr>
-            <a:lvl8pPr lvl="7" algn="l">
-              <a:lnSpc>
-                <a:spcPct val="100000"/>
-              </a:lnSpc>
-              <a:spcBef>
-                <a:spcPts val="0"/>
-              </a:spcBef>
-              <a:spcAft>
-                <a:spcPts val="0"/>
-              </a:spcAft>
-              <a:buClr>
-                <a:schemeClr val="lt1"/>
-              </a:buClr>
-              <a:buSzPts val="3600"/>
-              <a:buNone/>
-              <a:defRPr sz="3600">
-                <a:solidFill>
-                  <a:schemeClr val="lt1"/>
-                </a:solidFill>
-              </a:defRPr>
-            </a:lvl8pPr>
-            <a:lvl9pPr lvl="8" algn="l">
-              <a:lnSpc>
-                <a:spcPct val="100000"/>
-              </a:lnSpc>
-              <a:spcBef>
-                <a:spcPts val="0"/>
-              </a:spcBef>
-              <a:spcAft>
-                <a:spcPts val="0"/>
-              </a:spcAft>
-              <a:buClr>
-                <a:schemeClr val="lt1"/>
-              </a:buClr>
-              <a:buSzPts val="3600"/>
-              <a:buNone/>
-              <a:defRPr sz="3600">
-                <a:solidFill>
-                  <a:schemeClr val="lt1"/>
-                </a:solidFill>
-              </a:defRPr>
-            </a:lvl9pPr>
-          </a:lstStyle>
-          <a:p/>
-        </p:txBody>
-      </p:sp>
-      <p:sp>
-        <p:nvSpPr>
-          <p:cNvPr id="39" name="Google Shape;39;p60"/>
-          <p:cNvSpPr txBox="1"/>
-          <p:nvPr>
-            <p:ph idx="12" type="sldNum"/>
-          </p:nvPr>
-        </p:nvSpPr>
-        <p:spPr>
-          <a:xfrm>
-            <a:off x="8536302" y="4749851"/>
-            <a:ext cx="548700" cy="393600"/>
-          </a:xfrm>
-          <a:prstGeom prst="rect">
-            <a:avLst/>
-          </a:prstGeom>
-          <a:noFill/>
-          <a:ln>
-            <a:noFill/>
-          </a:ln>
-        </p:spPr>
-        <p:txBody>
-          <a:bodyPr anchorCtr="0" anchor="ctr" bIns="91425" lIns="91425" spcFirstLastPara="1" rIns="91425" wrap="square" tIns="91425">
-            <a:normAutofit/>
-          </a:bodyPr>
-          <a:lstStyle>
-            <a:lvl1pPr indent="0" lvl="0" marL="0" marR="0" algn="r">
-              <a:lnSpc>
-                <a:spcPct val="100000"/>
-              </a:lnSpc>
-              <a:spcBef>
-                <a:spcPts val="0"/>
-              </a:spcBef>
-              <a:spcAft>
-                <a:spcPts val="0"/>
-              </a:spcAft>
-              <a:buClr>
-                <a:srgbClr val="000000"/>
-              </a:buClr>
-              <a:buSzPts val="1000"/>
-              <a:buFont typeface="Arial"/>
-              <a:buNone/>
-              <a:defRPr b="0" i="0" sz="1000" u="none" cap="none" strike="noStrike">
-                <a:solidFill>
-                  <a:schemeClr val="lt1"/>
-                </a:solidFill>
-                <a:latin typeface="Lato"/>
-                <a:ea typeface="Lato"/>
-                <a:cs typeface="Lato"/>
-                <a:sym typeface="Lato"/>
-              </a:defRPr>
-            </a:lvl1pPr>
-            <a:lvl2pPr indent="0" lvl="1" marL="0" marR="0" algn="r">
-              <a:lnSpc>
-                <a:spcPct val="100000"/>
-              </a:lnSpc>
-              <a:spcBef>
-                <a:spcPts val="0"/>
-              </a:spcBef>
-              <a:spcAft>
-                <a:spcPts val="0"/>
-              </a:spcAft>
-              <a:buClr>
-                <a:srgbClr val="000000"/>
-              </a:buClr>
-              <a:buSzPts val="1000"/>
-              <a:buFont typeface="Arial"/>
-              <a:buNone/>
-              <a:defRPr b="0" i="0" sz="1000" u="none" cap="none" strike="noStrike">
-                <a:solidFill>
-                  <a:schemeClr val="lt1"/>
-                </a:solidFill>
-                <a:latin typeface="Lato"/>
-                <a:ea typeface="Lato"/>
-                <a:cs typeface="Lato"/>
-                <a:sym typeface="Lato"/>
-              </a:defRPr>
-            </a:lvl2pPr>
-            <a:lvl3pPr indent="0" lvl="2" marL="0" marR="0" algn="r">
-              <a:lnSpc>
-                <a:spcPct val="100000"/>
-              </a:lnSpc>
-              <a:spcBef>
-                <a:spcPts val="0"/>
-              </a:spcBef>
-              <a:spcAft>
-                <a:spcPts val="0"/>
-              </a:spcAft>
-              <a:buClr>
-                <a:srgbClr val="000000"/>
-              </a:buClr>
-              <a:buSzPts val="1000"/>
-              <a:buFont typeface="Arial"/>
-              <a:buNone/>
-              <a:defRPr b="0" i="0" sz="1000" u="none" cap="none" strike="noStrike">
-                <a:solidFill>
-                  <a:schemeClr val="lt1"/>
-                </a:solidFill>
-                <a:latin typeface="Lato"/>
-                <a:ea typeface="Lato"/>
-                <a:cs typeface="Lato"/>
-                <a:sym typeface="Lato"/>
-              </a:defRPr>
-            </a:lvl3pPr>
-            <a:lvl4pPr indent="0" lvl="3" marL="0" marR="0" algn="r">
-              <a:lnSpc>
-                <a:spcPct val="100000"/>
-              </a:lnSpc>
-              <a:spcBef>
-                <a:spcPts val="0"/>
-              </a:spcBef>
-              <a:spcAft>
-                <a:spcPts val="0"/>
-              </a:spcAft>
-              <a:buClr>
-                <a:srgbClr val="000000"/>
-              </a:buClr>
-              <a:buSzPts val="1000"/>
-              <a:buFont typeface="Arial"/>
-              <a:buNone/>
-              <a:defRPr b="0" i="0" sz="1000" u="none" cap="none" strike="noStrike">
-                <a:solidFill>
-                  <a:schemeClr val="lt1"/>
-                </a:solidFill>
-                <a:latin typeface="Lato"/>
-                <a:ea typeface="Lato"/>
-                <a:cs typeface="Lato"/>
-                <a:sym typeface="Lato"/>
-              </a:defRPr>
-            </a:lvl4pPr>
-            <a:lvl5pPr indent="0" lvl="4" marL="0" marR="0" algn="r">
-              <a:lnSpc>
-                <a:spcPct val="100000"/>
-              </a:lnSpc>
-              <a:spcBef>
-                <a:spcPts val="0"/>
-              </a:spcBef>
-              <a:spcAft>
-                <a:spcPts val="0"/>
-              </a:spcAft>
-              <a:buClr>
-                <a:srgbClr val="000000"/>
-              </a:buClr>
-              <a:buSzPts val="1000"/>
-              <a:buFont typeface="Arial"/>
-              <a:buNone/>
-              <a:defRPr b="0" i="0" sz="1000" u="none" cap="none" strike="noStrike">
-                <a:solidFill>
-                  <a:schemeClr val="lt1"/>
-                </a:solidFill>
-                <a:latin typeface="Lato"/>
-                <a:ea typeface="Lato"/>
-                <a:cs typeface="Lato"/>
-                <a:sym typeface="Lato"/>
-              </a:defRPr>
-            </a:lvl5pPr>
-            <a:lvl6pPr indent="0" lvl="5" marL="0" marR="0" algn="r">
-              <a:lnSpc>
-                <a:spcPct val="100000"/>
-              </a:lnSpc>
-              <a:spcBef>
-                <a:spcPts val="0"/>
-              </a:spcBef>
-              <a:spcAft>
-                <a:spcPts val="0"/>
-              </a:spcAft>
-              <a:buClr>
-                <a:srgbClr val="000000"/>
-              </a:buClr>
-              <a:buSzPts val="1000"/>
-              <a:buFont typeface="Arial"/>
-              <a:buNone/>
-              <a:defRPr b="0" i="0" sz="1000" u="none" cap="none" strike="noStrike">
-                <a:solidFill>
-                  <a:schemeClr val="lt1"/>
-                </a:solidFill>
-                <a:latin typeface="Lato"/>
-                <a:ea typeface="Lato"/>
-                <a:cs typeface="Lato"/>
-                <a:sym typeface="Lato"/>
-              </a:defRPr>
-            </a:lvl6pPr>
-            <a:lvl7pPr indent="0" lvl="6" marL="0" marR="0" algn="r">
-              <a:lnSpc>
-                <a:spcPct val="100000"/>
-              </a:lnSpc>
-              <a:spcBef>
-                <a:spcPts val="0"/>
-              </a:spcBef>
-              <a:spcAft>
-                <a:spcPts val="0"/>
-              </a:spcAft>
-              <a:buClr>
-                <a:srgbClr val="000000"/>
-              </a:buClr>
-              <a:buSzPts val="1000"/>
-              <a:buFont typeface="Arial"/>
-              <a:buNone/>
-              <a:defRPr b="0" i="0" sz="1000" u="none" cap="none" strike="noStrike">
-                <a:solidFill>
-                  <a:schemeClr val="lt1"/>
-                </a:solidFill>
-                <a:latin typeface="Lato"/>
-                <a:ea typeface="Lato"/>
-                <a:cs typeface="Lato"/>
-                <a:sym typeface="Lato"/>
-              </a:defRPr>
-            </a:lvl7pPr>
-            <a:lvl8pPr indent="0" lvl="7" marL="0" marR="0" algn="r">
-              <a:lnSpc>
-                <a:spcPct val="100000"/>
-              </a:lnSpc>
-              <a:spcBef>
-                <a:spcPts val="0"/>
-              </a:spcBef>
-              <a:spcAft>
-                <a:spcPts val="0"/>
-              </a:spcAft>
-              <a:buClr>
-                <a:srgbClr val="000000"/>
-              </a:buClr>
-              <a:buSzPts val="1000"/>
-              <a:buFont typeface="Arial"/>
-              <a:buNone/>
-              <a:defRPr b="0" i="0" sz="1000" u="none" cap="none" strike="noStrike">
-                <a:solidFill>
-                  <a:schemeClr val="lt1"/>
-                </a:solidFill>
-                <a:latin typeface="Lato"/>
-                <a:ea typeface="Lato"/>
-                <a:cs typeface="Lato"/>
-                <a:sym typeface="Lato"/>
-              </a:defRPr>
-            </a:lvl8pPr>
-            <a:lvl9pPr indent="0" lvl="8" marL="0" marR="0" algn="r">
-              <a:lnSpc>
-                <a:spcPct val="100000"/>
-              </a:lnSpc>
-              <a:spcBef>
-                <a:spcPts val="0"/>
-              </a:spcBef>
-              <a:spcAft>
-                <a:spcPts val="0"/>
-              </a:spcAft>
-              <a:buClr>
-                <a:srgbClr val="000000"/>
-              </a:buClr>
-              <a:buSzPts val="1000"/>
-              <a:buFont typeface="Arial"/>
-              <a:buNone/>
-              <a:defRPr b="0" i="0" sz="1000" u="none" cap="none" strike="noStrike">
-                <a:solidFill>
-                  <a:schemeClr val="lt1"/>
                 </a:solidFill>
                 <a:latin typeface="Lato"/>
                 <a:ea typeface="Lato"/>
@@ -11831,7 +12503,7 @@
           <a:srgbClr val="000000"/>
         </a:buClr>
         <a:buFont typeface="Arial"/>
-        <a:defRPr b="0" i="0" sz="1400" u="none" cap="none" strike="noStrike">
+        <a:defRPr b="0" i="0" spc="0" sz="1400" u="none" cap="none" strike="noStrike">
           <a:solidFill>
             <a:srgbClr val="000000"/>
           </a:solidFill>
@@ -11855,7 +12527,7 @@
           <a:srgbClr val="000000"/>
         </a:buClr>
         <a:buFont typeface="Arial"/>
-        <a:defRPr b="0" i="0" sz="1400" u="none" cap="none" strike="noStrike">
+        <a:defRPr b="0" i="0" spc="0" sz="1400" u="none" cap="none" strike="noStrike">
           <a:solidFill>
             <a:srgbClr val="000000"/>
           </a:solidFill>
@@ -11879,7 +12551,7 @@
           <a:srgbClr val="000000"/>
         </a:buClr>
         <a:buFont typeface="Arial"/>
-        <a:defRPr b="0" i="0" sz="1400" u="none" cap="none" strike="noStrike">
+        <a:defRPr b="0" i="0" spc="0" sz="1400" u="none" cap="none" strike="noStrike">
           <a:solidFill>
             <a:srgbClr val="000000"/>
           </a:solidFill>
@@ -11903,7 +12575,7 @@
           <a:srgbClr val="000000"/>
         </a:buClr>
         <a:buFont typeface="Arial"/>
-        <a:defRPr b="0" i="0" sz="1400" u="none" cap="none" strike="noStrike">
+        <a:defRPr b="0" i="0" spc="0" sz="1400" u="none" cap="none" strike="noStrike">
           <a:solidFill>
             <a:srgbClr val="000000"/>
           </a:solidFill>
@@ -11927,7 +12599,7 @@
           <a:srgbClr val="000000"/>
         </a:buClr>
         <a:buFont typeface="Arial"/>
-        <a:defRPr b="0" i="0" sz="1400" u="none" cap="none" strike="noStrike">
+        <a:defRPr b="0" i="0" spc="0" sz="1400" u="none" cap="none" strike="noStrike">
           <a:solidFill>
             <a:srgbClr val="000000"/>
           </a:solidFill>
@@ -11951,7 +12623,7 @@
           <a:srgbClr val="000000"/>
         </a:buClr>
         <a:buFont typeface="Arial"/>
-        <a:defRPr b="0" i="0" sz="1400" u="none" cap="none" strike="noStrike">
+        <a:defRPr b="0" i="0" spc="0" sz="1400" u="none" cap="none" strike="noStrike">
           <a:solidFill>
             <a:srgbClr val="000000"/>
           </a:solidFill>
@@ -11975,7 +12647,7 @@
           <a:srgbClr val="000000"/>
         </a:buClr>
         <a:buFont typeface="Arial"/>
-        <a:defRPr b="0" i="0" sz="1400" u="none" cap="none" strike="noStrike">
+        <a:defRPr b="0" i="0" spc="0" sz="1400" u="none" cap="none" strike="noStrike">
           <a:solidFill>
             <a:srgbClr val="000000"/>
           </a:solidFill>
@@ -11999,7 +12671,7 @@
           <a:srgbClr val="000000"/>
         </a:buClr>
         <a:buFont typeface="Arial"/>
-        <a:defRPr b="0" i="0" sz="1400" u="none" cap="none" strike="noStrike">
+        <a:defRPr b="0" i="0" spc="0" sz="1400" u="none" cap="none" strike="noStrike">
           <a:solidFill>
             <a:srgbClr val="000000"/>
           </a:solidFill>
@@ -12023,7 +12695,7 @@
           <a:srgbClr val="000000"/>
         </a:buClr>
         <a:buFont typeface="Arial"/>
-        <a:defRPr b="0" i="0" sz="1400" u="none" cap="none" strike="noStrike">
+        <a:defRPr b="0" i="0" spc="0" sz="1400" u="none" cap="none" strike="noStrike">
           <a:solidFill>
             <a:srgbClr val="000000"/>
           </a:solidFill>
@@ -12060,7 +12732,7 @@
           <a:srgbClr val="000000"/>
         </a:buClr>
         <a:buFont typeface="Arial"/>
-        <a:defRPr b="0" i="0" sz="1400" u="none" cap="none" strike="noStrike">
+        <a:defRPr b="0" i="0" spc="0" sz="1400" u="none" cap="none" strike="noStrike">
           <a:solidFill>
             <a:srgbClr val="000000"/>
           </a:solidFill>
@@ -12084,7 +12756,7 @@
           <a:srgbClr val="000000"/>
         </a:buClr>
         <a:buFont typeface="Arial"/>
-        <a:defRPr b="0" i="0" sz="1400" u="none" cap="none" strike="noStrike">
+        <a:defRPr b="0" i="0" spc="0" sz="1400" u="none" cap="none" strike="noStrike">
           <a:solidFill>
             <a:srgbClr val="000000"/>
           </a:solidFill>
@@ -12108,7 +12780,7 @@
           <a:srgbClr val="000000"/>
         </a:buClr>
         <a:buFont typeface="Arial"/>
-        <a:defRPr b="0" i="0" sz="1400" u="none" cap="none" strike="noStrike">
+        <a:defRPr b="0" i="0" spc="0" sz="1400" u="none" cap="none" strike="noStrike">
           <a:solidFill>
             <a:srgbClr val="000000"/>
           </a:solidFill>
@@ -12132,7 +12804,7 @@
           <a:srgbClr val="000000"/>
         </a:buClr>
         <a:buFont typeface="Arial"/>
-        <a:defRPr b="0" i="0" sz="1400" u="none" cap="none" strike="noStrike">
+        <a:defRPr b="0" i="0" spc="0" sz="1400" u="none" cap="none" strike="noStrike">
           <a:solidFill>
             <a:srgbClr val="000000"/>
           </a:solidFill>
@@ -12156,7 +12828,7 @@
           <a:srgbClr val="000000"/>
         </a:buClr>
         <a:buFont typeface="Arial"/>
-        <a:defRPr b="0" i="0" sz="1400" u="none" cap="none" strike="noStrike">
+        <a:defRPr b="0" i="0" spc="0" sz="1400" u="none" cap="none" strike="noStrike">
           <a:solidFill>
             <a:srgbClr val="000000"/>
           </a:solidFill>
@@ -12180,7 +12852,7 @@
           <a:srgbClr val="000000"/>
         </a:buClr>
         <a:buFont typeface="Arial"/>
-        <a:defRPr b="0" i="0" sz="1400" u="none" cap="none" strike="noStrike">
+        <a:defRPr b="0" i="0" spc="0" sz="1400" u="none" cap="none" strike="noStrike">
           <a:solidFill>
             <a:srgbClr val="000000"/>
           </a:solidFill>
@@ -12204,7 +12876,7 @@
           <a:srgbClr val="000000"/>
         </a:buClr>
         <a:buFont typeface="Arial"/>
-        <a:defRPr b="0" i="0" sz="1400" u="none" cap="none" strike="noStrike">
+        <a:defRPr b="0" i="0" spc="0" sz="1400" u="none" cap="none" strike="noStrike">
           <a:solidFill>
             <a:srgbClr val="000000"/>
           </a:solidFill>
@@ -12228,7 +12900,7 @@
           <a:srgbClr val="000000"/>
         </a:buClr>
         <a:buFont typeface="Arial"/>
-        <a:defRPr b="0" i="0" sz="1400" u="none" cap="none" strike="noStrike">
+        <a:defRPr b="0" i="0" spc="0" sz="1400" u="none" cap="none" strike="noStrike">
           <a:solidFill>
             <a:srgbClr val="000000"/>
           </a:solidFill>
@@ -12252,7 +12924,7 @@
           <a:srgbClr val="000000"/>
         </a:buClr>
         <a:buFont typeface="Arial"/>
-        <a:defRPr b="0" i="0" sz="1400" u="none" cap="none" strike="noStrike">
+        <a:defRPr b="0" i="0" spc="0" sz="1400" u="none" cap="none" strike="noStrike">
           <a:solidFill>
             <a:srgbClr val="000000"/>
           </a:solidFill>
@@ -12289,7 +12961,7 @@
           <a:srgbClr val="000000"/>
         </a:buClr>
         <a:buFont typeface="Arial"/>
-        <a:defRPr b="0" i="0" sz="1400" u="none" cap="none" strike="noStrike">
+        <a:defRPr b="0" i="0" spc="0" sz="1400" u="none" cap="none" strike="noStrike">
           <a:solidFill>
             <a:srgbClr val="000000"/>
           </a:solidFill>
@@ -12313,7 +12985,7 @@
           <a:srgbClr val="000000"/>
         </a:buClr>
         <a:buFont typeface="Arial"/>
-        <a:defRPr b="0" i="0" sz="1400" u="none" cap="none" strike="noStrike">
+        <a:defRPr b="0" i="0" spc="0" sz="1400" u="none" cap="none" strike="noStrike">
           <a:solidFill>
             <a:srgbClr val="000000"/>
           </a:solidFill>
@@ -12337,7 +13009,7 @@
           <a:srgbClr val="000000"/>
         </a:buClr>
         <a:buFont typeface="Arial"/>
-        <a:defRPr b="0" i="0" sz="1400" u="none" cap="none" strike="noStrike">
+        <a:defRPr b="0" i="0" spc="0" sz="1400" u="none" cap="none" strike="noStrike">
           <a:solidFill>
             <a:srgbClr val="000000"/>
           </a:solidFill>
@@ -12361,7 +13033,7 @@
           <a:srgbClr val="000000"/>
         </a:buClr>
         <a:buFont typeface="Arial"/>
-        <a:defRPr b="0" i="0" sz="1400" u="none" cap="none" strike="noStrike">
+        <a:defRPr b="0" i="0" spc="0" sz="1400" u="none" cap="none" strike="noStrike">
           <a:solidFill>
             <a:srgbClr val="000000"/>
           </a:solidFill>
@@ -12385,7 +13057,7 @@
           <a:srgbClr val="000000"/>
         </a:buClr>
         <a:buFont typeface="Arial"/>
-        <a:defRPr b="0" i="0" sz="1400" u="none" cap="none" strike="noStrike">
+        <a:defRPr b="0" i="0" spc="0" sz="1400" u="none" cap="none" strike="noStrike">
           <a:solidFill>
             <a:srgbClr val="000000"/>
           </a:solidFill>
@@ -12409,7 +13081,7 @@
           <a:srgbClr val="000000"/>
         </a:buClr>
         <a:buFont typeface="Arial"/>
-        <a:defRPr b="0" i="0" sz="1400" u="none" cap="none" strike="noStrike">
+        <a:defRPr b="0" i="0" spc="0" sz="1400" u="none" cap="none" strike="noStrike">
           <a:solidFill>
             <a:srgbClr val="000000"/>
           </a:solidFill>
@@ -12433,7 +13105,7 @@
           <a:srgbClr val="000000"/>
         </a:buClr>
         <a:buFont typeface="Arial"/>
-        <a:defRPr b="0" i="0" sz="1400" u="none" cap="none" strike="noStrike">
+        <a:defRPr b="0" i="0" spc="0" sz="1400" u="none" cap="none" strike="noStrike">
           <a:solidFill>
             <a:srgbClr val="000000"/>
           </a:solidFill>
@@ -12457,7 +13129,7 @@
           <a:srgbClr val="000000"/>
         </a:buClr>
         <a:buFont typeface="Arial"/>
-        <a:defRPr b="0" i="0" sz="1400" u="none" cap="none" strike="noStrike">
+        <a:defRPr b="0" i="0" spc="0" sz="1400" u="none" cap="none" strike="noStrike">
           <a:solidFill>
             <a:srgbClr val="000000"/>
           </a:solidFill>
@@ -12481,7 +13153,7 @@
           <a:srgbClr val="000000"/>
         </a:buClr>
         <a:buFont typeface="Arial"/>
-        <a:defRPr b="0" i="0" sz="1400" u="none" cap="none" strike="noStrike">
+        <a:defRPr b="0" i="0" spc="0" sz="1400" u="none" cap="none" strike="noStrike">
           <a:solidFill>
             <a:srgbClr val="000000"/>
           </a:solidFill>
@@ -12622,7 +13294,7 @@
   <p:cSld>
     <p:spTree>
       <p:nvGrpSpPr>
-        <p:cNvPr id="147" name="Shape 147"/>
+        <p:cNvPr id="146" name="Shape 146"/>
         <p:cNvGrpSpPr/>
         <p:nvPr/>
       </p:nvGrpSpPr>
@@ -12636,7 +13308,7 @@
       </p:grpSpPr>
       <p:sp>
         <p:nvSpPr>
-          <p:cNvPr id="148" name="Google Shape;148;p25"/>
+          <p:cNvPr id="147" name="Google Shape;147;p23"/>
           <p:cNvSpPr txBox="1"/>
           <p:nvPr>
             <p:ph type="title"/>
@@ -12703,7 +13375,647 @@
       </p:sp>
       <p:sp>
         <p:nvSpPr>
-          <p:cNvPr id="149" name="Google Shape;149;p25"/>
+          <p:cNvPr id="148" name="Google Shape;148;p23"/>
+          <p:cNvSpPr txBox="1"/>
+          <p:nvPr>
+            <p:ph idx="1" type="body"/>
+          </p:nvPr>
+        </p:nvSpPr>
+        <p:spPr>
+          <a:xfrm>
+            <a:off x="729450" y="2078875"/>
+            <a:ext cx="7688700" cy="2887800"/>
+          </a:xfrm>
+          <a:prstGeom prst="rect">
+            <a:avLst/>
+          </a:prstGeom>
+          <a:noFill/>
+          <a:ln>
+            <a:noFill/>
+          </a:ln>
+        </p:spPr>
+        <p:txBody>
+          <a:bodyPr anchorCtr="0" anchor="t" bIns="91425" lIns="91425" spcFirstLastPara="1" rIns="91425" wrap="square" tIns="91425">
+            <a:normAutofit/>
+          </a:bodyPr>
+          <a:lstStyle/>
+          <a:p>
+            <a:pPr indent="0" lvl="0" marL="0" rtl="0" algn="l">
+              <a:lnSpc>
+                <a:spcPct val="115000"/>
+              </a:lnSpc>
+              <a:spcBef>
+                <a:spcPts val="0"/>
+              </a:spcBef>
+              <a:spcAft>
+                <a:spcPts val="0"/>
+              </a:spcAft>
+              <a:buSzPts val="1300"/>
+              <a:buNone/>
+            </a:pPr>
+            <a:r>
+              <a:t/>
+            </a:r>
+            <a:endParaRPr/>
+          </a:p>
+          <a:p>
+            <a:pPr indent="0" lvl="0" marL="0" rtl="0" algn="l">
+              <a:lnSpc>
+                <a:spcPct val="115000"/>
+              </a:lnSpc>
+              <a:spcBef>
+                <a:spcPts val="1200"/>
+              </a:spcBef>
+              <a:spcAft>
+                <a:spcPts val="0"/>
+              </a:spcAft>
+              <a:buSzPts val="1300"/>
+              <a:buNone/>
+            </a:pPr>
+            <a:r>
+              <a:t/>
+            </a:r>
+            <a:endParaRPr/>
+          </a:p>
+          <a:p>
+            <a:pPr indent="0" lvl="0" marL="0" rtl="0" algn="l">
+              <a:lnSpc>
+                <a:spcPct val="115000"/>
+              </a:lnSpc>
+              <a:spcBef>
+                <a:spcPts val="1200"/>
+              </a:spcBef>
+              <a:spcAft>
+                <a:spcPts val="0"/>
+              </a:spcAft>
+              <a:buSzPts val="1300"/>
+              <a:buNone/>
+            </a:pPr>
+            <a:r>
+              <a:t/>
+            </a:r>
+            <a:endParaRPr/>
+          </a:p>
+          <a:p>
+            <a:pPr indent="0" lvl="0" marL="0" rtl="0" algn="l">
+              <a:lnSpc>
+                <a:spcPct val="115000"/>
+              </a:lnSpc>
+              <a:spcBef>
+                <a:spcPts val="1200"/>
+              </a:spcBef>
+              <a:spcAft>
+                <a:spcPts val="0"/>
+              </a:spcAft>
+              <a:buSzPts val="1300"/>
+              <a:buNone/>
+            </a:pPr>
+            <a:r>
+              <a:t/>
+            </a:r>
+            <a:endParaRPr/>
+          </a:p>
+          <a:p>
+            <a:pPr indent="0" lvl="0" marL="0" rtl="0" algn="l">
+              <a:lnSpc>
+                <a:spcPct val="115000"/>
+              </a:lnSpc>
+              <a:spcBef>
+                <a:spcPts val="1200"/>
+              </a:spcBef>
+              <a:spcAft>
+                <a:spcPts val="0"/>
+              </a:spcAft>
+              <a:buSzPts val="1300"/>
+              <a:buNone/>
+            </a:pPr>
+            <a:r>
+              <a:t/>
+            </a:r>
+            <a:endParaRPr/>
+          </a:p>
+          <a:p>
+            <a:pPr indent="0" lvl="0" marL="0" rtl="0" algn="l">
+              <a:lnSpc>
+                <a:spcPct val="115000"/>
+              </a:lnSpc>
+              <a:spcBef>
+                <a:spcPts val="1200"/>
+              </a:spcBef>
+              <a:spcAft>
+                <a:spcPts val="1200"/>
+              </a:spcAft>
+              <a:buSzPts val="1300"/>
+              <a:buNone/>
+            </a:pPr>
+            <a:r>
+              <a:t/>
+            </a:r>
+            <a:endParaRPr/>
+          </a:p>
+        </p:txBody>
+      </p:sp>
+      <p:pic>
+        <p:nvPicPr>
+          <p:cNvPr id="149" name="Google Shape;149;p23"/>
+          <p:cNvPicPr preferRelativeResize="0"/>
+          <p:nvPr/>
+        </p:nvPicPr>
+        <p:blipFill rotWithShape="1">
+          <a:blip r:embed="rId3">
+            <a:alphaModFix/>
+          </a:blip>
+          <a:srcRect b="0" l="0" r="0" t="0"/>
+          <a:stretch/>
+        </p:blipFill>
+        <p:spPr>
+          <a:xfrm>
+            <a:off x="729450" y="1960600"/>
+            <a:ext cx="7688701" cy="845250"/>
+          </a:xfrm>
+          <a:prstGeom prst="rect">
+            <a:avLst/>
+          </a:prstGeom>
+          <a:noFill/>
+          <a:ln>
+            <a:noFill/>
+          </a:ln>
+        </p:spPr>
+      </p:pic>
+      <p:pic>
+        <p:nvPicPr>
+          <p:cNvPr id="150" name="Google Shape;150;p23"/>
+          <p:cNvPicPr preferRelativeResize="0"/>
+          <p:nvPr/>
+        </p:nvPicPr>
+        <p:blipFill rotWithShape="1">
+          <a:blip r:embed="rId4">
+            <a:alphaModFix/>
+          </a:blip>
+          <a:srcRect b="0" l="0" r="0" t="0"/>
+          <a:stretch/>
+        </p:blipFill>
+        <p:spPr>
+          <a:xfrm>
+            <a:off x="729444" y="2912600"/>
+            <a:ext cx="3656256" cy="2054075"/>
+          </a:xfrm>
+          <a:prstGeom prst="rect">
+            <a:avLst/>
+          </a:prstGeom>
+          <a:noFill/>
+          <a:ln>
+            <a:noFill/>
+          </a:ln>
+        </p:spPr>
+      </p:pic>
+      <p:sp>
+        <p:nvSpPr>
+          <p:cNvPr id="151" name="Google Shape;151;p23"/>
+          <p:cNvSpPr txBox="1"/>
+          <p:nvPr/>
+        </p:nvSpPr>
+        <p:spPr>
+          <a:xfrm>
+            <a:off x="4928025" y="3467500"/>
+            <a:ext cx="3888000" cy="615600"/>
+          </a:xfrm>
+          <a:prstGeom prst="rect">
+            <a:avLst/>
+          </a:prstGeom>
+          <a:noFill/>
+          <a:ln>
+            <a:noFill/>
+          </a:ln>
+        </p:spPr>
+        <p:txBody>
+          <a:bodyPr anchorCtr="0" anchor="t" bIns="91425" lIns="91425" spcFirstLastPara="1" rIns="91425" wrap="square" tIns="91425">
+            <a:spAutoFit/>
+          </a:bodyPr>
+          <a:lstStyle/>
+          <a:p>
+            <a:pPr indent="0" lvl="0" marL="0" marR="0" rtl="0" algn="l">
+              <a:lnSpc>
+                <a:spcPct val="100000"/>
+              </a:lnSpc>
+              <a:spcBef>
+                <a:spcPts val="0"/>
+              </a:spcBef>
+              <a:spcAft>
+                <a:spcPts val="0"/>
+              </a:spcAft>
+              <a:buClr>
+                <a:srgbClr val="000000"/>
+              </a:buClr>
+              <a:buSzPts val="1400"/>
+              <a:buFont typeface="Arial"/>
+              <a:buNone/>
+            </a:pPr>
+            <a:r>
+              <a:rPr b="0" i="0" lang="es-419" sz="1400" u="none" cap="none" strike="noStrike">
+                <a:solidFill>
+                  <a:srgbClr val="000000"/>
+                </a:solidFill>
+                <a:latin typeface="Lato"/>
+                <a:ea typeface="Lato"/>
+                <a:cs typeface="Lato"/>
+                <a:sym typeface="Lato"/>
+              </a:rPr>
+              <a:t>sería mejor de forma matricial para no tener que codear por cada feature del modelo, ¿no?</a:t>
+            </a:r>
+            <a:endParaRPr b="0" i="0" sz="1400" u="none" cap="none" strike="noStrike">
+              <a:solidFill>
+                <a:srgbClr val="000000"/>
+              </a:solidFill>
+              <a:latin typeface="Lato"/>
+              <a:ea typeface="Lato"/>
+              <a:cs typeface="Lato"/>
+              <a:sym typeface="Lato"/>
+            </a:endParaRPr>
+          </a:p>
+        </p:txBody>
+      </p:sp>
+    </p:spTree>
+  </p:cSld>
+  <p:clrMapOvr>
+    <a:masterClrMapping/>
+  </p:clrMapOvr>
+</p:sld>
+</file>
+
+<file path=ppt/slides/slide11.xml><?xml version="1.0" encoding="utf-8"?>
+<p:sld xmlns:a="http://schemas.openxmlformats.org/drawingml/2006/main" xmlns:r="http://schemas.openxmlformats.org/officeDocument/2006/relationships" xmlns:mc="http://schemas.openxmlformats.org/markup-compatibility/2006" xmlns:mv="urn:schemas-microsoft-com:mac:vml" xmlns:p="http://schemas.openxmlformats.org/presentationml/2006/main" xmlns:c="http://schemas.openxmlformats.org/drawingml/2006/chart" xmlns:dgm="http://schemas.openxmlformats.org/drawingml/2006/diagram" xmlns:o="urn:schemas-microsoft-com:office:office" xmlns:v="urn:schemas-microsoft-com:vml" xmlns:pvml="urn:schemas-microsoft-com:office:powerpoint" xmlns:com="http://schemas.openxmlformats.org/drawingml/2006/compatibility" xmlns:p14="http://schemas.microsoft.com/office/powerpoint/2010/main" xmlns:p15="http://schemas.microsoft.com/office/powerpoint/2012/main" xmlns:ahyp="http://schemas.microsoft.com/office/drawing/2018/hyperlinkcolor">
+  <p:cSld>
+    <p:spTree>
+      <p:nvGrpSpPr>
+        <p:cNvPr id="155" name="Shape 155"/>
+        <p:cNvGrpSpPr/>
+        <p:nvPr/>
+      </p:nvGrpSpPr>
+      <p:grpSpPr>
+        <a:xfrm>
+          <a:off x="0" y="0"/>
+          <a:ext cx="0" cy="0"/>
+          <a:chOff x="0" y="0"/>
+          <a:chExt cx="0" cy="0"/>
+        </a:xfrm>
+      </p:grpSpPr>
+      <p:sp>
+        <p:nvSpPr>
+          <p:cNvPr id="156" name="Google Shape;156;p24"/>
+          <p:cNvSpPr txBox="1"/>
+          <p:nvPr>
+            <p:ph type="title"/>
+          </p:nvPr>
+        </p:nvSpPr>
+        <p:spPr>
+          <a:xfrm>
+            <a:off x="729450" y="1318650"/>
+            <a:ext cx="7688700" cy="535200"/>
+          </a:xfrm>
+          <a:prstGeom prst="rect">
+            <a:avLst/>
+          </a:prstGeom>
+          <a:noFill/>
+          <a:ln>
+            <a:noFill/>
+          </a:ln>
+        </p:spPr>
+        <p:txBody>
+          <a:bodyPr anchorCtr="0" anchor="t" bIns="91425" lIns="91425" spcFirstLastPara="1" rIns="91425" wrap="square" tIns="91425">
+            <a:normAutofit fontScale="90000"/>
+          </a:bodyPr>
+          <a:lstStyle/>
+          <a:p>
+            <a:pPr indent="0" lvl="0" marL="0" rtl="0" algn="l">
+              <a:lnSpc>
+                <a:spcPct val="100000"/>
+              </a:lnSpc>
+              <a:spcBef>
+                <a:spcPts val="0"/>
+              </a:spcBef>
+              <a:spcAft>
+                <a:spcPts val="0"/>
+              </a:spcAft>
+              <a:buSzPct val="111111"/>
+              <a:buNone/>
+            </a:pPr>
+            <a:r>
+              <a:rPr lang="es-419"/>
+              <a:t>Técnica del gradiente descendiente</a:t>
+            </a:r>
+            <a:endParaRPr/>
+          </a:p>
+          <a:p>
+            <a:pPr indent="0" lvl="0" marL="0" rtl="0" algn="l">
+              <a:lnSpc>
+                <a:spcPct val="100000"/>
+              </a:lnSpc>
+              <a:spcBef>
+                <a:spcPts val="0"/>
+              </a:spcBef>
+              <a:spcAft>
+                <a:spcPts val="0"/>
+              </a:spcAft>
+              <a:buSzPct val="111111"/>
+              <a:buNone/>
+            </a:pPr>
+            <a:r>
+              <a:t/>
+            </a:r>
+            <a:endParaRPr/>
+          </a:p>
+        </p:txBody>
+      </p:sp>
+      <p:sp>
+        <p:nvSpPr>
+          <p:cNvPr id="157" name="Google Shape;157;p24"/>
+          <p:cNvSpPr txBox="1"/>
+          <p:nvPr>
+            <p:ph idx="1" type="body"/>
+          </p:nvPr>
+        </p:nvSpPr>
+        <p:spPr>
+          <a:xfrm>
+            <a:off x="729450" y="2078875"/>
+            <a:ext cx="7688700" cy="2261100"/>
+          </a:xfrm>
+          <a:prstGeom prst="rect">
+            <a:avLst/>
+          </a:prstGeom>
+          <a:noFill/>
+          <a:ln>
+            <a:noFill/>
+          </a:ln>
+        </p:spPr>
+        <p:txBody>
+          <a:bodyPr anchorCtr="0" anchor="t" bIns="91425" lIns="91425" spcFirstLastPara="1" rIns="91425" wrap="square" tIns="91425">
+            <a:normAutofit/>
+          </a:bodyPr>
+          <a:lstStyle/>
+          <a:p>
+            <a:pPr indent="0" lvl="0" marL="0" rtl="0" algn="l">
+              <a:lnSpc>
+                <a:spcPct val="115000"/>
+              </a:lnSpc>
+              <a:spcBef>
+                <a:spcPts val="0"/>
+              </a:spcBef>
+              <a:spcAft>
+                <a:spcPts val="1200"/>
+              </a:spcAft>
+              <a:buSzPts val="1300"/>
+              <a:buNone/>
+            </a:pPr>
+            <a:r>
+              <a:t/>
+            </a:r>
+            <a:endParaRPr/>
+          </a:p>
+        </p:txBody>
+      </p:sp>
+      <p:pic>
+        <p:nvPicPr>
+          <p:cNvPr id="158" name="Google Shape;158;p24"/>
+          <p:cNvPicPr preferRelativeResize="0"/>
+          <p:nvPr/>
+        </p:nvPicPr>
+        <p:blipFill rotWithShape="1">
+          <a:blip r:embed="rId3">
+            <a:alphaModFix/>
+          </a:blip>
+          <a:srcRect b="0" l="0" r="0" t="0"/>
+          <a:stretch/>
+        </p:blipFill>
+        <p:spPr>
+          <a:xfrm>
+            <a:off x="729450" y="2078875"/>
+            <a:ext cx="7688700" cy="2062159"/>
+          </a:xfrm>
+          <a:prstGeom prst="rect">
+            <a:avLst/>
+          </a:prstGeom>
+          <a:noFill/>
+          <a:ln>
+            <a:noFill/>
+          </a:ln>
+        </p:spPr>
+      </p:pic>
+    </p:spTree>
+  </p:cSld>
+  <p:clrMapOvr>
+    <a:masterClrMapping/>
+  </p:clrMapOvr>
+</p:sld>
+</file>
+
+<file path=ppt/slides/slide12.xml><?xml version="1.0" encoding="utf-8"?>
+<p:sld xmlns:a="http://schemas.openxmlformats.org/drawingml/2006/main" xmlns:r="http://schemas.openxmlformats.org/officeDocument/2006/relationships" xmlns:mc="http://schemas.openxmlformats.org/markup-compatibility/2006" xmlns:mv="urn:schemas-microsoft-com:mac:vml" xmlns:p="http://schemas.openxmlformats.org/presentationml/2006/main" xmlns:c="http://schemas.openxmlformats.org/drawingml/2006/chart" xmlns:dgm="http://schemas.openxmlformats.org/drawingml/2006/diagram" xmlns:o="urn:schemas-microsoft-com:office:office" xmlns:v="urn:schemas-microsoft-com:vml" xmlns:pvml="urn:schemas-microsoft-com:office:powerpoint" xmlns:com="http://schemas.openxmlformats.org/drawingml/2006/compatibility" xmlns:p14="http://schemas.microsoft.com/office/powerpoint/2010/main" xmlns:p15="http://schemas.microsoft.com/office/powerpoint/2012/main" xmlns:ahyp="http://schemas.microsoft.com/office/drawing/2018/hyperlinkcolor">
+  <p:cSld>
+    <p:spTree>
+      <p:nvGrpSpPr>
+        <p:cNvPr id="162" name="Shape 162"/>
+        <p:cNvGrpSpPr/>
+        <p:nvPr/>
+      </p:nvGrpSpPr>
+      <p:grpSpPr>
+        <a:xfrm>
+          <a:off x="0" y="0"/>
+          <a:ext cx="0" cy="0"/>
+          <a:chOff x="0" y="0"/>
+          <a:chExt cx="0" cy="0"/>
+        </a:xfrm>
+      </p:grpSpPr>
+      <p:sp>
+        <p:nvSpPr>
+          <p:cNvPr id="163" name="Google Shape;163;g3f4171bfb85_0_0"/>
+          <p:cNvSpPr txBox="1"/>
+          <p:nvPr>
+            <p:ph type="title"/>
+          </p:nvPr>
+        </p:nvSpPr>
+        <p:spPr>
+          <a:xfrm>
+            <a:off x="729450" y="1318650"/>
+            <a:ext cx="7688700" cy="535200"/>
+          </a:xfrm>
+          <a:prstGeom prst="rect">
+            <a:avLst/>
+          </a:prstGeom>
+          <a:noFill/>
+          <a:ln>
+            <a:noFill/>
+          </a:ln>
+        </p:spPr>
+        <p:txBody>
+          <a:bodyPr anchorCtr="0" anchor="t" bIns="91425" lIns="91425" spcFirstLastPara="1" rIns="91425" wrap="square" tIns="91425">
+            <a:normAutofit fontScale="90000"/>
+          </a:bodyPr>
+          <a:lstStyle/>
+          <a:p>
+            <a:pPr indent="0" lvl="0" marL="0" rtl="0" algn="l">
+              <a:lnSpc>
+                <a:spcPct val="100000"/>
+              </a:lnSpc>
+              <a:spcBef>
+                <a:spcPts val="0"/>
+              </a:spcBef>
+              <a:spcAft>
+                <a:spcPts val="0"/>
+              </a:spcAft>
+              <a:buSzPct val="111111"/>
+              <a:buNone/>
+            </a:pPr>
+            <a:r>
+              <a:rPr lang="es-419"/>
+              <a:t>Técnica del gradiente descendiente</a:t>
+            </a:r>
+            <a:endParaRPr/>
+          </a:p>
+          <a:p>
+            <a:pPr indent="0" lvl="0" marL="0" rtl="0" algn="l">
+              <a:lnSpc>
+                <a:spcPct val="100000"/>
+              </a:lnSpc>
+              <a:spcBef>
+                <a:spcPts val="0"/>
+              </a:spcBef>
+              <a:spcAft>
+                <a:spcPts val="0"/>
+              </a:spcAft>
+              <a:buSzPct val="111111"/>
+              <a:buNone/>
+            </a:pPr>
+            <a:r>
+              <a:t/>
+            </a:r>
+            <a:endParaRPr/>
+          </a:p>
+        </p:txBody>
+      </p:sp>
+      <p:pic>
+        <p:nvPicPr>
+          <p:cNvPr id="164" name="Google Shape;164;g3f4171bfb85_0_0"/>
+          <p:cNvPicPr preferRelativeResize="0"/>
+          <p:nvPr/>
+        </p:nvPicPr>
+        <p:blipFill>
+          <a:blip r:embed="rId3">
+            <a:alphaModFix/>
+          </a:blip>
+          <a:stretch>
+            <a:fillRect/>
+          </a:stretch>
+        </p:blipFill>
+        <p:spPr>
+          <a:xfrm>
+            <a:off x="2185338" y="1853850"/>
+            <a:ext cx="4773318" cy="2984850"/>
+          </a:xfrm>
+          <a:prstGeom prst="rect">
+            <a:avLst/>
+          </a:prstGeom>
+          <a:noFill/>
+          <a:ln>
+            <a:noFill/>
+          </a:ln>
+        </p:spPr>
+      </p:pic>
+    </p:spTree>
+  </p:cSld>
+  <p:clrMapOvr>
+    <a:masterClrMapping/>
+  </p:clrMapOvr>
+</p:sld>
+</file>
+
+<file path=ppt/slides/slide13.xml><?xml version="1.0" encoding="utf-8"?>
+<p:sld xmlns:a="http://schemas.openxmlformats.org/drawingml/2006/main" xmlns:r="http://schemas.openxmlformats.org/officeDocument/2006/relationships" xmlns:mc="http://schemas.openxmlformats.org/markup-compatibility/2006" xmlns:mv="urn:schemas-microsoft-com:mac:vml" xmlns:p="http://schemas.openxmlformats.org/presentationml/2006/main" xmlns:c="http://schemas.openxmlformats.org/drawingml/2006/chart" xmlns:dgm="http://schemas.openxmlformats.org/drawingml/2006/diagram" xmlns:o="urn:schemas-microsoft-com:office:office" xmlns:v="urn:schemas-microsoft-com:vml" xmlns:pvml="urn:schemas-microsoft-com:office:powerpoint" xmlns:com="http://schemas.openxmlformats.org/drawingml/2006/compatibility" xmlns:p14="http://schemas.microsoft.com/office/powerpoint/2010/main" xmlns:p15="http://schemas.microsoft.com/office/powerpoint/2012/main" xmlns:ahyp="http://schemas.microsoft.com/office/drawing/2018/hyperlinkcolor">
+  <p:cSld>
+    <p:spTree>
+      <p:nvGrpSpPr>
+        <p:cNvPr id="168" name="Shape 168"/>
+        <p:cNvGrpSpPr/>
+        <p:nvPr/>
+      </p:nvGrpSpPr>
+      <p:grpSpPr>
+        <a:xfrm>
+          <a:off x="0" y="0"/>
+          <a:ext cx="0" cy="0"/>
+          <a:chOff x="0" y="0"/>
+          <a:chExt cx="0" cy="0"/>
+        </a:xfrm>
+      </p:grpSpPr>
+      <p:sp>
+        <p:nvSpPr>
+          <p:cNvPr id="169" name="Google Shape;169;p25"/>
+          <p:cNvSpPr txBox="1"/>
+          <p:nvPr>
+            <p:ph type="title"/>
+          </p:nvPr>
+        </p:nvSpPr>
+        <p:spPr>
+          <a:xfrm>
+            <a:off x="729450" y="1318650"/>
+            <a:ext cx="7688700" cy="535200"/>
+          </a:xfrm>
+          <a:prstGeom prst="rect">
+            <a:avLst/>
+          </a:prstGeom>
+          <a:noFill/>
+          <a:ln>
+            <a:noFill/>
+          </a:ln>
+        </p:spPr>
+        <p:txBody>
+          <a:bodyPr anchorCtr="0" anchor="t" bIns="91425" lIns="91425" spcFirstLastPara="1" rIns="91425" wrap="square" tIns="91425">
+            <a:normAutofit fontScale="90000"/>
+          </a:bodyPr>
+          <a:lstStyle/>
+          <a:p>
+            <a:pPr indent="0" lvl="0" marL="0" rtl="0" algn="l">
+              <a:lnSpc>
+                <a:spcPct val="100000"/>
+              </a:lnSpc>
+              <a:spcBef>
+                <a:spcPts val="0"/>
+              </a:spcBef>
+              <a:spcAft>
+                <a:spcPts val="0"/>
+              </a:spcAft>
+              <a:buSzPct val="111111"/>
+              <a:buNone/>
+            </a:pPr>
+            <a:r>
+              <a:rPr lang="es-419"/>
+              <a:t>Técnica del gradiente descendiente</a:t>
+            </a:r>
+            <a:endParaRPr/>
+          </a:p>
+          <a:p>
+            <a:pPr indent="0" lvl="0" marL="0" rtl="0" algn="l">
+              <a:lnSpc>
+                <a:spcPct val="100000"/>
+              </a:lnSpc>
+              <a:spcBef>
+                <a:spcPts val="0"/>
+              </a:spcBef>
+              <a:spcAft>
+                <a:spcPts val="0"/>
+              </a:spcAft>
+              <a:buSzPct val="111111"/>
+              <a:buNone/>
+            </a:pPr>
+            <a:r>
+              <a:t/>
+            </a:r>
+            <a:endParaRPr/>
+          </a:p>
+        </p:txBody>
+      </p:sp>
+      <p:sp>
+        <p:nvSpPr>
+          <p:cNvPr id="170" name="Google Shape;170;p25"/>
           <p:cNvSpPr txBox="1"/>
           <p:nvPr>
             <p:ph idx="1" type="body"/>
@@ -12868,7 +14180,7 @@
       </p:sp>
       <p:pic>
         <p:nvPicPr>
-          <p:cNvPr id="150" name="Google Shape;150;p25"/>
+          <p:cNvPr id="171" name="Google Shape;171;p25"/>
           <p:cNvPicPr preferRelativeResize="0"/>
           <p:nvPr/>
         </p:nvPicPr>
@@ -12901,12 +14213,12 @@
 </p:sld>
 </file>
 
-<file path=ppt/slides/slide11.xml><?xml version="1.0" encoding="utf-8"?>
+<file path=ppt/slides/slide14.xml><?xml version="1.0" encoding="utf-8"?>
 <p:sld xmlns:a="http://schemas.openxmlformats.org/drawingml/2006/main" xmlns:r="http://schemas.openxmlformats.org/officeDocument/2006/relationships" xmlns:mc="http://schemas.openxmlformats.org/markup-compatibility/2006" xmlns:mv="urn:schemas-microsoft-com:mac:vml" xmlns:p="http://schemas.openxmlformats.org/presentationml/2006/main" xmlns:c="http://schemas.openxmlformats.org/drawingml/2006/chart" xmlns:dgm="http://schemas.openxmlformats.org/drawingml/2006/diagram" xmlns:o="urn:schemas-microsoft-com:office:office" xmlns:v="urn:schemas-microsoft-com:vml" xmlns:pvml="urn:schemas-microsoft-com:office:powerpoint" xmlns:com="http://schemas.openxmlformats.org/drawingml/2006/compatibility" xmlns:p14="http://schemas.microsoft.com/office/powerpoint/2010/main" xmlns:p15="http://schemas.microsoft.com/office/powerpoint/2012/main" xmlns:ahyp="http://schemas.microsoft.com/office/drawing/2018/hyperlinkcolor">
   <p:cSld>
     <p:spTree>
       <p:nvGrpSpPr>
-        <p:cNvPr id="154" name="Shape 154"/>
+        <p:cNvPr id="175" name="Shape 175"/>
         <p:cNvGrpSpPr/>
         <p:nvPr/>
       </p:nvGrpSpPr>
@@ -12920,7 +14232,7 @@
       </p:grpSpPr>
       <p:sp>
         <p:nvSpPr>
-          <p:cNvPr id="155" name="Google Shape;155;p26"/>
+          <p:cNvPr id="176" name="Google Shape;176;g3f8b106cd52_0_36"/>
           <p:cNvSpPr txBox="1"/>
           <p:nvPr>
             <p:ph type="title"/>
@@ -12959,6 +14271,142 @@
               <a:buNone/>
             </a:pPr>
             <a:r>
+              <a:rPr lang="es-419">
+                <a:solidFill>
+                  <a:srgbClr val="1A1A1A"/>
+                </a:solidFill>
+              </a:rPr>
+              <a:t>Una iteración a mano</a:t>
+            </a:r>
+            <a:r>
+              <a:rPr b="0" lang="es-419" sz="1100">
+                <a:solidFill>
+                  <a:srgbClr val="000000"/>
+                </a:solidFill>
+                <a:latin typeface="Arial"/>
+                <a:ea typeface="Arial"/>
+                <a:cs typeface="Arial"/>
+                <a:sym typeface="Arial"/>
+              </a:rPr>
+              <a:t> </a:t>
+            </a:r>
+            <a:endParaRPr/>
+          </a:p>
+          <a:p>
+            <a:pPr indent="0" lvl="0" marL="0" rtl="0" algn="l">
+              <a:lnSpc>
+                <a:spcPct val="100000"/>
+              </a:lnSpc>
+              <a:spcBef>
+                <a:spcPts val="0"/>
+              </a:spcBef>
+              <a:spcAft>
+                <a:spcPts val="0"/>
+              </a:spcAft>
+              <a:buSzPct val="111111"/>
+              <a:buNone/>
+            </a:pPr>
+            <a:r>
+              <a:t/>
+            </a:r>
+            <a:endParaRPr/>
+          </a:p>
+        </p:txBody>
+      </p:sp>
+      <p:pic>
+        <p:nvPicPr>
+          <p:cNvPr id="177" name="Google Shape;177;g3f8b106cd52_0_36"/>
+          <p:cNvPicPr preferRelativeResize="0"/>
+          <p:nvPr/>
+        </p:nvPicPr>
+        <p:blipFill>
+          <a:blip r:embed="rId3">
+            <a:alphaModFix/>
+          </a:blip>
+          <a:stretch>
+            <a:fillRect/>
+          </a:stretch>
+        </p:blipFill>
+        <p:spPr>
+          <a:xfrm>
+            <a:off x="1080525" y="1819100"/>
+            <a:ext cx="6982962" cy="2984850"/>
+          </a:xfrm>
+          <a:prstGeom prst="rect">
+            <a:avLst/>
+          </a:prstGeom>
+          <a:noFill/>
+          <a:ln>
+            <a:noFill/>
+          </a:ln>
+        </p:spPr>
+      </p:pic>
+    </p:spTree>
+  </p:cSld>
+  <p:clrMapOvr>
+    <a:masterClrMapping/>
+  </p:clrMapOvr>
+</p:sld>
+</file>
+
+<file path=ppt/slides/slide15.xml><?xml version="1.0" encoding="utf-8"?>
+<p:sld xmlns:a="http://schemas.openxmlformats.org/drawingml/2006/main" xmlns:r="http://schemas.openxmlformats.org/officeDocument/2006/relationships" xmlns:mc="http://schemas.openxmlformats.org/markup-compatibility/2006" xmlns:mv="urn:schemas-microsoft-com:mac:vml" xmlns:p="http://schemas.openxmlformats.org/presentationml/2006/main" xmlns:c="http://schemas.openxmlformats.org/drawingml/2006/chart" xmlns:dgm="http://schemas.openxmlformats.org/drawingml/2006/diagram" xmlns:o="urn:schemas-microsoft-com:office:office" xmlns:v="urn:schemas-microsoft-com:vml" xmlns:pvml="urn:schemas-microsoft-com:office:powerpoint" xmlns:com="http://schemas.openxmlformats.org/drawingml/2006/compatibility" xmlns:p14="http://schemas.microsoft.com/office/powerpoint/2010/main" xmlns:p15="http://schemas.microsoft.com/office/powerpoint/2012/main" xmlns:ahyp="http://schemas.microsoft.com/office/drawing/2018/hyperlinkcolor">
+  <p:cSld>
+    <p:spTree>
+      <p:nvGrpSpPr>
+        <p:cNvPr id="181" name="Shape 181"/>
+        <p:cNvGrpSpPr/>
+        <p:nvPr/>
+      </p:nvGrpSpPr>
+      <p:grpSpPr>
+        <a:xfrm>
+          <a:off x="0" y="0"/>
+          <a:ext cx="0" cy="0"/>
+          <a:chOff x="0" y="0"/>
+          <a:chExt cx="0" cy="0"/>
+        </a:xfrm>
+      </p:grpSpPr>
+      <p:sp>
+        <p:nvSpPr>
+          <p:cNvPr id="182" name="Google Shape;182;p26"/>
+          <p:cNvSpPr txBox="1"/>
+          <p:nvPr>
+            <p:ph type="title"/>
+          </p:nvPr>
+        </p:nvSpPr>
+        <p:spPr>
+          <a:xfrm>
+            <a:off x="729450" y="1318650"/>
+            <a:ext cx="7688700" cy="535200"/>
+          </a:xfrm>
+          <a:prstGeom prst="rect">
+            <a:avLst/>
+          </a:prstGeom>
+          <a:noFill/>
+          <a:ln>
+            <a:noFill/>
+          </a:ln>
+        </p:spPr>
+        <p:txBody>
+          <a:bodyPr anchorCtr="0" anchor="t" bIns="91425" lIns="91425" spcFirstLastPara="1" rIns="91425" wrap="square" tIns="91425">
+            <a:normAutofit fontScale="90000"/>
+          </a:bodyPr>
+          <a:lstStyle/>
+          <a:p>
+            <a:pPr indent="0" lvl="0" marL="0" rtl="0" algn="l">
+              <a:lnSpc>
+                <a:spcPct val="100000"/>
+              </a:lnSpc>
+              <a:spcBef>
+                <a:spcPts val="0"/>
+              </a:spcBef>
+              <a:spcAft>
+                <a:spcPts val="0"/>
+              </a:spcAft>
+              <a:buSzPct val="111111"/>
+              <a:buNone/>
+            </a:pPr>
+            <a:r>
               <a:rPr lang="es-419"/>
               <a:t>Learning rate (ratio de aprendizaje)</a:t>
             </a:r>
@@ -12987,7 +14435,7 @@
       </p:sp>
       <p:sp>
         <p:nvSpPr>
-          <p:cNvPr id="156" name="Google Shape;156;p26"/>
+          <p:cNvPr id="183" name="Google Shape;183;p26"/>
           <p:cNvSpPr txBox="1"/>
           <p:nvPr>
             <p:ph idx="1" type="body"/>
@@ -13034,7 +14482,7 @@
       </p:sp>
       <p:pic>
         <p:nvPicPr>
-          <p:cNvPr id="157" name="Google Shape;157;p26"/>
+          <p:cNvPr id="184" name="Google Shape;184;p26"/>
           <p:cNvPicPr preferRelativeResize="0"/>
           <p:nvPr/>
         </p:nvPicPr>
@@ -13067,12 +14515,12 @@
 </p:sld>
 </file>
 
-<file path=ppt/slides/slide12.xml><?xml version="1.0" encoding="utf-8"?>
+<file path=ppt/slides/slide16.xml><?xml version="1.0" encoding="utf-8"?>
 <p:sld xmlns:a="http://schemas.openxmlformats.org/drawingml/2006/main" xmlns:r="http://schemas.openxmlformats.org/officeDocument/2006/relationships" xmlns:mc="http://schemas.openxmlformats.org/markup-compatibility/2006" xmlns:mv="urn:schemas-microsoft-com:mac:vml" xmlns:p="http://schemas.openxmlformats.org/presentationml/2006/main" xmlns:c="http://schemas.openxmlformats.org/drawingml/2006/chart" xmlns:dgm="http://schemas.openxmlformats.org/drawingml/2006/diagram" xmlns:o="urn:schemas-microsoft-com:office:office" xmlns:v="urn:schemas-microsoft-com:vml" xmlns:pvml="urn:schemas-microsoft-com:office:powerpoint" xmlns:com="http://schemas.openxmlformats.org/drawingml/2006/compatibility" xmlns:p14="http://schemas.microsoft.com/office/powerpoint/2010/main" xmlns:p15="http://schemas.microsoft.com/office/powerpoint/2012/main" xmlns:ahyp="http://schemas.microsoft.com/office/drawing/2018/hyperlinkcolor">
   <p:cSld>
     <p:spTree>
       <p:nvGrpSpPr>
-        <p:cNvPr id="161" name="Shape 161"/>
+        <p:cNvPr id="188" name="Shape 188"/>
         <p:cNvGrpSpPr/>
         <p:nvPr/>
       </p:nvGrpSpPr>
@@ -13086,7 +14534,7 @@
       </p:grpSpPr>
       <p:sp>
         <p:nvSpPr>
-          <p:cNvPr id="162" name="Google Shape;162;p27"/>
+          <p:cNvPr id="189" name="Google Shape;189;p27"/>
           <p:cNvSpPr txBox="1"/>
           <p:nvPr>
             <p:ph type="ctrTitle"/>
@@ -13134,7 +14582,7 @@
       </p:sp>
       <p:sp>
         <p:nvSpPr>
-          <p:cNvPr id="163" name="Google Shape;163;p27"/>
+          <p:cNvPr id="190" name="Google Shape;190;p27"/>
           <p:cNvSpPr txBox="1"/>
           <p:nvPr>
             <p:ph idx="1" type="subTitle"/>
@@ -13187,12 +14635,12 @@
 </p:sld>
 </file>
 
-<file path=ppt/slides/slide13.xml><?xml version="1.0" encoding="utf-8"?>
+<file path=ppt/slides/slide17.xml><?xml version="1.0" encoding="utf-8"?>
 <p:sld xmlns:a="http://schemas.openxmlformats.org/drawingml/2006/main" xmlns:r="http://schemas.openxmlformats.org/officeDocument/2006/relationships" xmlns:mc="http://schemas.openxmlformats.org/markup-compatibility/2006" xmlns:mv="urn:schemas-microsoft-com:mac:vml" xmlns:p="http://schemas.openxmlformats.org/presentationml/2006/main" xmlns:c="http://schemas.openxmlformats.org/drawingml/2006/chart" xmlns:dgm="http://schemas.openxmlformats.org/drawingml/2006/diagram" xmlns:o="urn:schemas-microsoft-com:office:office" xmlns:v="urn:schemas-microsoft-com:vml" xmlns:pvml="urn:schemas-microsoft-com:office:powerpoint" xmlns:com="http://schemas.openxmlformats.org/drawingml/2006/compatibility" xmlns:p14="http://schemas.microsoft.com/office/powerpoint/2010/main" xmlns:p15="http://schemas.microsoft.com/office/powerpoint/2012/main" xmlns:ahyp="http://schemas.microsoft.com/office/drawing/2018/hyperlinkcolor">
   <p:cSld>
     <p:spTree>
       <p:nvGrpSpPr>
-        <p:cNvPr id="167" name="Shape 167"/>
+        <p:cNvPr id="194" name="Shape 194"/>
         <p:cNvGrpSpPr/>
         <p:nvPr/>
       </p:nvGrpSpPr>
@@ -13206,7 +14654,7 @@
       </p:grpSpPr>
       <p:sp>
         <p:nvSpPr>
-          <p:cNvPr id="168" name="Google Shape;168;p28"/>
+          <p:cNvPr id="195" name="Google Shape;195;p28"/>
           <p:cNvSpPr txBox="1"/>
           <p:nvPr>
             <p:ph type="title"/>
@@ -13254,7 +14702,7 @@
       </p:sp>
       <p:sp>
         <p:nvSpPr>
-          <p:cNvPr id="169" name="Google Shape;169;p28"/>
+          <p:cNvPr id="196" name="Google Shape;196;p28"/>
           <p:cNvSpPr txBox="1"/>
           <p:nvPr>
             <p:ph idx="1" type="body"/>
@@ -13391,12 +14839,12 @@
 </p:sld>
 </file>
 
-<file path=ppt/slides/slide14.xml><?xml version="1.0" encoding="utf-8"?>
+<file path=ppt/slides/slide18.xml><?xml version="1.0" encoding="utf-8"?>
 <p:sld xmlns:a="http://schemas.openxmlformats.org/drawingml/2006/main" xmlns:r="http://schemas.openxmlformats.org/officeDocument/2006/relationships" xmlns:mc="http://schemas.openxmlformats.org/markup-compatibility/2006" xmlns:mv="urn:schemas-microsoft-com:mac:vml" xmlns:p="http://schemas.openxmlformats.org/presentationml/2006/main" xmlns:c="http://schemas.openxmlformats.org/drawingml/2006/chart" xmlns:dgm="http://schemas.openxmlformats.org/drawingml/2006/diagram" xmlns:o="urn:schemas-microsoft-com:office:office" xmlns:v="urn:schemas-microsoft-com:vml" xmlns:pvml="urn:schemas-microsoft-com:office:powerpoint" xmlns:com="http://schemas.openxmlformats.org/drawingml/2006/compatibility" xmlns:p14="http://schemas.microsoft.com/office/powerpoint/2010/main" xmlns:p15="http://schemas.microsoft.com/office/powerpoint/2012/main" xmlns:ahyp="http://schemas.microsoft.com/office/drawing/2018/hyperlinkcolor">
   <p:cSld>
     <p:spTree>
       <p:nvGrpSpPr>
-        <p:cNvPr id="173" name="Shape 173"/>
+        <p:cNvPr id="200" name="Shape 200"/>
         <p:cNvGrpSpPr/>
         <p:nvPr/>
       </p:nvGrpSpPr>
@@ -13410,7 +14858,7 @@
       </p:grpSpPr>
       <p:sp>
         <p:nvSpPr>
-          <p:cNvPr id="174" name="Google Shape;174;p29"/>
+          <p:cNvPr id="201" name="Google Shape;201;p29"/>
           <p:cNvSpPr txBox="1"/>
           <p:nvPr>
             <p:ph type="title"/>
@@ -13449,8 +14897,24 @@
               <a:buNone/>
             </a:pPr>
             <a:r>
-              <a:rPr lang="es-419"/>
-              <a:t>Gradiente descendiente estocástico</a:t>
+              <a:rPr lang="es-419">
+                <a:solidFill>
+                  <a:srgbClr val="1A1A1A"/>
+                </a:solidFill>
+              </a:rPr>
+              <a:t>Qué ganamos y qué perdemos</a:t>
+            </a:r>
+            <a:r>
+              <a:rPr b="0" lang="es-419" sz="1100">
+                <a:solidFill>
+                  <a:srgbClr val="000000"/>
+                </a:solidFill>
+                <a:latin typeface="Arial"/>
+                <a:ea typeface="Arial"/>
+                <a:cs typeface="Arial"/>
+                <a:sym typeface="Arial"/>
+              </a:rPr>
+              <a:t> </a:t>
             </a:r>
             <a:endParaRPr/>
           </a:p>
@@ -13477,7 +14941,7 @@
       </p:sp>
       <p:sp>
         <p:nvSpPr>
-          <p:cNvPr id="175" name="Google Shape;175;p29"/>
+          <p:cNvPr id="202" name="Google Shape;202;p29"/>
           <p:cNvSpPr txBox="1"/>
           <p:nvPr>
             <p:ph idx="1" type="body"/>
@@ -13485,7 +14949,7 @@
         </p:nvSpPr>
         <p:spPr>
           <a:xfrm>
-            <a:off x="729450" y="2078875"/>
+            <a:off x="729449" y="2093903"/>
             <a:ext cx="7688700" cy="2261100"/>
           </a:xfrm>
           <a:prstGeom prst="rect">
@@ -13512,14 +14976,35 @@
               <a:spcAft>
                 <a:spcPts val="0"/>
               </a:spcAft>
-              <a:buSzPts val="1300"/>
               <a:buNone/>
             </a:pPr>
             <a:r>
-              <a:rPr lang="es-419"/>
-              <a:t>Es menos costoso calcular el error y el gradiente por muestra y no por todo el dataset completo.</a:t>
+              <a:rPr b="1" lang="es-419">
+                <a:solidFill>
+                  <a:srgbClr val="1A1A1A"/>
+                </a:solidFill>
+                <a:latin typeface="Arial"/>
+                <a:ea typeface="Arial"/>
+                <a:cs typeface="Arial"/>
+                <a:sym typeface="Arial"/>
+              </a:rPr>
+              <a:t>A favor:</a:t>
             </a:r>
-            <a:endParaRPr/>
+            <a:r>
+              <a:rPr lang="es-419">
+                <a:latin typeface="Arial"/>
+                <a:ea typeface="Arial"/>
+                <a:cs typeface="Arial"/>
+                <a:sym typeface="Arial"/>
+              </a:rPr>
+              <a:t> Calcular el gradiente con un solo dato es muchísimo más barato que hacerlo con el dataset completo.</a:t>
+            </a:r>
+            <a:endParaRPr>
+              <a:latin typeface="Arial"/>
+              <a:ea typeface="Arial"/>
+              <a:cs typeface="Arial"/>
+              <a:sym typeface="Arial"/>
+            </a:endParaRPr>
           </a:p>
           <a:p>
             <a:pPr indent="0" lvl="0" marL="0" rtl="0" algn="l">
@@ -13527,19 +15012,40 @@
                 <a:spcPct val="115000"/>
               </a:lnSpc>
               <a:spcBef>
-                <a:spcPts val="1200"/>
-              </a:spcBef>
-              <a:spcAft>
-                <a:spcPts val="0"/>
-              </a:spcAft>
-              <a:buSzPts val="1300"/>
+                <a:spcPts val="1000"/>
+              </a:spcBef>
+              <a:spcAft>
+                <a:spcPts val="0"/>
+              </a:spcAft>
               <a:buNone/>
             </a:pPr>
             <a:r>
-              <a:rPr lang="es-419"/>
-              <a:t>Optimización de rapidez debido a que se calcula una primer muestra y ya se empieza a hacer la optimización.</a:t>
+              <a:rPr b="1" lang="es-419">
+                <a:solidFill>
+                  <a:srgbClr val="1A1A1A"/>
+                </a:solidFill>
+                <a:latin typeface="Arial"/>
+                <a:ea typeface="Arial"/>
+                <a:cs typeface="Arial"/>
+                <a:sym typeface="Arial"/>
+              </a:rPr>
+              <a:t>A favor:</a:t>
             </a:r>
-            <a:endParaRPr/>
+            <a:r>
+              <a:rPr lang="es-419">
+                <a:latin typeface="Arial"/>
+                <a:ea typeface="Arial"/>
+                <a:cs typeface="Arial"/>
+                <a:sym typeface="Arial"/>
+              </a:rPr>
+              <a:t> Empieza a mejorar desde el primer dato, sin esperar a recorrer todo.</a:t>
+            </a:r>
+            <a:endParaRPr>
+              <a:latin typeface="Arial"/>
+              <a:ea typeface="Arial"/>
+              <a:cs typeface="Arial"/>
+              <a:sym typeface="Arial"/>
+            </a:endParaRPr>
           </a:p>
           <a:p>
             <a:pPr indent="0" lvl="0" marL="0" rtl="0" algn="l">
@@ -13547,17 +15053,74 @@
                 <a:spcPct val="115000"/>
               </a:lnSpc>
               <a:spcBef>
-                <a:spcPts val="1200"/>
-              </a:spcBef>
-              <a:spcAft>
-                <a:spcPts val="1200"/>
-              </a:spcAft>
-              <a:buSzPts val="1300"/>
+                <a:spcPts val="1000"/>
+              </a:spcBef>
+              <a:spcAft>
+                <a:spcPts val="0"/>
+              </a:spcAft>
               <a:buNone/>
             </a:pPr>
             <a:r>
-              <a:rPr lang="es-419"/>
-              <a:t>Sin embargo usar de a un dato puede dar lugar a una exploración más ruidosa del problema. </a:t>
+              <a:rPr b="1" lang="es-419">
+                <a:solidFill>
+                  <a:srgbClr val="1A1A1A"/>
+                </a:solidFill>
+                <a:latin typeface="Arial"/>
+                <a:ea typeface="Arial"/>
+                <a:cs typeface="Arial"/>
+                <a:sym typeface="Arial"/>
+              </a:rPr>
+              <a:t>En contra:</a:t>
+            </a:r>
+            <a:r>
+              <a:rPr lang="es-419">
+                <a:latin typeface="Arial"/>
+                <a:ea typeface="Arial"/>
+                <a:cs typeface="Arial"/>
+                <a:sym typeface="Arial"/>
+              </a:rPr>
+              <a:t> Con un solo dato la dirección es ruidosa. El camino zigzaguea y da vueltas alrededor del mínimo en vez de clavarlo.</a:t>
+            </a:r>
+            <a:endParaRPr>
+              <a:latin typeface="Arial"/>
+              <a:ea typeface="Arial"/>
+              <a:cs typeface="Arial"/>
+              <a:sym typeface="Arial"/>
+            </a:endParaRPr>
+          </a:p>
+          <a:p>
+            <a:pPr indent="0" lvl="0" marL="0" rtl="0" algn="l">
+              <a:lnSpc>
+                <a:spcPct val="115000"/>
+              </a:lnSpc>
+              <a:spcBef>
+                <a:spcPts val="1000"/>
+              </a:spcBef>
+              <a:spcAft>
+                <a:spcPts val="0"/>
+              </a:spcAft>
+              <a:buNone/>
+            </a:pPr>
+            <a:r>
+              <a:rPr b="1" lang="es-419">
+                <a:solidFill>
+                  <a:srgbClr val="1A1A1A"/>
+                </a:solidFill>
+                <a:latin typeface="Arial"/>
+                <a:ea typeface="Arial"/>
+                <a:cs typeface="Arial"/>
+                <a:sym typeface="Arial"/>
+              </a:rPr>
+              <a:t>En contra:</a:t>
+            </a:r>
+            <a:r>
+              <a:rPr lang="es-419">
+                <a:latin typeface="Arial"/>
+                <a:ea typeface="Arial"/>
+                <a:cs typeface="Arial"/>
+                <a:sym typeface="Arial"/>
+              </a:rPr>
+              <a:t> En la práctica termina siendo lento.</a:t>
             </a:r>
             <a:endParaRPr/>
           </a:p>
@@ -13571,12 +15134,12 @@
 </p:sld>
 </file>
 
-<file path=ppt/slides/slide15.xml><?xml version="1.0" encoding="utf-8"?>
+<file path=ppt/slides/slide19.xml><?xml version="1.0" encoding="utf-8"?>
 <p:sld xmlns:a="http://schemas.openxmlformats.org/drawingml/2006/main" xmlns:r="http://schemas.openxmlformats.org/officeDocument/2006/relationships" xmlns:mc="http://schemas.openxmlformats.org/markup-compatibility/2006" xmlns:mv="urn:schemas-microsoft-com:mac:vml" xmlns:p="http://schemas.openxmlformats.org/presentationml/2006/main" xmlns:c="http://schemas.openxmlformats.org/drawingml/2006/chart" xmlns:dgm="http://schemas.openxmlformats.org/drawingml/2006/diagram" xmlns:o="urn:schemas-microsoft-com:office:office" xmlns:v="urn:schemas-microsoft-com:vml" xmlns:pvml="urn:schemas-microsoft-com:office:powerpoint" xmlns:com="http://schemas.openxmlformats.org/drawingml/2006/compatibility" xmlns:p14="http://schemas.microsoft.com/office/powerpoint/2010/main" xmlns:p15="http://schemas.microsoft.com/office/powerpoint/2012/main" xmlns:ahyp="http://schemas.microsoft.com/office/drawing/2018/hyperlinkcolor">
   <p:cSld>
     <p:spTree>
       <p:nvGrpSpPr>
-        <p:cNvPr id="179" name="Shape 179"/>
+        <p:cNvPr id="206" name="Shape 206"/>
         <p:cNvGrpSpPr/>
         <p:nvPr/>
       </p:nvGrpSpPr>
@@ -13590,21 +15153,22 @@
       </p:grpSpPr>
       <p:pic>
         <p:nvPicPr>
-          <p:cNvPr id="180" name="Google Shape;180;p30"/>
+          <p:cNvPr id="207" name="Google Shape;207;p30"/>
           <p:cNvPicPr preferRelativeResize="0"/>
           <p:nvPr/>
         </p:nvPicPr>
-        <p:blipFill rotWithShape="1">
+        <p:blipFill>
           <a:blip r:embed="rId3">
             <a:alphaModFix/>
           </a:blip>
-          <a:srcRect b="0" l="0" r="0" t="0"/>
-          <a:stretch/>
+          <a:stretch>
+            <a:fillRect/>
+          </a:stretch>
         </p:blipFill>
         <p:spPr>
           <a:xfrm>
-            <a:off x="1803713" y="1134671"/>
-            <a:ext cx="5536576" cy="3460375"/>
+            <a:off x="1247001" y="1887025"/>
+            <a:ext cx="6649976" cy="2852500"/>
           </a:xfrm>
           <a:prstGeom prst="rect">
             <a:avLst/>
@@ -13615,34 +15179,9 @@
           </a:ln>
         </p:spPr>
       </p:pic>
-    </p:spTree>
-  </p:cSld>
-  <p:clrMapOvr>
-    <a:masterClrMapping/>
-  </p:clrMapOvr>
-</p:sld>
-</file>
-
-<file path=ppt/slides/slide16.xml><?xml version="1.0" encoding="utf-8"?>
-<p:sld xmlns:a="http://schemas.openxmlformats.org/drawingml/2006/main" xmlns:r="http://schemas.openxmlformats.org/officeDocument/2006/relationships" xmlns:mc="http://schemas.openxmlformats.org/markup-compatibility/2006" xmlns:mv="urn:schemas-microsoft-com:mac:vml" xmlns:p="http://schemas.openxmlformats.org/presentationml/2006/main" xmlns:c="http://schemas.openxmlformats.org/drawingml/2006/chart" xmlns:dgm="http://schemas.openxmlformats.org/drawingml/2006/diagram" xmlns:o="urn:schemas-microsoft-com:office:office" xmlns:v="urn:schemas-microsoft-com:vml" xmlns:pvml="urn:schemas-microsoft-com:office:powerpoint" xmlns:com="http://schemas.openxmlformats.org/drawingml/2006/compatibility" xmlns:p14="http://schemas.microsoft.com/office/powerpoint/2010/main" xmlns:p15="http://schemas.microsoft.com/office/powerpoint/2012/main" xmlns:ahyp="http://schemas.microsoft.com/office/drawing/2018/hyperlinkcolor">
-  <p:cSld>
-    <p:spTree>
-      <p:nvGrpSpPr>
-        <p:cNvPr id="184" name="Shape 184"/>
-        <p:cNvGrpSpPr/>
-        <p:nvPr/>
-      </p:nvGrpSpPr>
-      <p:grpSpPr>
-        <a:xfrm>
-          <a:off x="0" y="0"/>
-          <a:ext cx="0" cy="0"/>
-          <a:chOff x="0" y="0"/>
-          <a:chExt cx="0" cy="0"/>
-        </a:xfrm>
-      </p:grpSpPr>
       <p:sp>
         <p:nvSpPr>
-          <p:cNvPr id="185" name="Google Shape;185;p31"/>
+          <p:cNvPr id="208" name="Google Shape;208;p30"/>
           <p:cNvSpPr txBox="1"/>
           <p:nvPr>
             <p:ph type="title"/>
@@ -13681,267 +15220,28 @@
               <a:buNone/>
             </a:pPr>
             <a:r>
-              <a:rPr lang="es-419"/>
-              <a:t>Gradiente Descendiente mini-batch</a:t>
+              <a:rPr lang="es-419">
+                <a:solidFill>
+                  <a:srgbClr val="1A1A1A"/>
+                </a:solidFill>
+              </a:rPr>
+              <a:t>GD vs SGD: el mismo destino</a:t>
             </a:r>
-            <a:endParaRPr/>
-          </a:p>
-        </p:txBody>
-      </p:sp>
-      <p:sp>
-        <p:nvSpPr>
-          <p:cNvPr id="186" name="Google Shape;186;p31"/>
-          <p:cNvSpPr txBox="1"/>
-          <p:nvPr>
-            <p:ph idx="1" type="body"/>
-          </p:nvPr>
-        </p:nvSpPr>
-        <p:spPr>
-          <a:xfrm>
-            <a:off x="729450" y="2078875"/>
-            <a:ext cx="7688700" cy="2718900"/>
-          </a:xfrm>
-          <a:prstGeom prst="rect">
-            <a:avLst/>
-          </a:prstGeom>
-          <a:noFill/>
-          <a:ln>
-            <a:noFill/>
-          </a:ln>
-        </p:spPr>
-        <p:txBody>
-          <a:bodyPr anchorCtr="0" anchor="t" bIns="91425" lIns="91425" spcFirstLastPara="1" rIns="91425" wrap="square" tIns="91425">
-            <a:normAutofit/>
-          </a:bodyPr>
-          <a:lstStyle/>
-          <a:p>
-            <a:pPr indent="-311150" lvl="0" marL="457200" rtl="0" algn="l">
-              <a:lnSpc>
-                <a:spcPct val="115000"/>
-              </a:lnSpc>
-              <a:spcBef>
-                <a:spcPts val="0"/>
-              </a:spcBef>
-              <a:spcAft>
-                <a:spcPts val="0"/>
-              </a:spcAft>
-              <a:buSzPts val="1300"/>
-              <a:buChar char="●"/>
-            </a:pPr>
             <a:r>
-              <a:rPr lang="es-419"/>
-              <a:t>Ni usamos todo el dataset ni solo una muestra a la vez, sino un batch (lote).</a:t>
+              <a:rPr b="0" lang="es-419" sz="1100">
+                <a:solidFill>
+                  <a:srgbClr val="000000"/>
+                </a:solidFill>
+                <a:latin typeface="Arial"/>
+                <a:ea typeface="Arial"/>
+                <a:cs typeface="Arial"/>
+                <a:sym typeface="Arial"/>
+              </a:rPr>
+              <a:t> </a:t>
             </a:r>
             <a:endParaRPr/>
           </a:p>
           <a:p>
-            <a:pPr indent="-311150" lvl="0" marL="457200" rtl="0" algn="l">
-              <a:lnSpc>
-                <a:spcPct val="115000"/>
-              </a:lnSpc>
-              <a:spcBef>
-                <a:spcPts val="0"/>
-              </a:spcBef>
-              <a:spcAft>
-                <a:spcPts val="0"/>
-              </a:spcAft>
-              <a:buSzPts val="1300"/>
-              <a:buChar char="●"/>
-            </a:pPr>
-            <a:r>
-              <a:rPr lang="es-419"/>
-              <a:t>El dataset se divide en n batches.</a:t>
-            </a:r>
-            <a:endParaRPr/>
-          </a:p>
-          <a:p>
-            <a:pPr indent="-311150" lvl="0" marL="457200" rtl="0" algn="l">
-              <a:lnSpc>
-                <a:spcPct val="115000"/>
-              </a:lnSpc>
-              <a:spcBef>
-                <a:spcPts val="0"/>
-              </a:spcBef>
-              <a:spcAft>
-                <a:spcPts val="0"/>
-              </a:spcAft>
-              <a:buSzPts val="1300"/>
-              <a:buChar char="●"/>
-            </a:pPr>
-            <a:r>
-              <a:rPr lang="es-419"/>
-              <a:t>Se calcula el gradiente para un batch y se ajusta el vector. Luego para el siguiente batch y así sucesivamente.</a:t>
-            </a:r>
-            <a:endParaRPr/>
-          </a:p>
-          <a:p>
-            <a:pPr indent="0" lvl="0" marL="457200" rtl="0" algn="l">
-              <a:lnSpc>
-                <a:spcPct val="115000"/>
-              </a:lnSpc>
-              <a:spcBef>
-                <a:spcPts val="1200"/>
-              </a:spcBef>
-              <a:spcAft>
-                <a:spcPts val="0"/>
-              </a:spcAft>
-              <a:buSzPts val="1300"/>
-              <a:buNone/>
-            </a:pPr>
-            <a:r>
-              <a:t/>
-            </a:r>
-            <a:endParaRPr/>
-          </a:p>
-          <a:p>
-            <a:pPr indent="-311150" lvl="0" marL="457200" rtl="0" algn="l">
-              <a:lnSpc>
-                <a:spcPct val="115000"/>
-              </a:lnSpc>
-              <a:spcBef>
-                <a:spcPts val="1200"/>
-              </a:spcBef>
-              <a:spcAft>
-                <a:spcPts val="0"/>
-              </a:spcAft>
-              <a:buSzPts val="1300"/>
-              <a:buChar char="●"/>
-            </a:pPr>
-            <a:r>
-              <a:rPr lang="es-419"/>
-              <a:t>Luego de una época, se vuelven a obtener los distintos batches (para que tengan datos distintos).</a:t>
-            </a:r>
-            <a:endParaRPr/>
-          </a:p>
-          <a:p>
-            <a:pPr indent="-311150" lvl="0" marL="457200" rtl="0" algn="l">
-              <a:lnSpc>
-                <a:spcPct val="115000"/>
-              </a:lnSpc>
-              <a:spcBef>
-                <a:spcPts val="0"/>
-              </a:spcBef>
-              <a:spcAft>
-                <a:spcPts val="0"/>
-              </a:spcAft>
-              <a:buSzPts val="1300"/>
-              <a:buChar char="●"/>
-            </a:pPr>
-            <a:r>
-              <a:rPr lang="es-419"/>
-              <a:t>Converge más rápido que GD y con menor ruido que SGD.</a:t>
-            </a:r>
-            <a:endParaRPr/>
-          </a:p>
-          <a:p>
-            <a:pPr indent="-311150" lvl="0" marL="457200" rtl="0" algn="l">
-              <a:lnSpc>
-                <a:spcPct val="115000"/>
-              </a:lnSpc>
-              <a:spcBef>
-                <a:spcPts val="0"/>
-              </a:spcBef>
-              <a:spcAft>
-                <a:spcPts val="0"/>
-              </a:spcAft>
-              <a:buSzPts val="1300"/>
-              <a:buChar char="●"/>
-            </a:pPr>
-            <a:r>
-              <a:rPr lang="es-419"/>
-              <a:t>El tamaño del batch es un </a:t>
-            </a:r>
-            <a:r>
-              <a:rPr b="1" lang="es-419"/>
-              <a:t>hiperparámetro</a:t>
-            </a:r>
-            <a:r>
-              <a:rPr lang="es-419"/>
-              <a:t> que debe ajustarse: si es muy grande, es similar a GD, y si es muy chico, es similar a SGD.</a:t>
-            </a:r>
-            <a:endParaRPr/>
-          </a:p>
-        </p:txBody>
-      </p:sp>
-    </p:spTree>
-  </p:cSld>
-  <p:clrMapOvr>
-    <a:masterClrMapping/>
-  </p:clrMapOvr>
-</p:sld>
-</file>
-
-<file path=ppt/slides/slide17.xml><?xml version="1.0" encoding="utf-8"?>
-<p:sld xmlns:a="http://schemas.openxmlformats.org/drawingml/2006/main" xmlns:r="http://schemas.openxmlformats.org/officeDocument/2006/relationships" xmlns:mc="http://schemas.openxmlformats.org/markup-compatibility/2006" xmlns:mv="urn:schemas-microsoft-com:mac:vml" xmlns:p="http://schemas.openxmlformats.org/presentationml/2006/main" xmlns:c="http://schemas.openxmlformats.org/drawingml/2006/chart" xmlns:dgm="http://schemas.openxmlformats.org/drawingml/2006/diagram" xmlns:o="urn:schemas-microsoft-com:office:office" xmlns:v="urn:schemas-microsoft-com:vml" xmlns:pvml="urn:schemas-microsoft-com:office:powerpoint" xmlns:com="http://schemas.openxmlformats.org/drawingml/2006/compatibility" xmlns:p14="http://schemas.microsoft.com/office/powerpoint/2010/main" xmlns:p15="http://schemas.microsoft.com/office/powerpoint/2012/main" xmlns:ahyp="http://schemas.microsoft.com/office/drawing/2018/hyperlinkcolor">
-  <p:cSld>
-    <p:spTree>
-      <p:nvGrpSpPr>
-        <p:cNvPr id="190" name="Shape 190"/>
-        <p:cNvGrpSpPr/>
-        <p:nvPr/>
-      </p:nvGrpSpPr>
-      <p:grpSpPr>
-        <a:xfrm>
-          <a:off x="0" y="0"/>
-          <a:ext cx="0" cy="0"/>
-          <a:chOff x="0" y="0"/>
-          <a:chExt cx="0" cy="0"/>
-        </a:xfrm>
-      </p:grpSpPr>
-      <p:pic>
-        <p:nvPicPr>
-          <p:cNvPr id="191" name="Google Shape;191;p32"/>
-          <p:cNvPicPr preferRelativeResize="0"/>
-          <p:nvPr/>
-        </p:nvPicPr>
-        <p:blipFill rotWithShape="1">
-          <a:blip r:embed="rId3">
-            <a:alphaModFix/>
-          </a:blip>
-          <a:srcRect b="0" l="0" r="0" t="0"/>
-          <a:stretch/>
-        </p:blipFill>
-        <p:spPr>
-          <a:xfrm>
-            <a:off x="1900616" y="1996624"/>
-            <a:ext cx="5346374" cy="2767625"/>
-          </a:xfrm>
-          <a:prstGeom prst="rect">
-            <a:avLst/>
-          </a:prstGeom>
-          <a:noFill/>
-          <a:ln>
-            <a:noFill/>
-          </a:ln>
-        </p:spPr>
-      </p:pic>
-      <p:sp>
-        <p:nvSpPr>
-          <p:cNvPr id="192" name="Google Shape;192;p32"/>
-          <p:cNvSpPr txBox="1"/>
-          <p:nvPr>
-            <p:ph type="title"/>
-          </p:nvPr>
-        </p:nvSpPr>
-        <p:spPr>
-          <a:xfrm>
-            <a:off x="729450" y="1318650"/>
-            <a:ext cx="7688700" cy="535200"/>
-          </a:xfrm>
-          <a:prstGeom prst="rect">
-            <a:avLst/>
-          </a:prstGeom>
-          <a:noFill/>
-          <a:ln>
-            <a:noFill/>
-          </a:ln>
-        </p:spPr>
-        <p:txBody>
-          <a:bodyPr anchorCtr="0" anchor="t" bIns="91425" lIns="91425" spcFirstLastPara="1" rIns="91425" wrap="square" tIns="91425">
-            <a:normAutofit fontScale="90000"/>
-          </a:bodyPr>
-          <a:lstStyle/>
-          <a:p>
             <a:pPr indent="0" lvl="0" marL="0" rtl="0" algn="l">
               <a:lnSpc>
                 <a:spcPct val="100000"/>
@@ -13953,227 +15253,6 @@
                 <a:spcPts val="0"/>
               </a:spcAft>
               <a:buSzPct val="111111"/>
-              <a:buNone/>
-            </a:pPr>
-            <a:r>
-              <a:rPr lang="es-419"/>
-              <a:t>GD vs SGD vs Mini-Batch GD</a:t>
-            </a:r>
-            <a:endParaRPr/>
-          </a:p>
-        </p:txBody>
-      </p:sp>
-    </p:spTree>
-  </p:cSld>
-  <p:clrMapOvr>
-    <a:masterClrMapping/>
-  </p:clrMapOvr>
-</p:sld>
-</file>
-
-<file path=ppt/slides/slide18.xml><?xml version="1.0" encoding="utf-8"?>
-<p:sld xmlns:a="http://schemas.openxmlformats.org/drawingml/2006/main" xmlns:r="http://schemas.openxmlformats.org/officeDocument/2006/relationships" xmlns:mc="http://schemas.openxmlformats.org/markup-compatibility/2006" xmlns:mv="urn:schemas-microsoft-com:mac:vml" xmlns:p="http://schemas.openxmlformats.org/presentationml/2006/main" xmlns:c="http://schemas.openxmlformats.org/drawingml/2006/chart" xmlns:dgm="http://schemas.openxmlformats.org/drawingml/2006/diagram" xmlns:o="urn:schemas-microsoft-com:office:office" xmlns:v="urn:schemas-microsoft-com:vml" xmlns:pvml="urn:schemas-microsoft-com:office:powerpoint" xmlns:com="http://schemas.openxmlformats.org/drawingml/2006/compatibility" xmlns:p14="http://schemas.microsoft.com/office/powerpoint/2010/main" xmlns:p15="http://schemas.microsoft.com/office/powerpoint/2012/main" xmlns:ahyp="http://schemas.microsoft.com/office/drawing/2018/hyperlinkcolor">
-  <p:cSld>
-    <p:spTree>
-      <p:nvGrpSpPr>
-        <p:cNvPr id="196" name="Shape 196"/>
-        <p:cNvGrpSpPr/>
-        <p:nvPr/>
-      </p:nvGrpSpPr>
-      <p:grpSpPr>
-        <a:xfrm>
-          <a:off x="0" y="0"/>
-          <a:ext cx="0" cy="0"/>
-          <a:chOff x="0" y="0"/>
-          <a:chExt cx="0" cy="0"/>
-        </a:xfrm>
-      </p:grpSpPr>
-      <p:pic>
-        <p:nvPicPr>
-          <p:cNvPr id="197" name="Google Shape;197;p33"/>
-          <p:cNvPicPr preferRelativeResize="0"/>
-          <p:nvPr/>
-        </p:nvPicPr>
-        <p:blipFill rotWithShape="1">
-          <a:blip r:embed="rId3">
-            <a:alphaModFix/>
-          </a:blip>
-          <a:srcRect b="0" l="0" r="0" t="0"/>
-          <a:stretch/>
-        </p:blipFill>
-        <p:spPr>
-          <a:xfrm>
-            <a:off x="836813" y="2063650"/>
-            <a:ext cx="7473975" cy="2396975"/>
-          </a:xfrm>
-          <a:prstGeom prst="rect">
-            <a:avLst/>
-          </a:prstGeom>
-          <a:noFill/>
-          <a:ln>
-            <a:noFill/>
-          </a:ln>
-        </p:spPr>
-      </p:pic>
-      <p:sp>
-        <p:nvSpPr>
-          <p:cNvPr id="198" name="Google Shape;198;p33"/>
-          <p:cNvSpPr txBox="1"/>
-          <p:nvPr>
-            <p:ph type="title"/>
-          </p:nvPr>
-        </p:nvSpPr>
-        <p:spPr>
-          <a:xfrm>
-            <a:off x="729450" y="1318650"/>
-            <a:ext cx="7688700" cy="535200"/>
-          </a:xfrm>
-          <a:prstGeom prst="rect">
-            <a:avLst/>
-          </a:prstGeom>
-          <a:noFill/>
-          <a:ln>
-            <a:noFill/>
-          </a:ln>
-        </p:spPr>
-        <p:txBody>
-          <a:bodyPr anchorCtr="0" anchor="t" bIns="91425" lIns="91425" spcFirstLastPara="1" rIns="91425" wrap="square" tIns="91425">
-            <a:normAutofit fontScale="90000"/>
-          </a:bodyPr>
-          <a:lstStyle/>
-          <a:p>
-            <a:pPr indent="0" lvl="0" marL="0" rtl="0" algn="l">
-              <a:lnSpc>
-                <a:spcPct val="100000"/>
-              </a:lnSpc>
-              <a:spcBef>
-                <a:spcPts val="0"/>
-              </a:spcBef>
-              <a:spcAft>
-                <a:spcPts val="0"/>
-              </a:spcAft>
-              <a:buSzPct val="111111"/>
-              <a:buNone/>
-            </a:pPr>
-            <a:r>
-              <a:rPr lang="es-419"/>
-              <a:t>GD vs SGD vs Mini-Batch GD</a:t>
-            </a:r>
-            <a:endParaRPr/>
-          </a:p>
-        </p:txBody>
-      </p:sp>
-    </p:spTree>
-  </p:cSld>
-  <p:clrMapOvr>
-    <a:masterClrMapping/>
-  </p:clrMapOvr>
-</p:sld>
-</file>
-
-<file path=ppt/slides/slide19.xml><?xml version="1.0" encoding="utf-8"?>
-<p:sld xmlns:a="http://schemas.openxmlformats.org/drawingml/2006/main" xmlns:r="http://schemas.openxmlformats.org/officeDocument/2006/relationships" xmlns:mc="http://schemas.openxmlformats.org/markup-compatibility/2006" xmlns:mv="urn:schemas-microsoft-com:mac:vml" xmlns:p="http://schemas.openxmlformats.org/presentationml/2006/main" xmlns:c="http://schemas.openxmlformats.org/drawingml/2006/chart" xmlns:dgm="http://schemas.openxmlformats.org/drawingml/2006/diagram" xmlns:o="urn:schemas-microsoft-com:office:office" xmlns:v="urn:schemas-microsoft-com:vml" xmlns:pvml="urn:schemas-microsoft-com:office:powerpoint" xmlns:com="http://schemas.openxmlformats.org/drawingml/2006/compatibility" xmlns:p14="http://schemas.microsoft.com/office/powerpoint/2010/main" xmlns:p15="http://schemas.microsoft.com/office/powerpoint/2012/main" xmlns:ahyp="http://schemas.microsoft.com/office/drawing/2018/hyperlinkcolor">
-  <p:cSld>
-    <p:spTree>
-      <p:nvGrpSpPr>
-        <p:cNvPr id="202" name="Shape 202"/>
-        <p:cNvGrpSpPr/>
-        <p:nvPr/>
-      </p:nvGrpSpPr>
-      <p:grpSpPr>
-        <a:xfrm>
-          <a:off x="0" y="0"/>
-          <a:ext cx="0" cy="0"/>
-          <a:chOff x="0" y="0"/>
-          <a:chExt cx="0" cy="0"/>
-        </a:xfrm>
-      </p:grpSpPr>
-      <p:sp>
-        <p:nvSpPr>
-          <p:cNvPr id="203" name="Google Shape;203;p34"/>
-          <p:cNvSpPr txBox="1"/>
-          <p:nvPr>
-            <p:ph type="title"/>
-          </p:nvPr>
-        </p:nvSpPr>
-        <p:spPr>
-          <a:xfrm>
-            <a:off x="729450" y="1318650"/>
-            <a:ext cx="7688700" cy="535200"/>
-          </a:xfrm>
-          <a:prstGeom prst="rect">
-            <a:avLst/>
-          </a:prstGeom>
-          <a:noFill/>
-          <a:ln>
-            <a:noFill/>
-          </a:ln>
-        </p:spPr>
-        <p:txBody>
-          <a:bodyPr anchorCtr="0" anchor="t" bIns="91425" lIns="91425" spcFirstLastPara="1" rIns="91425" wrap="square" tIns="91425">
-            <a:normAutofit fontScale="90000"/>
-          </a:bodyPr>
-          <a:lstStyle/>
-          <a:p>
-            <a:pPr indent="0" lvl="0" marL="0" rtl="0" algn="l">
-              <a:lnSpc>
-                <a:spcPct val="100000"/>
-              </a:lnSpc>
-              <a:spcBef>
-                <a:spcPts val="0"/>
-              </a:spcBef>
-              <a:spcAft>
-                <a:spcPts val="0"/>
-              </a:spcAft>
-              <a:buSzPct val="111111"/>
-              <a:buNone/>
-            </a:pPr>
-            <a:r>
-              <a:rPr lang="es-419"/>
-              <a:t>GD vs SGD vs Mini-Batch GD</a:t>
-            </a:r>
-            <a:endParaRPr/>
-          </a:p>
-        </p:txBody>
-      </p:sp>
-      <p:sp>
-        <p:nvSpPr>
-          <p:cNvPr id="204" name="Google Shape;204;p34"/>
-          <p:cNvSpPr txBox="1"/>
-          <p:nvPr>
-            <p:ph idx="1" type="body"/>
-          </p:nvPr>
-        </p:nvSpPr>
-        <p:spPr>
-          <a:xfrm>
-            <a:off x="729450" y="2078875"/>
-            <a:ext cx="7688700" cy="2261100"/>
-          </a:xfrm>
-          <a:prstGeom prst="rect">
-            <a:avLst/>
-          </a:prstGeom>
-          <a:noFill/>
-          <a:ln>
-            <a:noFill/>
-          </a:ln>
-        </p:spPr>
-        <p:txBody>
-          <a:bodyPr anchorCtr="0" anchor="t" bIns="91425" lIns="91425" spcFirstLastPara="1" rIns="91425" wrap="square" tIns="91425">
-            <a:normAutofit/>
-          </a:bodyPr>
-          <a:lstStyle/>
-          <a:p>
-            <a:pPr indent="0" lvl="0" marL="0" rtl="0" algn="l">
-              <a:lnSpc>
-                <a:spcPct val="115000"/>
-              </a:lnSpc>
-              <a:spcBef>
-                <a:spcPts val="0"/>
-              </a:spcBef>
-              <a:spcAft>
-                <a:spcPts val="1200"/>
-              </a:spcAft>
-              <a:buSzPts val="1300"/>
               <a:buNone/>
             </a:pPr>
             <a:r>
@@ -14183,33 +15262,6 @@
           </a:p>
         </p:txBody>
       </p:sp>
-      <p:pic>
-        <p:nvPicPr>
-          <p:cNvPr id="205" name="Google Shape;205;p34"/>
-          <p:cNvPicPr preferRelativeResize="0"/>
-          <p:nvPr/>
-        </p:nvPicPr>
-        <p:blipFill rotWithShape="1">
-          <a:blip r:embed="rId3">
-            <a:alphaModFix/>
-          </a:blip>
-          <a:srcRect b="0" l="0" r="0" t="0"/>
-          <a:stretch/>
-        </p:blipFill>
-        <p:spPr>
-          <a:xfrm>
-            <a:off x="729450" y="1989124"/>
-            <a:ext cx="7993426" cy="2805825"/>
-          </a:xfrm>
-          <a:prstGeom prst="rect">
-            <a:avLst/>
-          </a:prstGeom>
-          <a:noFill/>
-          <a:ln>
-            <a:noFill/>
-          </a:ln>
-        </p:spPr>
-      </p:pic>
     </p:spTree>
   </p:cSld>
   <p:clrMapOvr>
@@ -14349,6 +15401,811 @@
 </p:sld>
 </file>
 
+<file path=ppt/slides/slide20.xml><?xml version="1.0" encoding="utf-8"?>
+<p:sld xmlns:a="http://schemas.openxmlformats.org/drawingml/2006/main" xmlns:r="http://schemas.openxmlformats.org/officeDocument/2006/relationships" xmlns:mc="http://schemas.openxmlformats.org/markup-compatibility/2006" xmlns:mv="urn:schemas-microsoft-com:mac:vml" xmlns:p="http://schemas.openxmlformats.org/presentationml/2006/main" xmlns:c="http://schemas.openxmlformats.org/drawingml/2006/chart" xmlns:dgm="http://schemas.openxmlformats.org/drawingml/2006/diagram" xmlns:o="urn:schemas-microsoft-com:office:office" xmlns:v="urn:schemas-microsoft-com:vml" xmlns:pvml="urn:schemas-microsoft-com:office:powerpoint" xmlns:com="http://schemas.openxmlformats.org/drawingml/2006/compatibility" xmlns:p14="http://schemas.microsoft.com/office/powerpoint/2010/main" xmlns:p15="http://schemas.microsoft.com/office/powerpoint/2012/main" xmlns:ahyp="http://schemas.microsoft.com/office/drawing/2018/hyperlinkcolor">
+  <p:cSld>
+    <p:spTree>
+      <p:nvGrpSpPr>
+        <p:cNvPr id="212" name="Shape 212"/>
+        <p:cNvGrpSpPr/>
+        <p:nvPr/>
+      </p:nvGrpSpPr>
+      <p:grpSpPr>
+        <a:xfrm>
+          <a:off x="0" y="0"/>
+          <a:ext cx="0" cy="0"/>
+          <a:chOff x="0" y="0"/>
+          <a:chExt cx="0" cy="0"/>
+        </a:xfrm>
+      </p:grpSpPr>
+      <p:sp>
+        <p:nvSpPr>
+          <p:cNvPr id="213" name="Google Shape;213;g3f8b106cd52_0_49"/>
+          <p:cNvSpPr txBox="1"/>
+          <p:nvPr>
+            <p:ph type="ctrTitle"/>
+          </p:nvPr>
+        </p:nvSpPr>
+        <p:spPr>
+          <a:xfrm>
+            <a:off x="729450" y="1322450"/>
+            <a:ext cx="7688100" cy="1664700"/>
+          </a:xfrm>
+          <a:prstGeom prst="rect">
+            <a:avLst/>
+          </a:prstGeom>
+          <a:noFill/>
+          <a:ln>
+            <a:noFill/>
+          </a:ln>
+        </p:spPr>
+        <p:txBody>
+          <a:bodyPr anchorCtr="0" anchor="t" bIns="91425" lIns="91425" spcFirstLastPara="1" rIns="91425" wrap="square" tIns="91425">
+            <a:normAutofit/>
+          </a:bodyPr>
+          <a:lstStyle/>
+          <a:p>
+            <a:pPr indent="0" lvl="0" marL="0" rtl="0" algn="l">
+              <a:lnSpc>
+                <a:spcPct val="100000"/>
+              </a:lnSpc>
+              <a:spcBef>
+                <a:spcPts val="0"/>
+              </a:spcBef>
+              <a:spcAft>
+                <a:spcPts val="0"/>
+              </a:spcAft>
+              <a:buSzPts val="4200"/>
+              <a:buNone/>
+            </a:pPr>
+            <a:r>
+              <a:rPr lang="es-419"/>
+              <a:t>Gradiente descendiente </a:t>
+            </a:r>
+            <a:r>
+              <a:rPr lang="es-419"/>
+              <a:t>mini-batch</a:t>
+            </a:r>
+            <a:endParaRPr/>
+          </a:p>
+        </p:txBody>
+      </p:sp>
+      <p:sp>
+        <p:nvSpPr>
+          <p:cNvPr id="214" name="Google Shape;214;g3f8b106cd52_0_49"/>
+          <p:cNvSpPr txBox="1"/>
+          <p:nvPr>
+            <p:ph idx="1" type="subTitle"/>
+          </p:nvPr>
+        </p:nvSpPr>
+        <p:spPr>
+          <a:xfrm>
+            <a:off x="729627" y="3172900"/>
+            <a:ext cx="7688100" cy="541200"/>
+          </a:xfrm>
+          <a:prstGeom prst="rect">
+            <a:avLst/>
+          </a:prstGeom>
+          <a:noFill/>
+          <a:ln>
+            <a:noFill/>
+          </a:ln>
+        </p:spPr>
+        <p:txBody>
+          <a:bodyPr anchorCtr="0" anchor="t" bIns="91425" lIns="91425" spcFirstLastPara="1" rIns="91425" wrap="square" tIns="91425">
+            <a:normAutofit/>
+          </a:bodyPr>
+          <a:lstStyle/>
+          <a:p>
+            <a:pPr indent="0" lvl="0" marL="0" rtl="0" algn="l">
+              <a:lnSpc>
+                <a:spcPct val="100000"/>
+              </a:lnSpc>
+              <a:spcBef>
+                <a:spcPts val="0"/>
+              </a:spcBef>
+              <a:spcAft>
+                <a:spcPts val="0"/>
+              </a:spcAft>
+              <a:buSzPts val="1600"/>
+              <a:buNone/>
+            </a:pPr>
+            <a:r>
+              <a:t/>
+            </a:r>
+            <a:endParaRPr/>
+          </a:p>
+        </p:txBody>
+      </p:sp>
+    </p:spTree>
+  </p:cSld>
+  <p:clrMapOvr>
+    <a:masterClrMapping/>
+  </p:clrMapOvr>
+</p:sld>
+</file>
+
+<file path=ppt/slides/slide21.xml><?xml version="1.0" encoding="utf-8"?>
+<p:sld xmlns:a="http://schemas.openxmlformats.org/drawingml/2006/main" xmlns:r="http://schemas.openxmlformats.org/officeDocument/2006/relationships" xmlns:mc="http://schemas.openxmlformats.org/markup-compatibility/2006" xmlns:mv="urn:schemas-microsoft-com:mac:vml" xmlns:p="http://schemas.openxmlformats.org/presentationml/2006/main" xmlns:c="http://schemas.openxmlformats.org/drawingml/2006/chart" xmlns:dgm="http://schemas.openxmlformats.org/drawingml/2006/diagram" xmlns:o="urn:schemas-microsoft-com:office:office" xmlns:v="urn:schemas-microsoft-com:vml" xmlns:pvml="urn:schemas-microsoft-com:office:powerpoint" xmlns:com="http://schemas.openxmlformats.org/drawingml/2006/compatibility" xmlns:p14="http://schemas.microsoft.com/office/powerpoint/2010/main" xmlns:p15="http://schemas.microsoft.com/office/powerpoint/2012/main" xmlns:ahyp="http://schemas.microsoft.com/office/drawing/2018/hyperlinkcolor">
+  <p:cSld>
+    <p:spTree>
+      <p:nvGrpSpPr>
+        <p:cNvPr id="218" name="Shape 218"/>
+        <p:cNvGrpSpPr/>
+        <p:nvPr/>
+      </p:nvGrpSpPr>
+      <p:grpSpPr>
+        <a:xfrm>
+          <a:off x="0" y="0"/>
+          <a:ext cx="0" cy="0"/>
+          <a:chOff x="0" y="0"/>
+          <a:chExt cx="0" cy="0"/>
+        </a:xfrm>
+      </p:grpSpPr>
+      <p:sp>
+        <p:nvSpPr>
+          <p:cNvPr id="219" name="Google Shape;219;p31"/>
+          <p:cNvSpPr txBox="1"/>
+          <p:nvPr>
+            <p:ph type="title"/>
+          </p:nvPr>
+        </p:nvSpPr>
+        <p:spPr>
+          <a:xfrm>
+            <a:off x="729450" y="1318650"/>
+            <a:ext cx="7688700" cy="535200"/>
+          </a:xfrm>
+          <a:prstGeom prst="rect">
+            <a:avLst/>
+          </a:prstGeom>
+          <a:noFill/>
+          <a:ln>
+            <a:noFill/>
+          </a:ln>
+        </p:spPr>
+        <p:txBody>
+          <a:bodyPr anchorCtr="0" anchor="t" bIns="91425" lIns="91425" spcFirstLastPara="1" rIns="91425" wrap="square" tIns="91425">
+            <a:normAutofit fontScale="90000"/>
+          </a:bodyPr>
+          <a:lstStyle/>
+          <a:p>
+            <a:pPr indent="0" lvl="0" marL="0" rtl="0" algn="l">
+              <a:lnSpc>
+                <a:spcPct val="100000"/>
+              </a:lnSpc>
+              <a:spcBef>
+                <a:spcPts val="0"/>
+              </a:spcBef>
+              <a:spcAft>
+                <a:spcPts val="0"/>
+              </a:spcAft>
+              <a:buSzPct val="111111"/>
+              <a:buNone/>
+            </a:pPr>
+            <a:r>
+              <a:rPr lang="es-419"/>
+              <a:t>Gradiente Descendiente mini-batch</a:t>
+            </a:r>
+            <a:endParaRPr/>
+          </a:p>
+        </p:txBody>
+      </p:sp>
+      <p:sp>
+        <p:nvSpPr>
+          <p:cNvPr id="220" name="Google Shape;220;p31"/>
+          <p:cNvSpPr txBox="1"/>
+          <p:nvPr>
+            <p:ph idx="1" type="body"/>
+          </p:nvPr>
+        </p:nvSpPr>
+        <p:spPr>
+          <a:xfrm>
+            <a:off x="729450" y="2078875"/>
+            <a:ext cx="7688700" cy="2718900"/>
+          </a:xfrm>
+          <a:prstGeom prst="rect">
+            <a:avLst/>
+          </a:prstGeom>
+          <a:noFill/>
+          <a:ln>
+            <a:noFill/>
+          </a:ln>
+        </p:spPr>
+        <p:txBody>
+          <a:bodyPr anchorCtr="0" anchor="t" bIns="91425" lIns="91425" spcFirstLastPara="1" rIns="91425" wrap="square" tIns="91425">
+            <a:normAutofit/>
+          </a:bodyPr>
+          <a:lstStyle/>
+          <a:p>
+            <a:pPr indent="-311150" lvl="0" marL="457200" rtl="0" algn="l">
+              <a:lnSpc>
+                <a:spcPct val="115000"/>
+              </a:lnSpc>
+              <a:spcBef>
+                <a:spcPts val="0"/>
+              </a:spcBef>
+              <a:spcAft>
+                <a:spcPts val="0"/>
+              </a:spcAft>
+              <a:buSzPts val="1300"/>
+              <a:buChar char="●"/>
+            </a:pPr>
+            <a:r>
+              <a:rPr lang="es-419"/>
+              <a:t>Ni usamos todo el dataset ni solo una muestra a la vez, sino un batch (lote).</a:t>
+            </a:r>
+            <a:endParaRPr/>
+          </a:p>
+          <a:p>
+            <a:pPr indent="-311150" lvl="0" marL="457200" rtl="0" algn="l">
+              <a:lnSpc>
+                <a:spcPct val="115000"/>
+              </a:lnSpc>
+              <a:spcBef>
+                <a:spcPts val="0"/>
+              </a:spcBef>
+              <a:spcAft>
+                <a:spcPts val="0"/>
+              </a:spcAft>
+              <a:buSzPts val="1300"/>
+              <a:buChar char="●"/>
+            </a:pPr>
+            <a:r>
+              <a:rPr lang="es-419"/>
+              <a:t>El dataset se divide en n batches.</a:t>
+            </a:r>
+            <a:endParaRPr/>
+          </a:p>
+          <a:p>
+            <a:pPr indent="-311150" lvl="0" marL="457200" rtl="0" algn="l">
+              <a:lnSpc>
+                <a:spcPct val="115000"/>
+              </a:lnSpc>
+              <a:spcBef>
+                <a:spcPts val="0"/>
+              </a:spcBef>
+              <a:spcAft>
+                <a:spcPts val="0"/>
+              </a:spcAft>
+              <a:buSzPts val="1300"/>
+              <a:buChar char="●"/>
+            </a:pPr>
+            <a:r>
+              <a:rPr lang="es-419"/>
+              <a:t>Se calcula el gradiente para un batch y se ajusta el vector. Luego para el siguiente batch y así sucesivamente.</a:t>
+            </a:r>
+            <a:endParaRPr/>
+          </a:p>
+          <a:p>
+            <a:pPr indent="-311150" lvl="0" marL="457200" rtl="0" algn="l">
+              <a:lnSpc>
+                <a:spcPct val="115000"/>
+              </a:lnSpc>
+              <a:spcBef>
+                <a:spcPts val="1200"/>
+              </a:spcBef>
+              <a:spcAft>
+                <a:spcPts val="0"/>
+              </a:spcAft>
+              <a:buSzPts val="1300"/>
+              <a:buChar char="●"/>
+            </a:pPr>
+            <a:r>
+              <a:rPr lang="es-419"/>
+              <a:t>Luego de una época, se vuelven a obtener los distintos batches (para que tengan datos distintos).</a:t>
+            </a:r>
+            <a:endParaRPr/>
+          </a:p>
+          <a:p>
+            <a:pPr indent="-311150" lvl="0" marL="457200" rtl="0" algn="l">
+              <a:lnSpc>
+                <a:spcPct val="115000"/>
+              </a:lnSpc>
+              <a:spcBef>
+                <a:spcPts val="0"/>
+              </a:spcBef>
+              <a:spcAft>
+                <a:spcPts val="0"/>
+              </a:spcAft>
+              <a:buSzPts val="1300"/>
+              <a:buChar char="●"/>
+            </a:pPr>
+            <a:r>
+              <a:rPr lang="es-419"/>
+              <a:t>Converge más rápido que GD y con menor ruido que SGD.</a:t>
+            </a:r>
+            <a:endParaRPr/>
+          </a:p>
+          <a:p>
+            <a:pPr indent="-311150" lvl="0" marL="457200" rtl="0" algn="l">
+              <a:lnSpc>
+                <a:spcPct val="115000"/>
+              </a:lnSpc>
+              <a:spcBef>
+                <a:spcPts val="0"/>
+              </a:spcBef>
+              <a:spcAft>
+                <a:spcPts val="0"/>
+              </a:spcAft>
+              <a:buSzPts val="1300"/>
+              <a:buChar char="●"/>
+            </a:pPr>
+            <a:r>
+              <a:rPr lang="es-419"/>
+              <a:t>El tamaño del batch es un </a:t>
+            </a:r>
+            <a:r>
+              <a:rPr b="1" lang="es-419"/>
+              <a:t>hiperparámetro</a:t>
+            </a:r>
+            <a:r>
+              <a:rPr lang="es-419"/>
+              <a:t> que debe ajustarse: si es muy grande, es similar a GD, y si es muy chico, es similar a SGD.</a:t>
+            </a:r>
+            <a:endParaRPr/>
+          </a:p>
+        </p:txBody>
+      </p:sp>
+    </p:spTree>
+  </p:cSld>
+  <p:clrMapOvr>
+    <a:masterClrMapping/>
+  </p:clrMapOvr>
+</p:sld>
+</file>
+
+<file path=ppt/slides/slide22.xml><?xml version="1.0" encoding="utf-8"?>
+<p:sld xmlns:a="http://schemas.openxmlformats.org/drawingml/2006/main" xmlns:r="http://schemas.openxmlformats.org/officeDocument/2006/relationships" xmlns:mc="http://schemas.openxmlformats.org/markup-compatibility/2006" xmlns:mv="urn:schemas-microsoft-com:mac:vml" xmlns:p="http://schemas.openxmlformats.org/presentationml/2006/main" xmlns:c="http://schemas.openxmlformats.org/drawingml/2006/chart" xmlns:dgm="http://schemas.openxmlformats.org/drawingml/2006/diagram" xmlns:o="urn:schemas-microsoft-com:office:office" xmlns:v="urn:schemas-microsoft-com:vml" xmlns:pvml="urn:schemas-microsoft-com:office:powerpoint" xmlns:com="http://schemas.openxmlformats.org/drawingml/2006/compatibility" xmlns:p14="http://schemas.microsoft.com/office/powerpoint/2010/main" xmlns:p15="http://schemas.microsoft.com/office/powerpoint/2012/main" xmlns:ahyp="http://schemas.microsoft.com/office/drawing/2018/hyperlinkcolor">
+  <p:cSld>
+    <p:spTree>
+      <p:nvGrpSpPr>
+        <p:cNvPr id="224" name="Shape 224"/>
+        <p:cNvGrpSpPr/>
+        <p:nvPr/>
+      </p:nvGrpSpPr>
+      <p:grpSpPr>
+        <a:xfrm>
+          <a:off x="0" y="0"/>
+          <a:ext cx="0" cy="0"/>
+          <a:chOff x="0" y="0"/>
+          <a:chExt cx="0" cy="0"/>
+        </a:xfrm>
+      </p:grpSpPr>
+      <p:pic>
+        <p:nvPicPr>
+          <p:cNvPr id="225" name="Google Shape;225;p32"/>
+          <p:cNvPicPr preferRelativeResize="0"/>
+          <p:nvPr/>
+        </p:nvPicPr>
+        <p:blipFill rotWithShape="1">
+          <a:blip r:embed="rId3">
+            <a:alphaModFix/>
+          </a:blip>
+          <a:srcRect b="0" l="0" r="0" t="0"/>
+          <a:stretch/>
+        </p:blipFill>
+        <p:spPr>
+          <a:xfrm>
+            <a:off x="1900616" y="1996624"/>
+            <a:ext cx="5346374" cy="2767625"/>
+          </a:xfrm>
+          <a:prstGeom prst="rect">
+            <a:avLst/>
+          </a:prstGeom>
+          <a:noFill/>
+          <a:ln>
+            <a:noFill/>
+          </a:ln>
+        </p:spPr>
+      </p:pic>
+      <p:sp>
+        <p:nvSpPr>
+          <p:cNvPr id="226" name="Google Shape;226;p32"/>
+          <p:cNvSpPr txBox="1"/>
+          <p:nvPr>
+            <p:ph type="title"/>
+          </p:nvPr>
+        </p:nvSpPr>
+        <p:spPr>
+          <a:xfrm>
+            <a:off x="729450" y="1318650"/>
+            <a:ext cx="7688700" cy="535200"/>
+          </a:xfrm>
+          <a:prstGeom prst="rect">
+            <a:avLst/>
+          </a:prstGeom>
+          <a:noFill/>
+          <a:ln>
+            <a:noFill/>
+          </a:ln>
+        </p:spPr>
+        <p:txBody>
+          <a:bodyPr anchorCtr="0" anchor="t" bIns="91425" lIns="91425" spcFirstLastPara="1" rIns="91425" wrap="square" tIns="91425">
+            <a:normAutofit fontScale="90000"/>
+          </a:bodyPr>
+          <a:lstStyle/>
+          <a:p>
+            <a:pPr indent="0" lvl="0" marL="0" rtl="0" algn="l">
+              <a:lnSpc>
+                <a:spcPct val="100000"/>
+              </a:lnSpc>
+              <a:spcBef>
+                <a:spcPts val="0"/>
+              </a:spcBef>
+              <a:spcAft>
+                <a:spcPts val="0"/>
+              </a:spcAft>
+              <a:buSzPct val="111111"/>
+              <a:buNone/>
+            </a:pPr>
+            <a:r>
+              <a:rPr lang="es-419"/>
+              <a:t>GD vs SGD vs Mini-Batch GD</a:t>
+            </a:r>
+            <a:endParaRPr/>
+          </a:p>
+        </p:txBody>
+      </p:sp>
+    </p:spTree>
+  </p:cSld>
+  <p:clrMapOvr>
+    <a:masterClrMapping/>
+  </p:clrMapOvr>
+</p:sld>
+</file>
+
+<file path=ppt/slides/slide23.xml><?xml version="1.0" encoding="utf-8"?>
+<p:sld xmlns:a="http://schemas.openxmlformats.org/drawingml/2006/main" xmlns:r="http://schemas.openxmlformats.org/officeDocument/2006/relationships" xmlns:mc="http://schemas.openxmlformats.org/markup-compatibility/2006" xmlns:mv="urn:schemas-microsoft-com:mac:vml" xmlns:p="http://schemas.openxmlformats.org/presentationml/2006/main" xmlns:c="http://schemas.openxmlformats.org/drawingml/2006/chart" xmlns:dgm="http://schemas.openxmlformats.org/drawingml/2006/diagram" xmlns:o="urn:schemas-microsoft-com:office:office" xmlns:v="urn:schemas-microsoft-com:vml" xmlns:pvml="urn:schemas-microsoft-com:office:powerpoint" xmlns:com="http://schemas.openxmlformats.org/drawingml/2006/compatibility" xmlns:p14="http://schemas.microsoft.com/office/powerpoint/2010/main" xmlns:p15="http://schemas.microsoft.com/office/powerpoint/2012/main" xmlns:ahyp="http://schemas.microsoft.com/office/drawing/2018/hyperlinkcolor">
+  <p:cSld>
+    <p:spTree>
+      <p:nvGrpSpPr>
+        <p:cNvPr id="230" name="Shape 230"/>
+        <p:cNvGrpSpPr/>
+        <p:nvPr/>
+      </p:nvGrpSpPr>
+      <p:grpSpPr>
+        <a:xfrm>
+          <a:off x="0" y="0"/>
+          <a:ext cx="0" cy="0"/>
+          <a:chOff x="0" y="0"/>
+          <a:chExt cx="0" cy="0"/>
+        </a:xfrm>
+      </p:grpSpPr>
+      <p:sp>
+        <p:nvSpPr>
+          <p:cNvPr id="231" name="Google Shape;231;g3f4171bfb85_0_12"/>
+          <p:cNvSpPr txBox="1"/>
+          <p:nvPr>
+            <p:ph type="title"/>
+          </p:nvPr>
+        </p:nvSpPr>
+        <p:spPr>
+          <a:xfrm>
+            <a:off x="729450" y="1318650"/>
+            <a:ext cx="7688700" cy="535200"/>
+          </a:xfrm>
+          <a:prstGeom prst="rect">
+            <a:avLst/>
+          </a:prstGeom>
+          <a:noFill/>
+          <a:ln>
+            <a:noFill/>
+          </a:ln>
+        </p:spPr>
+        <p:txBody>
+          <a:bodyPr anchorCtr="0" anchor="t" bIns="91425" lIns="91425" spcFirstLastPara="1" rIns="91425" wrap="square" tIns="91425">
+            <a:normAutofit/>
+          </a:bodyPr>
+          <a:lstStyle/>
+          <a:p>
+            <a:pPr indent="0" lvl="0" marL="0" rtl="0" algn="l">
+              <a:lnSpc>
+                <a:spcPct val="100000"/>
+              </a:lnSpc>
+              <a:spcBef>
+                <a:spcPts val="0"/>
+              </a:spcBef>
+              <a:spcAft>
+                <a:spcPts val="0"/>
+              </a:spcAft>
+              <a:buSzPts val="2889"/>
+              <a:buNone/>
+            </a:pPr>
+            <a:r>
+              <a:rPr lang="es-419" sz="2300">
+                <a:solidFill>
+                  <a:srgbClr val="1A1A1A"/>
+                </a:solidFill>
+              </a:rPr>
+              <a:t>Resumen:</a:t>
+            </a:r>
+            <a:endParaRPr/>
+          </a:p>
+        </p:txBody>
+      </p:sp>
+      <p:pic>
+        <p:nvPicPr>
+          <p:cNvPr id="232" name="Google Shape;232;g3f4171bfb85_0_12"/>
+          <p:cNvPicPr preferRelativeResize="0"/>
+          <p:nvPr/>
+        </p:nvPicPr>
+        <p:blipFill>
+          <a:blip r:embed="rId3">
+            <a:alphaModFix/>
+          </a:blip>
+          <a:stretch>
+            <a:fillRect/>
+          </a:stretch>
+        </p:blipFill>
+        <p:spPr>
+          <a:xfrm>
+            <a:off x="346850" y="1792250"/>
+            <a:ext cx="8453905" cy="2984849"/>
+          </a:xfrm>
+          <a:prstGeom prst="rect">
+            <a:avLst/>
+          </a:prstGeom>
+          <a:noFill/>
+          <a:ln>
+            <a:noFill/>
+          </a:ln>
+        </p:spPr>
+      </p:pic>
+    </p:spTree>
+  </p:cSld>
+  <p:clrMapOvr>
+    <a:masterClrMapping/>
+  </p:clrMapOvr>
+</p:sld>
+</file>
+
+<file path=ppt/slides/slide24.xml><?xml version="1.0" encoding="utf-8"?>
+<p:sld xmlns:a="http://schemas.openxmlformats.org/drawingml/2006/main" xmlns:r="http://schemas.openxmlformats.org/officeDocument/2006/relationships" xmlns:mc="http://schemas.openxmlformats.org/markup-compatibility/2006" xmlns:mv="urn:schemas-microsoft-com:mac:vml" xmlns:p="http://schemas.openxmlformats.org/presentationml/2006/main" xmlns:c="http://schemas.openxmlformats.org/drawingml/2006/chart" xmlns:dgm="http://schemas.openxmlformats.org/drawingml/2006/diagram" xmlns:o="urn:schemas-microsoft-com:office:office" xmlns:v="urn:schemas-microsoft-com:vml" xmlns:pvml="urn:schemas-microsoft-com:office:powerpoint" xmlns:com="http://schemas.openxmlformats.org/drawingml/2006/compatibility" xmlns:p14="http://schemas.microsoft.com/office/powerpoint/2010/main" xmlns:p15="http://schemas.microsoft.com/office/powerpoint/2012/main" xmlns:ahyp="http://schemas.microsoft.com/office/drawing/2018/hyperlinkcolor">
+  <p:cSld>
+    <p:spTree>
+      <p:nvGrpSpPr>
+        <p:cNvPr id="236" name="Shape 236"/>
+        <p:cNvGrpSpPr/>
+        <p:nvPr/>
+      </p:nvGrpSpPr>
+      <p:grpSpPr>
+        <a:xfrm>
+          <a:off x="0" y="0"/>
+          <a:ext cx="0" cy="0"/>
+          <a:chOff x="0" y="0"/>
+          <a:chExt cx="0" cy="0"/>
+        </a:xfrm>
+      </p:grpSpPr>
+      <p:pic>
+        <p:nvPicPr>
+          <p:cNvPr id="237" name="Google Shape;237;p33"/>
+          <p:cNvPicPr preferRelativeResize="0"/>
+          <p:nvPr/>
+        </p:nvPicPr>
+        <p:blipFill rotWithShape="1">
+          <a:blip r:embed="rId3">
+            <a:alphaModFix/>
+          </a:blip>
+          <a:srcRect b="0" l="0" r="0" t="0"/>
+          <a:stretch/>
+        </p:blipFill>
+        <p:spPr>
+          <a:xfrm>
+            <a:off x="836813" y="2063650"/>
+            <a:ext cx="7473975" cy="2396975"/>
+          </a:xfrm>
+          <a:prstGeom prst="rect">
+            <a:avLst/>
+          </a:prstGeom>
+          <a:noFill/>
+          <a:ln>
+            <a:noFill/>
+          </a:ln>
+        </p:spPr>
+      </p:pic>
+      <p:sp>
+        <p:nvSpPr>
+          <p:cNvPr id="238" name="Google Shape;238;p33"/>
+          <p:cNvSpPr txBox="1"/>
+          <p:nvPr>
+            <p:ph type="title"/>
+          </p:nvPr>
+        </p:nvSpPr>
+        <p:spPr>
+          <a:xfrm>
+            <a:off x="729450" y="1318650"/>
+            <a:ext cx="7688700" cy="535200"/>
+          </a:xfrm>
+          <a:prstGeom prst="rect">
+            <a:avLst/>
+          </a:prstGeom>
+          <a:noFill/>
+          <a:ln>
+            <a:noFill/>
+          </a:ln>
+        </p:spPr>
+        <p:txBody>
+          <a:bodyPr anchorCtr="0" anchor="t" bIns="91425" lIns="91425" spcFirstLastPara="1" rIns="91425" wrap="square" tIns="91425">
+            <a:normAutofit fontScale="90000"/>
+          </a:bodyPr>
+          <a:lstStyle/>
+          <a:p>
+            <a:pPr indent="0" lvl="0" marL="0" rtl="0" algn="l">
+              <a:lnSpc>
+                <a:spcPct val="100000"/>
+              </a:lnSpc>
+              <a:spcBef>
+                <a:spcPts val="0"/>
+              </a:spcBef>
+              <a:spcAft>
+                <a:spcPts val="0"/>
+              </a:spcAft>
+              <a:buSzPct val="111111"/>
+              <a:buNone/>
+            </a:pPr>
+            <a:r>
+              <a:rPr lang="es-419"/>
+              <a:t>GD vs SGD vs Mini-Batch GD</a:t>
+            </a:r>
+            <a:endParaRPr/>
+          </a:p>
+        </p:txBody>
+      </p:sp>
+    </p:spTree>
+  </p:cSld>
+  <p:clrMapOvr>
+    <a:masterClrMapping/>
+  </p:clrMapOvr>
+</p:sld>
+</file>
+
+<file path=ppt/slides/slide25.xml><?xml version="1.0" encoding="utf-8"?>
+<p:sld xmlns:a="http://schemas.openxmlformats.org/drawingml/2006/main" xmlns:r="http://schemas.openxmlformats.org/officeDocument/2006/relationships" xmlns:mc="http://schemas.openxmlformats.org/markup-compatibility/2006" xmlns:mv="urn:schemas-microsoft-com:mac:vml" xmlns:p="http://schemas.openxmlformats.org/presentationml/2006/main" xmlns:c="http://schemas.openxmlformats.org/drawingml/2006/chart" xmlns:dgm="http://schemas.openxmlformats.org/drawingml/2006/diagram" xmlns:o="urn:schemas-microsoft-com:office:office" xmlns:v="urn:schemas-microsoft-com:vml" xmlns:pvml="urn:schemas-microsoft-com:office:powerpoint" xmlns:com="http://schemas.openxmlformats.org/drawingml/2006/compatibility" xmlns:p14="http://schemas.microsoft.com/office/powerpoint/2010/main" xmlns:p15="http://schemas.microsoft.com/office/powerpoint/2012/main" xmlns:ahyp="http://schemas.microsoft.com/office/drawing/2018/hyperlinkcolor">
+  <p:cSld>
+    <p:spTree>
+      <p:nvGrpSpPr>
+        <p:cNvPr id="242" name="Shape 242"/>
+        <p:cNvGrpSpPr/>
+        <p:nvPr/>
+      </p:nvGrpSpPr>
+      <p:grpSpPr>
+        <a:xfrm>
+          <a:off x="0" y="0"/>
+          <a:ext cx="0" cy="0"/>
+          <a:chOff x="0" y="0"/>
+          <a:chExt cx="0" cy="0"/>
+        </a:xfrm>
+      </p:grpSpPr>
+      <p:sp>
+        <p:nvSpPr>
+          <p:cNvPr id="243" name="Google Shape;243;p34"/>
+          <p:cNvSpPr txBox="1"/>
+          <p:nvPr>
+            <p:ph type="title"/>
+          </p:nvPr>
+        </p:nvSpPr>
+        <p:spPr>
+          <a:xfrm>
+            <a:off x="729450" y="1318650"/>
+            <a:ext cx="7688700" cy="535200"/>
+          </a:xfrm>
+          <a:prstGeom prst="rect">
+            <a:avLst/>
+          </a:prstGeom>
+          <a:noFill/>
+          <a:ln>
+            <a:noFill/>
+          </a:ln>
+        </p:spPr>
+        <p:txBody>
+          <a:bodyPr anchorCtr="0" anchor="t" bIns="91425" lIns="91425" spcFirstLastPara="1" rIns="91425" wrap="square" tIns="91425">
+            <a:normAutofit fontScale="90000"/>
+          </a:bodyPr>
+          <a:lstStyle/>
+          <a:p>
+            <a:pPr indent="0" lvl="0" marL="0" rtl="0" algn="l">
+              <a:lnSpc>
+                <a:spcPct val="100000"/>
+              </a:lnSpc>
+              <a:spcBef>
+                <a:spcPts val="0"/>
+              </a:spcBef>
+              <a:spcAft>
+                <a:spcPts val="0"/>
+              </a:spcAft>
+              <a:buSzPct val="111111"/>
+              <a:buNone/>
+            </a:pPr>
+            <a:r>
+              <a:rPr lang="es-419"/>
+              <a:t>GD vs SGD vs Mini-Batch GD</a:t>
+            </a:r>
+            <a:endParaRPr/>
+          </a:p>
+        </p:txBody>
+      </p:sp>
+      <p:sp>
+        <p:nvSpPr>
+          <p:cNvPr id="244" name="Google Shape;244;p34"/>
+          <p:cNvSpPr txBox="1"/>
+          <p:nvPr>
+            <p:ph idx="1" type="body"/>
+          </p:nvPr>
+        </p:nvSpPr>
+        <p:spPr>
+          <a:xfrm>
+            <a:off x="729450" y="2078875"/>
+            <a:ext cx="7688700" cy="2261100"/>
+          </a:xfrm>
+          <a:prstGeom prst="rect">
+            <a:avLst/>
+          </a:prstGeom>
+          <a:noFill/>
+          <a:ln>
+            <a:noFill/>
+          </a:ln>
+        </p:spPr>
+        <p:txBody>
+          <a:bodyPr anchorCtr="0" anchor="t" bIns="91425" lIns="91425" spcFirstLastPara="1" rIns="91425" wrap="square" tIns="91425">
+            <a:normAutofit/>
+          </a:bodyPr>
+          <a:lstStyle/>
+          <a:p>
+            <a:pPr indent="0" lvl="0" marL="0" rtl="0" algn="l">
+              <a:lnSpc>
+                <a:spcPct val="115000"/>
+              </a:lnSpc>
+              <a:spcBef>
+                <a:spcPts val="0"/>
+              </a:spcBef>
+              <a:spcAft>
+                <a:spcPts val="1200"/>
+              </a:spcAft>
+              <a:buSzPts val="1300"/>
+              <a:buNone/>
+            </a:pPr>
+            <a:r>
+              <a:t/>
+            </a:r>
+            <a:endParaRPr/>
+          </a:p>
+        </p:txBody>
+      </p:sp>
+      <p:pic>
+        <p:nvPicPr>
+          <p:cNvPr id="245" name="Google Shape;245;p34"/>
+          <p:cNvPicPr preferRelativeResize="0"/>
+          <p:nvPr/>
+        </p:nvPicPr>
+        <p:blipFill rotWithShape="1">
+          <a:blip r:embed="rId3">
+            <a:alphaModFix/>
+          </a:blip>
+          <a:srcRect b="0" l="0" r="0" t="0"/>
+          <a:stretch/>
+        </p:blipFill>
+        <p:spPr>
+          <a:xfrm>
+            <a:off x="729450" y="1989124"/>
+            <a:ext cx="7993426" cy="2805825"/>
+          </a:xfrm>
+          <a:prstGeom prst="rect">
+            <a:avLst/>
+          </a:prstGeom>
+          <a:noFill/>
+          <a:ln>
+            <a:noFill/>
+          </a:ln>
+        </p:spPr>
+      </p:pic>
+    </p:spTree>
+  </p:cSld>
+  <p:clrMapOvr>
+    <a:masterClrMapping/>
+  </p:clrMapOvr>
+</p:sld>
+</file>
+
 <file path=ppt/slides/slide3.xml><?xml version="1.0" encoding="utf-8"?>
 <p:sld xmlns:a="http://schemas.openxmlformats.org/drawingml/2006/main" xmlns:r="http://schemas.openxmlformats.org/officeDocument/2006/relationships" xmlns:mc="http://schemas.openxmlformats.org/markup-compatibility/2006" xmlns:mv="urn:schemas-microsoft-com:mac:vml" xmlns:p="http://schemas.openxmlformats.org/presentationml/2006/main" xmlns:c="http://schemas.openxmlformats.org/drawingml/2006/chart" xmlns:dgm="http://schemas.openxmlformats.org/drawingml/2006/diagram" xmlns:o="urn:schemas-microsoft-com:office:office" xmlns:v="urn:schemas-microsoft-com:vml" xmlns:pvml="urn:schemas-microsoft-com:office:powerpoint" xmlns:com="http://schemas.openxmlformats.org/drawingml/2006/compatibility" xmlns:p14="http://schemas.microsoft.com/office/powerpoint/2010/main" xmlns:p15="http://schemas.microsoft.com/office/powerpoint/2012/main" xmlns:ahyp="http://schemas.microsoft.com/office/drawing/2018/hyperlinkcolor">
   <p:cSld>
@@ -14451,14 +16308,23 @@
               <a:spcAft>
                 <a:spcPts val="0"/>
               </a:spcAft>
-              <a:buSzPts val="1300"/>
               <a:buNone/>
             </a:pPr>
             <a:r>
-              <a:rPr lang="es-419"/>
-              <a:t>Algoritmo de optimización.</a:t>
+              <a:rPr lang="es-419">
+                <a:latin typeface="Arial"/>
+                <a:ea typeface="Arial"/>
+                <a:cs typeface="Arial"/>
+                <a:sym typeface="Arial"/>
+              </a:rPr>
+              <a:t>Es un algoritmo de optimización: busca los valores de los parámetros que hacen más chico el error del modelo.</a:t>
             </a:r>
-            <a:endParaRPr/>
+            <a:endParaRPr>
+              <a:latin typeface="Arial"/>
+              <a:ea typeface="Arial"/>
+              <a:cs typeface="Arial"/>
+              <a:sym typeface="Arial"/>
+            </a:endParaRPr>
           </a:p>
           <a:p>
             <a:pPr indent="0" lvl="0" marL="0" rtl="0" algn="l">
@@ -14466,19 +16332,28 @@
                 <a:spcPct val="115000"/>
               </a:lnSpc>
               <a:spcBef>
-                <a:spcPts val="1200"/>
-              </a:spcBef>
-              <a:spcAft>
-                <a:spcPts val="0"/>
-              </a:spcAft>
-              <a:buSzPts val="1300"/>
+                <a:spcPts val="1000"/>
+              </a:spcBef>
+              <a:spcAft>
+                <a:spcPts val="0"/>
+              </a:spcAft>
               <a:buNone/>
             </a:pPr>
             <a:r>
-              <a:rPr lang="es-419"/>
-              <a:t>Enfoque iterativo.</a:t>
+              <a:rPr lang="es-419">
+                <a:latin typeface="Arial"/>
+                <a:ea typeface="Arial"/>
+                <a:cs typeface="Arial"/>
+                <a:sym typeface="Arial"/>
+              </a:rPr>
+              <a:t>Es iterativo. En vez de resolver una fórmula de una sola vez, se acerca de a pasos.</a:t>
             </a:r>
-            <a:endParaRPr/>
+            <a:endParaRPr>
+              <a:latin typeface="Arial"/>
+              <a:ea typeface="Arial"/>
+              <a:cs typeface="Arial"/>
+              <a:sym typeface="Arial"/>
+            </a:endParaRPr>
           </a:p>
           <a:p>
             <a:pPr indent="0" lvl="0" marL="0" rtl="0" algn="l">
@@ -14486,19 +16361,28 @@
                 <a:spcPct val="115000"/>
               </a:lnSpc>
               <a:spcBef>
-                <a:spcPts val="1200"/>
-              </a:spcBef>
-              <a:spcAft>
-                <a:spcPts val="0"/>
-              </a:spcAft>
-              <a:buSzPts val="1300"/>
+                <a:spcPts val="1000"/>
+              </a:spcBef>
+              <a:spcAft>
+                <a:spcPts val="0"/>
+              </a:spcAft>
               <a:buNone/>
             </a:pPr>
             <a:r>
-              <a:rPr lang="es-419"/>
-              <a:t>Puede ser más conveniente computacionalmente (iteraciones vs cálculos matriciales complejos).</a:t>
+              <a:rPr lang="es-419">
+                <a:latin typeface="Arial"/>
+                <a:ea typeface="Arial"/>
+                <a:cs typeface="Arial"/>
+                <a:sym typeface="Arial"/>
+              </a:rPr>
+              <a:t>Con datasets grandes, iterar suele ser mucho más barato que invertir matrices.</a:t>
             </a:r>
-            <a:endParaRPr/>
+            <a:endParaRPr>
+              <a:latin typeface="Arial"/>
+              <a:ea typeface="Arial"/>
+              <a:cs typeface="Arial"/>
+              <a:sym typeface="Arial"/>
+            </a:endParaRPr>
           </a:p>
           <a:p>
             <a:pPr indent="0" lvl="0" marL="0" rtl="0" algn="l">
@@ -14506,37 +16390,21 @@
                 <a:spcPct val="115000"/>
               </a:lnSpc>
               <a:spcBef>
-                <a:spcPts val="1200"/>
-              </a:spcBef>
-              <a:spcAft>
-                <a:spcPts val="0"/>
-              </a:spcAft>
-              <a:buSzPts val="1300"/>
+                <a:spcPts val="1000"/>
+              </a:spcBef>
+              <a:spcAft>
+                <a:spcPts val="0"/>
+              </a:spcAft>
               <a:buNone/>
             </a:pPr>
             <a:r>
-              <a:rPr lang="es-419"/>
-              <a:t>Gradiente descendiente. Gradiente descendiente estocástico.  Gradiente descendiente mini-batch.</a:t>
-            </a:r>
-            <a:endParaRPr/>
-          </a:p>
-          <a:p>
-            <a:pPr indent="0" lvl="0" marL="0" rtl="0" algn="l">
-              <a:lnSpc>
-                <a:spcPct val="115000"/>
-              </a:lnSpc>
-              <a:spcBef>
-                <a:spcPts val="1200"/>
-              </a:spcBef>
-              <a:spcAft>
-                <a:spcPts val="1200"/>
-              </a:spcAft>
-              <a:buSzPts val="1300"/>
-              <a:buNone/>
-            </a:pPr>
-            <a:r>
-              <a:rPr lang="es-419"/>
-              <a:t>Overfitting.</a:t>
+              <a:rPr lang="es-419">
+                <a:latin typeface="Arial"/>
+                <a:ea typeface="Arial"/>
+                <a:cs typeface="Arial"/>
+                <a:sym typeface="Arial"/>
+              </a:rPr>
+              <a:t>Hoy vemos tres variantes: gradiente descendiente, estocástico y mini-batch.</a:t>
             </a:r>
             <a:endParaRPr/>
           </a:p>
@@ -14569,7 +16437,272 @@
       </p:grpSpPr>
       <p:sp>
         <p:nvSpPr>
-          <p:cNvPr id="103" name="Google Shape;103;p19"/>
+          <p:cNvPr id="103" name="Google Shape;103;g3f8b106cd52_0_2"/>
+          <p:cNvSpPr txBox="1"/>
+          <p:nvPr>
+            <p:ph type="title"/>
+          </p:nvPr>
+        </p:nvSpPr>
+        <p:spPr>
+          <a:xfrm>
+            <a:off x="729450" y="1318650"/>
+            <a:ext cx="7688700" cy="535200"/>
+          </a:xfrm>
+          <a:prstGeom prst="rect">
+            <a:avLst/>
+          </a:prstGeom>
+        </p:spPr>
+        <p:txBody>
+          <a:bodyPr anchorCtr="0" anchor="t" bIns="91425" lIns="91425" spcFirstLastPara="1" rIns="91425" wrap="square" tIns="91425">
+            <a:normAutofit fontScale="90000"/>
+          </a:bodyPr>
+          <a:lstStyle/>
+          <a:p>
+            <a:pPr indent="0" lvl="0" marL="0" rtl="0" algn="l">
+              <a:spcBef>
+                <a:spcPts val="0"/>
+              </a:spcBef>
+              <a:spcAft>
+                <a:spcPts val="0"/>
+              </a:spcAft>
+              <a:buNone/>
+            </a:pPr>
+            <a:r>
+              <a:rPr lang="es-419">
+                <a:solidFill>
+                  <a:srgbClr val="1A1A1A"/>
+                </a:solidFill>
+              </a:rPr>
+              <a:t>Notación: quién es quién</a:t>
+            </a:r>
+            <a:endParaRPr/>
+          </a:p>
+        </p:txBody>
+      </p:sp>
+      <p:grpSp>
+        <p:nvGrpSpPr>
+          <p:cNvPr id="104" name="Google Shape;104;g3f8b106cd52_0_2"/>
+          <p:cNvGrpSpPr/>
+          <p:nvPr/>
+        </p:nvGrpSpPr>
+        <p:grpSpPr>
+          <a:xfrm>
+            <a:off x="1418038" y="1853850"/>
+            <a:ext cx="6311523" cy="2984850"/>
+            <a:chOff x="1418038" y="1853850"/>
+            <a:chExt cx="6311523" cy="2984850"/>
+          </a:xfrm>
+        </p:grpSpPr>
+        <p:pic>
+          <p:nvPicPr>
+            <p:cNvPr id="105" name="Google Shape;105;g3f8b106cd52_0_2"/>
+            <p:cNvPicPr preferRelativeResize="0"/>
+            <p:nvPr/>
+          </p:nvPicPr>
+          <p:blipFill>
+            <a:blip r:embed="rId3">
+              <a:alphaModFix/>
+            </a:blip>
+            <a:stretch>
+              <a:fillRect/>
+            </a:stretch>
+          </p:blipFill>
+          <p:spPr>
+            <a:xfrm>
+              <a:off x="1418038" y="1853850"/>
+              <a:ext cx="6311523" cy="2984850"/>
+            </a:xfrm>
+            <a:prstGeom prst="rect">
+              <a:avLst/>
+            </a:prstGeom>
+            <a:noFill/>
+            <a:ln>
+              <a:noFill/>
+            </a:ln>
+          </p:spPr>
+        </p:pic>
+        <p:pic>
+          <p:nvPicPr>
+            <p:cNvPr id="106" name="Google Shape;106;g3f8b106cd52_0_2"/>
+            <p:cNvPicPr preferRelativeResize="0"/>
+            <p:nvPr/>
+          </p:nvPicPr>
+          <p:blipFill>
+            <a:blip r:embed="rId4">
+              <a:alphaModFix/>
+            </a:blip>
+            <a:stretch>
+              <a:fillRect/>
+            </a:stretch>
+          </p:blipFill>
+          <p:spPr>
+            <a:xfrm>
+              <a:off x="1872825" y="1946500"/>
+              <a:ext cx="5446075" cy="457200"/>
+            </a:xfrm>
+            <a:prstGeom prst="rect">
+              <a:avLst/>
+            </a:prstGeom>
+            <a:noFill/>
+            <a:ln>
+              <a:noFill/>
+            </a:ln>
+          </p:spPr>
+        </p:pic>
+        <p:pic>
+          <p:nvPicPr>
+            <p:cNvPr id="107" name="Google Shape;107;g3f8b106cd52_0_2"/>
+            <p:cNvPicPr preferRelativeResize="0"/>
+            <p:nvPr/>
+          </p:nvPicPr>
+          <p:blipFill>
+            <a:blip r:embed="rId5">
+              <a:alphaModFix/>
+            </a:blip>
+            <a:stretch>
+              <a:fillRect/>
+            </a:stretch>
+          </p:blipFill>
+          <p:spPr>
+            <a:xfrm>
+              <a:off x="2359350" y="2030725"/>
+              <a:ext cx="4428899" cy="225475"/>
+            </a:xfrm>
+            <a:prstGeom prst="rect">
+              <a:avLst/>
+            </a:prstGeom>
+            <a:noFill/>
+            <a:ln>
+              <a:noFill/>
+            </a:ln>
+          </p:spPr>
+        </p:pic>
+      </p:grpSp>
+    </p:spTree>
+  </p:cSld>
+  <p:clrMapOvr>
+    <a:masterClrMapping/>
+  </p:clrMapOvr>
+</p:sld>
+</file>
+
+<file path=ppt/slides/slide5.xml><?xml version="1.0" encoding="utf-8"?>
+<p:sld xmlns:a="http://schemas.openxmlformats.org/drawingml/2006/main" xmlns:r="http://schemas.openxmlformats.org/officeDocument/2006/relationships" xmlns:mc="http://schemas.openxmlformats.org/markup-compatibility/2006" xmlns:mv="urn:schemas-microsoft-com:mac:vml" xmlns:p="http://schemas.openxmlformats.org/presentationml/2006/main" xmlns:c="http://schemas.openxmlformats.org/drawingml/2006/chart" xmlns:dgm="http://schemas.openxmlformats.org/drawingml/2006/diagram" xmlns:o="urn:schemas-microsoft-com:office:office" xmlns:v="urn:schemas-microsoft-com:vml" xmlns:pvml="urn:schemas-microsoft-com:office:powerpoint" xmlns:com="http://schemas.openxmlformats.org/drawingml/2006/compatibility" xmlns:p14="http://schemas.microsoft.com/office/powerpoint/2010/main" xmlns:p15="http://schemas.microsoft.com/office/powerpoint/2012/main" xmlns:ahyp="http://schemas.microsoft.com/office/drawing/2018/hyperlinkcolor">
+  <p:cSld>
+    <p:spTree>
+      <p:nvGrpSpPr>
+        <p:cNvPr id="111" name="Shape 111"/>
+        <p:cNvGrpSpPr/>
+        <p:nvPr/>
+      </p:nvGrpSpPr>
+      <p:grpSpPr>
+        <a:xfrm>
+          <a:off x="0" y="0"/>
+          <a:ext cx="0" cy="0"/>
+          <a:chOff x="0" y="0"/>
+          <a:chExt cx="0" cy="0"/>
+        </a:xfrm>
+      </p:grpSpPr>
+      <p:sp>
+        <p:nvSpPr>
+          <p:cNvPr id="112" name="Google Shape;112;g3f8b106cd52_0_27"/>
+          <p:cNvSpPr txBox="1"/>
+          <p:nvPr>
+            <p:ph type="title"/>
+          </p:nvPr>
+        </p:nvSpPr>
+        <p:spPr>
+          <a:xfrm>
+            <a:off x="729450" y="1318650"/>
+            <a:ext cx="7688700" cy="535200"/>
+          </a:xfrm>
+          <a:prstGeom prst="rect">
+            <a:avLst/>
+          </a:prstGeom>
+        </p:spPr>
+        <p:txBody>
+          <a:bodyPr anchorCtr="0" anchor="t" bIns="91425" lIns="91425" spcFirstLastPara="1" rIns="91425" wrap="square" tIns="91425">
+            <a:normAutofit fontScale="90000"/>
+          </a:bodyPr>
+          <a:lstStyle/>
+          <a:p>
+            <a:pPr indent="0" lvl="0" marL="0" rtl="0" algn="l">
+              <a:spcBef>
+                <a:spcPts val="0"/>
+              </a:spcBef>
+              <a:spcAft>
+                <a:spcPts val="0"/>
+              </a:spcAft>
+              <a:buNone/>
+            </a:pPr>
+            <a:r>
+              <a:rPr lang="es-419">
+                <a:solidFill>
+                  <a:srgbClr val="1A1A1A"/>
+                </a:solidFill>
+              </a:rPr>
+              <a:t>Ejemplo</a:t>
+            </a:r>
+            <a:endParaRPr/>
+          </a:p>
+        </p:txBody>
+      </p:sp>
+      <p:pic>
+        <p:nvPicPr>
+          <p:cNvPr id="113" name="Google Shape;113;g3f8b106cd52_0_27"/>
+          <p:cNvPicPr preferRelativeResize="0"/>
+          <p:nvPr/>
+        </p:nvPicPr>
+        <p:blipFill>
+          <a:blip r:embed="rId3">
+            <a:alphaModFix/>
+          </a:blip>
+          <a:stretch>
+            <a:fillRect/>
+          </a:stretch>
+        </p:blipFill>
+        <p:spPr>
+          <a:xfrm>
+            <a:off x="1550525" y="1892575"/>
+            <a:ext cx="6042948" cy="2984850"/>
+          </a:xfrm>
+          <a:prstGeom prst="rect">
+            <a:avLst/>
+          </a:prstGeom>
+          <a:noFill/>
+          <a:ln>
+            <a:noFill/>
+          </a:ln>
+        </p:spPr>
+      </p:pic>
+    </p:spTree>
+  </p:cSld>
+  <p:clrMapOvr>
+    <a:masterClrMapping/>
+  </p:clrMapOvr>
+</p:sld>
+</file>
+
+<file path=ppt/slides/slide6.xml><?xml version="1.0" encoding="utf-8"?>
+<p:sld xmlns:a="http://schemas.openxmlformats.org/drawingml/2006/main" xmlns:r="http://schemas.openxmlformats.org/officeDocument/2006/relationships" xmlns:mc="http://schemas.openxmlformats.org/markup-compatibility/2006" xmlns:mv="urn:schemas-microsoft-com:mac:vml" xmlns:p="http://schemas.openxmlformats.org/presentationml/2006/main" xmlns:c="http://schemas.openxmlformats.org/drawingml/2006/chart" xmlns:dgm="http://schemas.openxmlformats.org/drawingml/2006/diagram" xmlns:o="urn:schemas-microsoft-com:office:office" xmlns:v="urn:schemas-microsoft-com:vml" xmlns:pvml="urn:schemas-microsoft-com:office:powerpoint" xmlns:com="http://schemas.openxmlformats.org/drawingml/2006/compatibility" xmlns:p14="http://schemas.microsoft.com/office/powerpoint/2010/main" xmlns:p15="http://schemas.microsoft.com/office/powerpoint/2012/main" xmlns:ahyp="http://schemas.microsoft.com/office/drawing/2018/hyperlinkcolor">
+  <p:cSld>
+    <p:spTree>
+      <p:nvGrpSpPr>
+        <p:cNvPr id="117" name="Shape 117"/>
+        <p:cNvGrpSpPr/>
+        <p:nvPr/>
+      </p:nvGrpSpPr>
+      <p:grpSpPr>
+        <a:xfrm>
+          <a:off x="0" y="0"/>
+          <a:ext cx="0" cy="0"/>
+          <a:chOff x="0" y="0"/>
+          <a:chExt cx="0" cy="0"/>
+        </a:xfrm>
+      </p:grpSpPr>
+      <p:sp>
+        <p:nvSpPr>
+          <p:cNvPr id="118" name="Google Shape;118;p19"/>
           <p:cNvSpPr txBox="1"/>
           <p:nvPr>
             <p:ph type="title"/>
@@ -14608,54 +16741,8 @@
               <a:buNone/>
             </a:pPr>
             <a:r>
-              <a:t/>
-            </a:r>
-            <a:endParaRPr/>
-          </a:p>
-        </p:txBody>
-      </p:sp>
-      <p:sp>
-        <p:nvSpPr>
-          <p:cNvPr id="104" name="Google Shape;104;p19"/>
-          <p:cNvSpPr txBox="1"/>
-          <p:nvPr>
-            <p:ph idx="1" type="body"/>
-          </p:nvPr>
-        </p:nvSpPr>
-        <p:spPr>
-          <a:xfrm>
-            <a:off x="729450" y="2078875"/>
-            <a:ext cx="7688700" cy="2261100"/>
-          </a:xfrm>
-          <a:prstGeom prst="rect">
-            <a:avLst/>
-          </a:prstGeom>
-          <a:noFill/>
-          <a:ln>
-            <a:noFill/>
-          </a:ln>
-        </p:spPr>
-        <p:txBody>
-          <a:bodyPr anchorCtr="0" anchor="t" bIns="91425" lIns="91425" spcFirstLastPara="1" rIns="91425" wrap="square" tIns="91425">
-            <a:normAutofit/>
-          </a:bodyPr>
-          <a:lstStyle/>
-          <a:p>
-            <a:pPr indent="0" lvl="0" marL="0" rtl="0" algn="l">
-              <a:lnSpc>
-                <a:spcPct val="115000"/>
-              </a:lnSpc>
-              <a:spcBef>
-                <a:spcPts val="0"/>
-              </a:spcBef>
-              <a:spcAft>
-                <a:spcPts val="1200"/>
-              </a:spcAft>
-              <a:buSzPts val="1300"/>
-              <a:buNone/>
-            </a:pPr>
-            <a:r>
-              <a:t/>
+              <a:rPr lang="es-419"/>
+              <a:t>Generalizado</a:t>
             </a:r>
             <a:endParaRPr/>
           </a:p>
@@ -14663,7 +16750,7 @@
       </p:sp>
       <p:pic>
         <p:nvPicPr>
-          <p:cNvPr id="105" name="Google Shape;105;p19"/>
+          <p:cNvPr id="119" name="Google Shape;119;p19"/>
           <p:cNvPicPr preferRelativeResize="0"/>
           <p:nvPr/>
         </p:nvPicPr>
@@ -14676,416 +16763,8 @@
         </p:blipFill>
         <p:spPr>
           <a:xfrm>
-            <a:off x="525675" y="748913"/>
-            <a:ext cx="8096250" cy="4200525"/>
-          </a:xfrm>
-          <a:prstGeom prst="rect">
-            <a:avLst/>
-          </a:prstGeom>
-          <a:noFill/>
-          <a:ln>
-            <a:noFill/>
-          </a:ln>
-        </p:spPr>
-      </p:pic>
-    </p:spTree>
-  </p:cSld>
-  <p:clrMapOvr>
-    <a:masterClrMapping/>
-  </p:clrMapOvr>
-</p:sld>
-</file>
-
-<file path=ppt/slides/slide5.xml><?xml version="1.0" encoding="utf-8"?>
-<p:sld xmlns:a="http://schemas.openxmlformats.org/drawingml/2006/main" xmlns:r="http://schemas.openxmlformats.org/officeDocument/2006/relationships" xmlns:mc="http://schemas.openxmlformats.org/markup-compatibility/2006" xmlns:mv="urn:schemas-microsoft-com:mac:vml" xmlns:p="http://schemas.openxmlformats.org/presentationml/2006/main" xmlns:c="http://schemas.openxmlformats.org/drawingml/2006/chart" xmlns:dgm="http://schemas.openxmlformats.org/drawingml/2006/diagram" xmlns:o="urn:schemas-microsoft-com:office:office" xmlns:v="urn:schemas-microsoft-com:vml" xmlns:pvml="urn:schemas-microsoft-com:office:powerpoint" xmlns:com="http://schemas.openxmlformats.org/drawingml/2006/compatibility" xmlns:p14="http://schemas.microsoft.com/office/powerpoint/2010/main" xmlns:p15="http://schemas.microsoft.com/office/powerpoint/2012/main" xmlns:ahyp="http://schemas.microsoft.com/office/drawing/2018/hyperlinkcolor">
-  <p:cSld>
-    <p:spTree>
-      <p:nvGrpSpPr>
-        <p:cNvPr id="109" name="Shape 109"/>
-        <p:cNvGrpSpPr/>
-        <p:nvPr/>
-      </p:nvGrpSpPr>
-      <p:grpSpPr>
-        <a:xfrm>
-          <a:off x="0" y="0"/>
-          <a:ext cx="0" cy="0"/>
-          <a:chOff x="0" y="0"/>
-          <a:chExt cx="0" cy="0"/>
-        </a:xfrm>
-      </p:grpSpPr>
-      <p:sp>
-        <p:nvSpPr>
-          <p:cNvPr id="110" name="Google Shape;110;p20"/>
-          <p:cNvSpPr txBox="1"/>
-          <p:nvPr>
-            <p:ph idx="1" type="body"/>
-          </p:nvPr>
-        </p:nvSpPr>
-        <p:spPr>
-          <a:xfrm>
-            <a:off x="4572000" y="1181500"/>
-            <a:ext cx="4295400" cy="3710100"/>
-          </a:xfrm>
-          <a:prstGeom prst="rect">
-            <a:avLst/>
-          </a:prstGeom>
-          <a:noFill/>
-          <a:ln>
-            <a:noFill/>
-          </a:ln>
-        </p:spPr>
-        <p:txBody>
-          <a:bodyPr anchorCtr="0" anchor="t" bIns="91425" lIns="91425" spcFirstLastPara="1" rIns="91425" wrap="square" tIns="91425">
-            <a:normAutofit lnSpcReduction="10000"/>
-          </a:bodyPr>
-          <a:lstStyle/>
-          <a:p>
-            <a:pPr indent="0" lvl="0" marL="0" rtl="0" algn="l">
-              <a:lnSpc>
-                <a:spcPct val="115000"/>
-              </a:lnSpc>
-              <a:spcBef>
-                <a:spcPts val="1500"/>
-              </a:spcBef>
-              <a:spcAft>
-                <a:spcPts val="0"/>
-              </a:spcAft>
-              <a:buSzPts val="1300"/>
-              <a:buNone/>
-            </a:pPr>
-            <a:r>
-              <a:rPr lang="es-419" sz="1400">
-                <a:solidFill>
-                  <a:srgbClr val="212121"/>
-                </a:solidFill>
-                <a:highlight>
-                  <a:schemeClr val="lt1"/>
-                </a:highlight>
-              </a:rPr>
-              <a:t>El gradiente de una función es un vector que apunta en la dirección de la mayor derivada de la función en un punto dado. Establece la dirección en la que la función está aumentando más rápidamente.</a:t>
-            </a:r>
-            <a:endParaRPr sz="1400">
-              <a:solidFill>
-                <a:srgbClr val="212121"/>
-              </a:solidFill>
-              <a:highlight>
-                <a:schemeClr val="lt1"/>
-              </a:highlight>
-            </a:endParaRPr>
-          </a:p>
-          <a:p>
-            <a:pPr indent="0" lvl="0" marL="0" rtl="0" algn="l">
-              <a:lnSpc>
-                <a:spcPct val="115000"/>
-              </a:lnSpc>
-              <a:spcBef>
-                <a:spcPts val="1500"/>
-              </a:spcBef>
-              <a:spcAft>
-                <a:spcPts val="0"/>
-              </a:spcAft>
-              <a:buSzPts val="1300"/>
-              <a:buNone/>
-            </a:pPr>
-            <a:r>
-              <a:rPr lang="es-419" sz="1400">
-                <a:solidFill>
-                  <a:srgbClr val="212121"/>
-                </a:solidFill>
-                <a:highlight>
-                  <a:schemeClr val="lt1"/>
-                </a:highlight>
-              </a:rPr>
-              <a:t>Cuando estamos tratando de minimizar una función, se busca encontrar el punto donde la función alcanza su valor mínimo. En el mínimo de la función, el gradiente es igual a cero. </a:t>
-            </a:r>
-            <a:endParaRPr sz="1400">
-              <a:solidFill>
-                <a:srgbClr val="212121"/>
-              </a:solidFill>
-              <a:highlight>
-                <a:schemeClr val="lt1"/>
-              </a:highlight>
-            </a:endParaRPr>
-          </a:p>
-          <a:p>
-            <a:pPr indent="0" lvl="0" marL="0" rtl="0" algn="l">
-              <a:lnSpc>
-                <a:spcPct val="115000"/>
-              </a:lnSpc>
-              <a:spcBef>
-                <a:spcPts val="1500"/>
-              </a:spcBef>
-              <a:spcAft>
-                <a:spcPts val="0"/>
-              </a:spcAft>
-              <a:buSzPts val="1300"/>
-              <a:buNone/>
-            </a:pPr>
-            <a:r>
-              <a:rPr lang="es-419" sz="1400">
-                <a:solidFill>
-                  <a:srgbClr val="212121"/>
-                </a:solidFill>
-                <a:highlight>
-                  <a:schemeClr val="lt1"/>
-                </a:highlight>
-              </a:rPr>
-              <a:t>Si se mueve en la dirección opuesta al gradiente, nos acercamos al mínimo.</a:t>
-            </a:r>
-            <a:endParaRPr sz="1400">
-              <a:solidFill>
-                <a:srgbClr val="212121"/>
-              </a:solidFill>
-              <a:highlight>
-                <a:schemeClr val="lt1"/>
-              </a:highlight>
-            </a:endParaRPr>
-          </a:p>
-          <a:p>
-            <a:pPr indent="0" lvl="0" marL="0" rtl="0" algn="l">
-              <a:lnSpc>
-                <a:spcPct val="115000"/>
-              </a:lnSpc>
-              <a:spcBef>
-                <a:spcPts val="1500"/>
-              </a:spcBef>
-              <a:spcAft>
-                <a:spcPts val="0"/>
-              </a:spcAft>
-              <a:buSzPts val="1300"/>
-              <a:buNone/>
-            </a:pPr>
-            <a:r>
-              <a:rPr lang="es-419" sz="1400">
-                <a:solidFill>
-                  <a:srgbClr val="212121"/>
-                </a:solidFill>
-                <a:highlight>
-                  <a:schemeClr val="lt1"/>
-                </a:highlight>
-              </a:rPr>
-              <a:t>Pero puede ser un mínimo global, o local.</a:t>
-            </a:r>
-            <a:endParaRPr sz="1400">
-              <a:solidFill>
-                <a:srgbClr val="212121"/>
-              </a:solidFill>
-              <a:highlight>
-                <a:schemeClr val="lt1"/>
-              </a:highlight>
-            </a:endParaRPr>
-          </a:p>
-          <a:p>
-            <a:pPr indent="0" lvl="0" marL="0" rtl="0" algn="l">
-              <a:lnSpc>
-                <a:spcPct val="115000"/>
-              </a:lnSpc>
-              <a:spcBef>
-                <a:spcPts val="1500"/>
-              </a:spcBef>
-              <a:spcAft>
-                <a:spcPts val="1200"/>
-              </a:spcAft>
-              <a:buSzPts val="1300"/>
-              <a:buNone/>
-            </a:pPr>
-            <a:r>
-              <a:t/>
-            </a:r>
-            <a:endParaRPr/>
-          </a:p>
-        </p:txBody>
-      </p:sp>
-      <p:pic>
-        <p:nvPicPr>
-          <p:cNvPr id="111" name="Google Shape;111;p20"/>
-          <p:cNvPicPr preferRelativeResize="0"/>
-          <p:nvPr/>
-        </p:nvPicPr>
-        <p:blipFill rotWithShape="1">
-          <a:blip r:embed="rId3">
-            <a:alphaModFix/>
-          </a:blip>
-          <a:srcRect b="0" l="0" r="0" t="0"/>
-          <a:stretch/>
-        </p:blipFill>
-        <p:spPr>
-          <a:xfrm>
-            <a:off x="997275" y="871300"/>
-            <a:ext cx="3504675" cy="3757950"/>
-          </a:xfrm>
-          <a:prstGeom prst="rect">
-            <a:avLst/>
-          </a:prstGeom>
-          <a:noFill/>
-          <a:ln>
-            <a:noFill/>
-          </a:ln>
-        </p:spPr>
-      </p:pic>
-      <p:pic>
-        <p:nvPicPr>
-          <p:cNvPr id="112" name="Google Shape;112;p20"/>
-          <p:cNvPicPr preferRelativeResize="0"/>
-          <p:nvPr/>
-        </p:nvPicPr>
-        <p:blipFill rotWithShape="1">
-          <a:blip r:embed="rId4">
-            <a:alphaModFix/>
-          </a:blip>
-          <a:srcRect b="0" l="0" r="0" t="0"/>
-          <a:stretch/>
-        </p:blipFill>
-        <p:spPr>
-          <a:xfrm>
-            <a:off x="119749" y="98399"/>
-            <a:ext cx="1443885" cy="1237050"/>
-          </a:xfrm>
-          <a:prstGeom prst="rect">
-            <a:avLst/>
-          </a:prstGeom>
-          <a:noFill/>
-          <a:ln>
-            <a:noFill/>
-          </a:ln>
-        </p:spPr>
-      </p:pic>
-    </p:spTree>
-  </p:cSld>
-  <p:clrMapOvr>
-    <a:masterClrMapping/>
-  </p:clrMapOvr>
-</p:sld>
-</file>
-
-<file path=ppt/slides/slide6.xml><?xml version="1.0" encoding="utf-8"?>
-<p:sld xmlns:a="http://schemas.openxmlformats.org/drawingml/2006/main" xmlns:r="http://schemas.openxmlformats.org/officeDocument/2006/relationships" xmlns:mc="http://schemas.openxmlformats.org/markup-compatibility/2006" xmlns:mv="urn:schemas-microsoft-com:mac:vml" xmlns:p="http://schemas.openxmlformats.org/presentationml/2006/main" xmlns:c="http://schemas.openxmlformats.org/drawingml/2006/chart" xmlns:dgm="http://schemas.openxmlformats.org/drawingml/2006/diagram" xmlns:o="urn:schemas-microsoft-com:office:office" xmlns:v="urn:schemas-microsoft-com:vml" xmlns:pvml="urn:schemas-microsoft-com:office:powerpoint" xmlns:com="http://schemas.openxmlformats.org/drawingml/2006/compatibility" xmlns:p14="http://schemas.microsoft.com/office/powerpoint/2010/main" xmlns:p15="http://schemas.microsoft.com/office/powerpoint/2012/main" xmlns:ahyp="http://schemas.microsoft.com/office/drawing/2018/hyperlinkcolor">
-  <p:cSld>
-    <p:spTree>
-      <p:nvGrpSpPr>
-        <p:cNvPr id="116" name="Shape 116"/>
-        <p:cNvGrpSpPr/>
-        <p:nvPr/>
-      </p:nvGrpSpPr>
-      <p:grpSpPr>
-        <a:xfrm>
-          <a:off x="0" y="0"/>
-          <a:ext cx="0" cy="0"/>
-          <a:chOff x="0" y="0"/>
-          <a:chExt cx="0" cy="0"/>
-        </a:xfrm>
-      </p:grpSpPr>
-      <p:sp>
-        <p:nvSpPr>
-          <p:cNvPr id="117" name="Google Shape;117;p21"/>
-          <p:cNvSpPr txBox="1"/>
-          <p:nvPr>
-            <p:ph type="title"/>
-          </p:nvPr>
-        </p:nvSpPr>
-        <p:spPr>
-          <a:xfrm>
-            <a:off x="729450" y="1318650"/>
-            <a:ext cx="7688700" cy="535200"/>
-          </a:xfrm>
-          <a:prstGeom prst="rect">
-            <a:avLst/>
-          </a:prstGeom>
-          <a:noFill/>
-          <a:ln>
-            <a:noFill/>
-          </a:ln>
-        </p:spPr>
-        <p:txBody>
-          <a:bodyPr anchorCtr="0" anchor="t" bIns="91425" lIns="91425" spcFirstLastPara="1" rIns="91425" wrap="square" tIns="91425">
-            <a:normAutofit fontScale="90000"/>
-          </a:bodyPr>
-          <a:lstStyle/>
-          <a:p>
-            <a:pPr indent="0" lvl="0" marL="0" rtl="0" algn="l">
-              <a:lnSpc>
-                <a:spcPct val="100000"/>
-              </a:lnSpc>
-              <a:spcBef>
-                <a:spcPts val="0"/>
-              </a:spcBef>
-              <a:spcAft>
-                <a:spcPts val="0"/>
-              </a:spcAft>
-              <a:buSzPct val="111111"/>
-              <a:buNone/>
-            </a:pPr>
-            <a:r>
-              <a:t/>
-            </a:r>
-            <a:endParaRPr/>
-          </a:p>
-        </p:txBody>
-      </p:sp>
-      <p:sp>
-        <p:nvSpPr>
-          <p:cNvPr id="118" name="Google Shape;118;p21"/>
-          <p:cNvSpPr txBox="1"/>
-          <p:nvPr>
-            <p:ph idx="1" type="body"/>
-          </p:nvPr>
-        </p:nvSpPr>
-        <p:spPr>
-          <a:xfrm>
-            <a:off x="729450" y="2078875"/>
-            <a:ext cx="7688700" cy="2261100"/>
-          </a:xfrm>
-          <a:prstGeom prst="rect">
-            <a:avLst/>
-          </a:prstGeom>
-          <a:noFill/>
-          <a:ln>
-            <a:noFill/>
-          </a:ln>
-        </p:spPr>
-        <p:txBody>
-          <a:bodyPr anchorCtr="0" anchor="t" bIns="91425" lIns="91425" spcFirstLastPara="1" rIns="91425" wrap="square" tIns="91425">
-            <a:normAutofit/>
-          </a:bodyPr>
-          <a:lstStyle/>
-          <a:p>
-            <a:pPr indent="0" lvl="0" marL="0" rtl="0" algn="l">
-              <a:lnSpc>
-                <a:spcPct val="115000"/>
-              </a:lnSpc>
-              <a:spcBef>
-                <a:spcPts val="0"/>
-              </a:spcBef>
-              <a:spcAft>
-                <a:spcPts val="1200"/>
-              </a:spcAft>
-              <a:buSzPts val="1300"/>
-              <a:buNone/>
-            </a:pPr>
-            <a:r>
-              <a:t/>
-            </a:r>
-            <a:endParaRPr/>
-          </a:p>
-        </p:txBody>
-      </p:sp>
-      <p:pic>
-        <p:nvPicPr>
-          <p:cNvPr id="119" name="Google Shape;119;p21"/>
-          <p:cNvPicPr preferRelativeResize="0"/>
-          <p:nvPr/>
-        </p:nvPicPr>
-        <p:blipFill rotWithShape="1">
-          <a:blip r:embed="rId3">
-            <a:alphaModFix/>
-          </a:blip>
-          <a:srcRect b="0" l="0" r="0" t="0"/>
-          <a:stretch/>
-        </p:blipFill>
-        <p:spPr>
-          <a:xfrm>
-            <a:off x="423400" y="822225"/>
-            <a:ext cx="8300800" cy="4082351"/>
+            <a:off x="1881088" y="1936900"/>
+            <a:ext cx="5381828" cy="2792225"/>
           </a:xfrm>
           <a:prstGeom prst="rect">
             <a:avLst/>
@@ -15123,7 +16802,191 @@
       </p:grpSpPr>
       <p:sp>
         <p:nvSpPr>
-          <p:cNvPr id="124" name="Google Shape;124;p22"/>
+          <p:cNvPr id="124" name="Google Shape;124;p20"/>
+          <p:cNvSpPr txBox="1"/>
+          <p:nvPr>
+            <p:ph idx="1" type="body"/>
+          </p:nvPr>
+        </p:nvSpPr>
+        <p:spPr>
+          <a:xfrm>
+            <a:off x="660850" y="1826375"/>
+            <a:ext cx="4752900" cy="2991600"/>
+          </a:xfrm>
+          <a:prstGeom prst="rect">
+            <a:avLst/>
+          </a:prstGeom>
+          <a:noFill/>
+          <a:ln>
+            <a:noFill/>
+          </a:ln>
+        </p:spPr>
+        <p:txBody>
+          <a:bodyPr anchorCtr="0" anchor="t" bIns="91425" lIns="91425" spcFirstLastPara="1" rIns="91425" wrap="square" tIns="91425">
+            <a:normAutofit lnSpcReduction="20000"/>
+          </a:bodyPr>
+          <a:lstStyle/>
+          <a:p>
+            <a:pPr indent="0" lvl="0" marL="0" rtl="0" algn="l">
+              <a:lnSpc>
+                <a:spcPct val="115000"/>
+              </a:lnSpc>
+              <a:spcBef>
+                <a:spcPts val="1500"/>
+              </a:spcBef>
+              <a:spcAft>
+                <a:spcPts val="0"/>
+              </a:spcAft>
+              <a:buSzPts val="1300"/>
+              <a:buNone/>
+            </a:pPr>
+            <a:r>
+              <a:rPr lang="es-419" sz="1400">
+                <a:solidFill>
+                  <a:srgbClr val="212121"/>
+                </a:solidFill>
+                <a:highlight>
+                  <a:schemeClr val="lt1"/>
+                </a:highlight>
+              </a:rPr>
+              <a:t>El gradiente de una función es un vector que apunta en la dirección de la mayor derivada de la función en un punto dado. Establece la dirección en la que la función está aumentando más rápidamente.</a:t>
+            </a:r>
+            <a:endParaRPr sz="1400">
+              <a:solidFill>
+                <a:srgbClr val="212121"/>
+              </a:solidFill>
+              <a:highlight>
+                <a:schemeClr val="lt1"/>
+              </a:highlight>
+            </a:endParaRPr>
+          </a:p>
+          <a:p>
+            <a:pPr indent="0" lvl="0" marL="0" rtl="0" algn="l">
+              <a:lnSpc>
+                <a:spcPct val="115000"/>
+              </a:lnSpc>
+              <a:spcBef>
+                <a:spcPts val="1500"/>
+              </a:spcBef>
+              <a:spcAft>
+                <a:spcPts val="0"/>
+              </a:spcAft>
+              <a:buSzPts val="1300"/>
+              <a:buNone/>
+            </a:pPr>
+            <a:r>
+              <a:rPr lang="es-419" sz="1400">
+                <a:solidFill>
+                  <a:srgbClr val="212121"/>
+                </a:solidFill>
+                <a:highlight>
+                  <a:schemeClr val="lt1"/>
+                </a:highlight>
+              </a:rPr>
+              <a:t>Cuando estamos tratando de minimizar una función, se busca encontrar el punto donde la función alcanza su valor mínimo. En el mínimo de la función, el gradiente es igual a cero. </a:t>
+            </a:r>
+            <a:endParaRPr sz="1400">
+              <a:solidFill>
+                <a:srgbClr val="212121"/>
+              </a:solidFill>
+              <a:highlight>
+                <a:schemeClr val="lt1"/>
+              </a:highlight>
+            </a:endParaRPr>
+          </a:p>
+          <a:p>
+            <a:pPr indent="0" lvl="0" marL="0" rtl="0" algn="l">
+              <a:lnSpc>
+                <a:spcPct val="115000"/>
+              </a:lnSpc>
+              <a:spcBef>
+                <a:spcPts val="1500"/>
+              </a:spcBef>
+              <a:spcAft>
+                <a:spcPts val="0"/>
+              </a:spcAft>
+              <a:buSzPts val="1300"/>
+              <a:buNone/>
+            </a:pPr>
+            <a:r>
+              <a:rPr lang="es-419" sz="1400">
+                <a:solidFill>
+                  <a:srgbClr val="212121"/>
+                </a:solidFill>
+                <a:highlight>
+                  <a:schemeClr val="lt1"/>
+                </a:highlight>
+              </a:rPr>
+              <a:t>Si se mueve en la dirección opuesta al gradiente, nos acercamos al mínimo.</a:t>
+            </a:r>
+            <a:endParaRPr sz="1400">
+              <a:solidFill>
+                <a:srgbClr val="212121"/>
+              </a:solidFill>
+              <a:highlight>
+                <a:schemeClr val="lt1"/>
+              </a:highlight>
+            </a:endParaRPr>
+          </a:p>
+          <a:p>
+            <a:pPr indent="0" lvl="0" marL="0" rtl="0" algn="l">
+              <a:lnSpc>
+                <a:spcPct val="115000"/>
+              </a:lnSpc>
+              <a:spcBef>
+                <a:spcPts val="1500"/>
+              </a:spcBef>
+              <a:spcAft>
+                <a:spcPts val="0"/>
+              </a:spcAft>
+              <a:buSzPts val="1300"/>
+              <a:buNone/>
+            </a:pPr>
+            <a:r>
+              <a:rPr lang="es-419" sz="1400">
+                <a:solidFill>
+                  <a:srgbClr val="212121"/>
+                </a:solidFill>
+                <a:highlight>
+                  <a:schemeClr val="lt1"/>
+                </a:highlight>
+              </a:rPr>
+              <a:t>Pero puede ser un mínimo global, o local</a:t>
+            </a:r>
+            <a:endParaRPr/>
+          </a:p>
+        </p:txBody>
+      </p:sp>
+      <p:pic>
+        <p:nvPicPr>
+          <p:cNvPr id="125" name="Google Shape;125;p20"/>
+          <p:cNvPicPr preferRelativeResize="0"/>
+          <p:nvPr/>
+        </p:nvPicPr>
+        <p:blipFill rotWithShape="1">
+          <a:blip r:embed="rId3">
+            <a:alphaModFix/>
+          </a:blip>
+          <a:srcRect b="0" l="0" r="0" t="0"/>
+          <a:stretch/>
+        </p:blipFill>
+        <p:spPr>
+          <a:xfrm>
+            <a:off x="6547399" y="589324"/>
+            <a:ext cx="1443885" cy="1237050"/>
+          </a:xfrm>
+          <a:prstGeom prst="rect">
+            <a:avLst/>
+          </a:prstGeom>
+          <a:noFill/>
+          <a:ln>
+            <a:noFill/>
+          </a:ln>
+        </p:spPr>
+      </p:pic>
+      <p:sp>
+        <p:nvSpPr>
+          <p:cNvPr id="126" name="Google Shape;126;p20"/>
           <p:cNvSpPr txBox="1"/>
           <p:nvPr>
             <p:ph type="title"/>
@@ -15131,7 +16994,7 @@
         </p:nvSpPr>
         <p:spPr>
           <a:xfrm>
-            <a:off x="729450" y="1318650"/>
+            <a:off x="727650" y="1335450"/>
             <a:ext cx="7688700" cy="535200"/>
           </a:xfrm>
           <a:prstGeom prst="rect">
@@ -15162,152 +17025,24 @@
               <a:buNone/>
             </a:pPr>
             <a:r>
-              <a:rPr lang="es-419"/>
-              <a:t>Técnica del gradiente descendiente</a:t>
+              <a:rPr lang="es-419">
+                <a:solidFill>
+                  <a:srgbClr val="1A1A1A"/>
+                </a:solidFill>
+              </a:rPr>
+              <a:t>¿Qué es el gradiente?</a:t>
             </a:r>
-            <a:endParaRPr/>
-          </a:p>
-        </p:txBody>
-      </p:sp>
-      <p:sp>
-        <p:nvSpPr>
-          <p:cNvPr id="125" name="Google Shape;125;p22"/>
-          <p:cNvSpPr txBox="1"/>
-          <p:nvPr>
-            <p:ph idx="1" type="body"/>
-          </p:nvPr>
-        </p:nvSpPr>
-        <p:spPr>
-          <a:xfrm>
-            <a:off x="729450" y="2078875"/>
-            <a:ext cx="7688700" cy="2261100"/>
-          </a:xfrm>
-          <a:prstGeom prst="rect">
-            <a:avLst/>
-          </a:prstGeom>
-          <a:noFill/>
-          <a:ln>
-            <a:noFill/>
-          </a:ln>
-        </p:spPr>
-        <p:txBody>
-          <a:bodyPr anchorCtr="0" anchor="t" bIns="91425" lIns="91425" spcFirstLastPara="1" rIns="91425" wrap="square" tIns="91425">
-            <a:normAutofit lnSpcReduction="10000"/>
-          </a:bodyPr>
-          <a:lstStyle/>
-          <a:p>
-            <a:pPr indent="0" lvl="0" marL="0" rtl="0" algn="l">
-              <a:lnSpc>
-                <a:spcPct val="115000"/>
-              </a:lnSpc>
-              <a:spcBef>
-                <a:spcPts val="0"/>
-              </a:spcBef>
-              <a:spcAft>
-                <a:spcPts val="0"/>
-              </a:spcAft>
-              <a:buSzPts val="1300"/>
-              <a:buNone/>
-            </a:pPr>
             <a:r>
-              <a:rPr lang="es-419"/>
-              <a:t>Se parte de un vector inicial en el espacio de n dimensiones (características)  (x1, x2, …, xn).</a:t>
-            </a:r>
-            <a:endParaRPr/>
-          </a:p>
-          <a:p>
-            <a:pPr indent="0" lvl="0" marL="0" rtl="0" algn="l">
-              <a:lnSpc>
-                <a:spcPct val="115000"/>
-              </a:lnSpc>
-              <a:spcBef>
-                <a:spcPts val="1200"/>
-              </a:spcBef>
-              <a:spcAft>
-                <a:spcPts val="0"/>
-              </a:spcAft>
-              <a:buSzPts val="1300"/>
-              <a:buNone/>
-            </a:pPr>
-            <a:r>
-              <a:rPr lang="es-419"/>
-              <a:t>Se obtiene el gradiente de la función de pérdida (u optimización) para ese punto x.</a:t>
-            </a:r>
-            <a:endParaRPr/>
-          </a:p>
-          <a:p>
-            <a:pPr indent="0" lvl="0" marL="0" rtl="0" algn="l">
-              <a:lnSpc>
-                <a:spcPct val="115000"/>
-              </a:lnSpc>
-              <a:spcBef>
-                <a:spcPts val="1200"/>
-              </a:spcBef>
-              <a:spcAft>
-                <a:spcPts val="0"/>
-              </a:spcAft>
-              <a:buSzPts val="1300"/>
-              <a:buNone/>
-            </a:pPr>
-            <a:r>
-              <a:t/>
-            </a:r>
-            <a:endParaRPr/>
-          </a:p>
-          <a:p>
-            <a:pPr indent="0" lvl="0" marL="0" rtl="0" algn="l">
-              <a:lnSpc>
-                <a:spcPct val="115000"/>
-              </a:lnSpc>
-              <a:spcBef>
-                <a:spcPts val="1200"/>
-              </a:spcBef>
-              <a:spcAft>
-                <a:spcPts val="0"/>
-              </a:spcAft>
-              <a:buSzPts val="1300"/>
-              <a:buNone/>
-            </a:pPr>
-            <a:r>
-              <a:t/>
-            </a:r>
-            <a:endParaRPr/>
-          </a:p>
-          <a:p>
-            <a:pPr indent="0" lvl="0" marL="0" rtl="0" algn="l">
-              <a:lnSpc>
-                <a:spcPct val="115000"/>
-              </a:lnSpc>
-              <a:spcBef>
-                <a:spcPts val="1200"/>
-              </a:spcBef>
-              <a:spcAft>
-                <a:spcPts val="0"/>
-              </a:spcAft>
-              <a:buSzPts val="1300"/>
-              <a:buNone/>
-            </a:pPr>
-            <a:r>
-              <a:t/>
-            </a:r>
-            <a:endParaRPr/>
-          </a:p>
-          <a:p>
-            <a:pPr indent="0" lvl="0" marL="0" rtl="0" algn="l">
-              <a:lnSpc>
-                <a:spcPct val="115000"/>
-              </a:lnSpc>
-              <a:spcBef>
-                <a:spcPts val="1200"/>
-              </a:spcBef>
-              <a:spcAft>
-                <a:spcPts val="1200"/>
-              </a:spcAft>
-              <a:buSzPts val="1300"/>
-              <a:buNone/>
-            </a:pPr>
-            <a:r>
-              <a:t/>
+              <a:rPr b="0" lang="es-419" sz="1100">
+                <a:solidFill>
+                  <a:srgbClr val="000000"/>
+                </a:solidFill>
+                <a:latin typeface="Arial"/>
+                <a:ea typeface="Arial"/>
+                <a:cs typeface="Arial"/>
+                <a:sym typeface="Arial"/>
+              </a:rPr>
+              <a:t> </a:t>
             </a:r>
             <a:endParaRPr/>
           </a:p>
@@ -15315,48 +17050,22 @@
       </p:sp>
       <p:pic>
         <p:nvPicPr>
-          <p:cNvPr id="126" name="Google Shape;126;p22"/>
+          <p:cNvPr id="127" name="Google Shape;127;p20"/>
           <p:cNvPicPr preferRelativeResize="0"/>
           <p:nvPr/>
         </p:nvPicPr>
-        <p:blipFill rotWithShape="1">
-          <a:blip r:embed="rId3">
+        <p:blipFill>
+          <a:blip r:embed="rId4">
             <a:alphaModFix/>
           </a:blip>
-          <a:srcRect b="0" l="0" r="0" t="0"/>
-          <a:stretch/>
+          <a:stretch>
+            <a:fillRect/>
+          </a:stretch>
         </p:blipFill>
         <p:spPr>
           <a:xfrm>
-            <a:off x="2407325" y="2777175"/>
-            <a:ext cx="4329349" cy="864500"/>
-          </a:xfrm>
-          <a:prstGeom prst="rect">
-            <a:avLst/>
-          </a:prstGeom>
-          <a:noFill/>
-          <a:ln>
-            <a:noFill/>
-          </a:ln>
-        </p:spPr>
-      </p:pic>
-      <p:pic>
-        <p:nvPicPr>
-          <p:cNvPr id="127" name="Google Shape;127;p22"/>
-          <p:cNvPicPr preferRelativeResize="0"/>
-          <p:nvPr/>
-        </p:nvPicPr>
-        <p:blipFill rotWithShape="1">
-          <a:blip r:embed="rId4">
-            <a:alphaModFix/>
-          </a:blip>
-          <a:srcRect b="0" l="0" r="0" t="0"/>
-          <a:stretch/>
-        </p:blipFill>
-        <p:spPr>
-          <a:xfrm>
-            <a:off x="2653225" y="3641675"/>
-            <a:ext cx="3841149" cy="1367925"/>
+            <a:off x="5552425" y="1947525"/>
+            <a:ext cx="3324475" cy="2968050"/>
           </a:xfrm>
           <a:prstGeom prst="rect">
             <a:avLst/>
@@ -15394,7 +17103,7 @@
       </p:grpSpPr>
       <p:sp>
         <p:nvSpPr>
-          <p:cNvPr id="132" name="Google Shape;132;p23"/>
+          <p:cNvPr id="132" name="Google Shape;132;p21"/>
           <p:cNvSpPr txBox="1"/>
           <p:nvPr>
             <p:ph type="title"/>
@@ -15433,26 +17142,6 @@
               <a:buNone/>
             </a:pPr>
             <a:r>
-              <a:rPr lang="es-419"/>
-              <a:t>Técnica del gradiente descendiente</a:t>
-            </a:r>
-            <a:endParaRPr/>
-          </a:p>
-          <a:p>
-            <a:pPr indent="0" lvl="0" marL="0" rtl="0" algn="l">
-              <a:lnSpc>
-                <a:spcPct val="100000"/>
-              </a:lnSpc>
-              <a:spcBef>
-                <a:spcPts val="0"/>
-              </a:spcBef>
-              <a:spcAft>
-                <a:spcPts val="0"/>
-              </a:spcAft>
-              <a:buSzPct val="111111"/>
-              <a:buNone/>
-            </a:pPr>
-            <a:r>
               <a:t/>
             </a:r>
             <a:endParaRPr/>
@@ -15461,7 +17150,7 @@
       </p:sp>
       <p:sp>
         <p:nvSpPr>
-          <p:cNvPr id="133" name="Google Shape;133;p23"/>
+          <p:cNvPr id="133" name="Google Shape;133;p21"/>
           <p:cNvSpPr txBox="1"/>
           <p:nvPr>
             <p:ph idx="1" type="body"/>
@@ -15470,7 +17159,7 @@
         <p:spPr>
           <a:xfrm>
             <a:off x="729450" y="2078875"/>
-            <a:ext cx="7688700" cy="2887800"/>
+            <a:ext cx="7688700" cy="2261100"/>
           </a:xfrm>
           <a:prstGeom prst="rect">
             <a:avLst/>
@@ -15494,101 +17183,6 @@
                 <a:spcPts val="0"/>
               </a:spcBef>
               <a:spcAft>
-                <a:spcPts val="0"/>
-              </a:spcAft>
-              <a:buSzPts val="1300"/>
-              <a:buNone/>
-            </a:pPr>
-            <a:r>
-              <a:t/>
-            </a:r>
-            <a:endParaRPr/>
-          </a:p>
-          <a:p>
-            <a:pPr indent="0" lvl="0" marL="0" rtl="0" algn="l">
-              <a:lnSpc>
-                <a:spcPct val="115000"/>
-              </a:lnSpc>
-              <a:spcBef>
-                <a:spcPts val="1200"/>
-              </a:spcBef>
-              <a:spcAft>
-                <a:spcPts val="0"/>
-              </a:spcAft>
-              <a:buSzPts val="1300"/>
-              <a:buNone/>
-            </a:pPr>
-            <a:r>
-              <a:t/>
-            </a:r>
-            <a:endParaRPr/>
-          </a:p>
-          <a:p>
-            <a:pPr indent="0" lvl="0" marL="0" rtl="0" algn="l">
-              <a:lnSpc>
-                <a:spcPct val="115000"/>
-              </a:lnSpc>
-              <a:spcBef>
-                <a:spcPts val="1200"/>
-              </a:spcBef>
-              <a:spcAft>
-                <a:spcPts val="0"/>
-              </a:spcAft>
-              <a:buSzPts val="1300"/>
-              <a:buNone/>
-            </a:pPr>
-            <a:r>
-              <a:t/>
-            </a:r>
-            <a:endParaRPr/>
-          </a:p>
-          <a:p>
-            <a:pPr indent="0" lvl="0" marL="0" rtl="0" algn="l">
-              <a:lnSpc>
-                <a:spcPct val="115000"/>
-              </a:lnSpc>
-              <a:spcBef>
-                <a:spcPts val="1200"/>
-              </a:spcBef>
-              <a:spcAft>
-                <a:spcPts val="0"/>
-              </a:spcAft>
-              <a:buSzPts val="1300"/>
-              <a:buNone/>
-            </a:pPr>
-            <a:r>
-              <a:t/>
-            </a:r>
-            <a:endParaRPr/>
-          </a:p>
-          <a:p>
-            <a:pPr indent="0" lvl="0" marL="0" rtl="0" algn="l">
-              <a:lnSpc>
-                <a:spcPct val="115000"/>
-              </a:lnSpc>
-              <a:spcBef>
-                <a:spcPts val="1200"/>
-              </a:spcBef>
-              <a:spcAft>
-                <a:spcPts val="0"/>
-              </a:spcAft>
-              <a:buSzPts val="1300"/>
-              <a:buNone/>
-            </a:pPr>
-            <a:r>
-              <a:t/>
-            </a:r>
-            <a:endParaRPr/>
-          </a:p>
-          <a:p>
-            <a:pPr indent="0" lvl="0" marL="0" rtl="0" algn="l">
-              <a:lnSpc>
-                <a:spcPct val="115000"/>
-              </a:lnSpc>
-              <a:spcBef>
-                <a:spcPts val="1200"/>
-              </a:spcBef>
-              <a:spcAft>
                 <a:spcPts val="1200"/>
               </a:spcAft>
               <a:buSzPts val="1300"/>
@@ -15603,7 +17197,7 @@
       </p:sp>
       <p:pic>
         <p:nvPicPr>
-          <p:cNvPr id="134" name="Google Shape;134;p23"/>
+          <p:cNvPr id="134" name="Google Shape;134;p21"/>
           <p:cNvPicPr preferRelativeResize="0"/>
           <p:nvPr/>
         </p:nvPicPr>
@@ -15616,8 +17210,8 @@
         </p:blipFill>
         <p:spPr>
           <a:xfrm>
-            <a:off x="729450" y="1960600"/>
-            <a:ext cx="7688701" cy="845250"/>
+            <a:off x="423400" y="822225"/>
+            <a:ext cx="8300800" cy="4082351"/>
           </a:xfrm>
           <a:prstGeom prst="rect">
             <a:avLst/>
@@ -15628,99 +17222,6 @@
           </a:ln>
         </p:spPr>
       </p:pic>
-      <p:pic>
-        <p:nvPicPr>
-          <p:cNvPr id="135" name="Google Shape;135;p23"/>
-          <p:cNvPicPr preferRelativeResize="0"/>
-          <p:nvPr/>
-        </p:nvPicPr>
-        <p:blipFill rotWithShape="1">
-          <a:blip r:embed="rId4">
-            <a:alphaModFix/>
-          </a:blip>
-          <a:srcRect b="0" l="0" r="0" t="0"/>
-          <a:stretch/>
-        </p:blipFill>
-        <p:spPr>
-          <a:xfrm>
-            <a:off x="729444" y="2912600"/>
-            <a:ext cx="3656256" cy="2054075"/>
-          </a:xfrm>
-          <a:prstGeom prst="rect">
-            <a:avLst/>
-          </a:prstGeom>
-          <a:noFill/>
-          <a:ln>
-            <a:noFill/>
-          </a:ln>
-        </p:spPr>
-      </p:pic>
-      <p:sp>
-        <p:nvSpPr>
-          <p:cNvPr id="136" name="Google Shape;136;p23"/>
-          <p:cNvSpPr txBox="1"/>
-          <p:nvPr/>
-        </p:nvSpPr>
-        <p:spPr>
-          <a:xfrm>
-            <a:off x="4928025" y="3467500"/>
-            <a:ext cx="3888000" cy="615600"/>
-          </a:xfrm>
-          <a:prstGeom prst="rect">
-            <a:avLst/>
-          </a:prstGeom>
-          <a:noFill/>
-          <a:ln>
-            <a:noFill/>
-          </a:ln>
-        </p:spPr>
-        <p:txBody>
-          <a:bodyPr anchorCtr="0" anchor="t" bIns="91425" lIns="91425" spcFirstLastPara="1" rIns="91425" wrap="square" tIns="91425">
-            <a:spAutoFit/>
-          </a:bodyPr>
-          <a:lstStyle/>
-          <a:p>
-            <a:pPr indent="0" lvl="0" marL="0" marR="0" rtl="0" algn="l">
-              <a:lnSpc>
-                <a:spcPct val="100000"/>
-              </a:lnSpc>
-              <a:spcBef>
-                <a:spcPts val="0"/>
-              </a:spcBef>
-              <a:spcAft>
-                <a:spcPts val="0"/>
-              </a:spcAft>
-              <a:buClr>
-                <a:srgbClr val="000000"/>
-              </a:buClr>
-              <a:buSzPts val="1400"/>
-              <a:buFont typeface="Arial"/>
-              <a:buNone/>
-            </a:pPr>
-            <a:r>
-              <a:rPr b="0" i="0" lang="es-419" sz="1400" u="none" cap="none" strike="noStrike">
-                <a:solidFill>
-                  <a:srgbClr val="000000"/>
-                </a:solidFill>
-                <a:latin typeface="Lato"/>
-                <a:ea typeface="Lato"/>
-                <a:cs typeface="Lato"/>
-                <a:sym typeface="Lato"/>
-              </a:rPr>
-              <a:t>sería mejor de forma matricial para no tener que codear por cada feature del modelo, ¿no?</a:t>
-            </a:r>
-            <a:endParaRPr b="0" i="0" sz="1400" u="none" cap="none" strike="noStrike">
-              <a:solidFill>
-                <a:srgbClr val="000000"/>
-              </a:solidFill>
-              <a:latin typeface="Lato"/>
-              <a:ea typeface="Lato"/>
-              <a:cs typeface="Lato"/>
-              <a:sym typeface="Lato"/>
-            </a:endParaRPr>
-          </a:p>
-        </p:txBody>
-      </p:sp>
     </p:spTree>
   </p:cSld>
   <p:clrMapOvr>
@@ -15734,7 +17235,7 @@
   <p:cSld>
     <p:spTree>
       <p:nvGrpSpPr>
-        <p:cNvPr id="140" name="Shape 140"/>
+        <p:cNvPr id="138" name="Shape 138"/>
         <p:cNvGrpSpPr/>
         <p:nvPr/>
       </p:nvGrpSpPr>
@@ -15748,7 +17249,7 @@
       </p:grpSpPr>
       <p:sp>
         <p:nvSpPr>
-          <p:cNvPr id="141" name="Google Shape;141;p24"/>
+          <p:cNvPr id="139" name="Google Shape;139;p22"/>
           <p:cNvSpPr txBox="1"/>
           <p:nvPr>
             <p:ph type="title"/>
@@ -15792,30 +17293,11 @@
             </a:r>
             <a:endParaRPr/>
           </a:p>
-          <a:p>
-            <a:pPr indent="0" lvl="0" marL="0" rtl="0" algn="l">
-              <a:lnSpc>
-                <a:spcPct val="100000"/>
-              </a:lnSpc>
-              <a:spcBef>
-                <a:spcPts val="0"/>
-              </a:spcBef>
-              <a:spcAft>
-                <a:spcPts val="0"/>
-              </a:spcAft>
-              <a:buSzPct val="111111"/>
-              <a:buNone/>
-            </a:pPr>
-            <a:r>
-              <a:t/>
-            </a:r>
-            <a:endParaRPr/>
-          </a:p>
         </p:txBody>
       </p:sp>
       <p:sp>
         <p:nvSpPr>
-          <p:cNvPr id="142" name="Google Shape;142;p24"/>
+          <p:cNvPr id="140" name="Google Shape;140;p22"/>
           <p:cNvSpPr txBox="1"/>
           <p:nvPr>
             <p:ph idx="1" type="body"/>
@@ -15836,7 +17318,7 @@
         </p:spPr>
         <p:txBody>
           <a:bodyPr anchorCtr="0" anchor="t" bIns="91425" lIns="91425" spcFirstLastPara="1" rIns="91425" wrap="square" tIns="91425">
-            <a:normAutofit/>
+            <a:normAutofit lnSpcReduction="10000"/>
           </a:bodyPr>
           <a:lstStyle/>
           <a:p>
@@ -15846,6 +17328,111 @@
               </a:lnSpc>
               <a:spcBef>
                 <a:spcPts val="0"/>
+              </a:spcBef>
+              <a:spcAft>
+                <a:spcPts val="0"/>
+              </a:spcAft>
+              <a:buSzPts val="1300"/>
+              <a:buNone/>
+            </a:pPr>
+            <a:r>
+              <a:rPr lang="es-419"/>
+              <a:t>Se parte de un vector inicial en el espacio de n dimensiones (</a:t>
+            </a:r>
+            <a:r>
+              <a:rPr lang="es-419"/>
+              <a:t>parámetros</a:t>
+            </a:r>
+            <a:r>
+              <a:rPr lang="es-419"/>
+              <a:t>)  (b1, b2, …, bn).</a:t>
+            </a:r>
+            <a:endParaRPr/>
+          </a:p>
+          <a:p>
+            <a:pPr indent="0" lvl="0" marL="0" rtl="0" algn="l">
+              <a:lnSpc>
+                <a:spcPct val="115000"/>
+              </a:lnSpc>
+              <a:spcBef>
+                <a:spcPts val="1200"/>
+              </a:spcBef>
+              <a:spcAft>
+                <a:spcPts val="0"/>
+              </a:spcAft>
+              <a:buSzPts val="1300"/>
+              <a:buNone/>
+            </a:pPr>
+            <a:r>
+              <a:rPr lang="es-419"/>
+              <a:t>Se obtiene el gradiente de la función de pérdida (u optimización) para ese punto x.</a:t>
+            </a:r>
+            <a:endParaRPr/>
+          </a:p>
+          <a:p>
+            <a:pPr indent="0" lvl="0" marL="0" rtl="0" algn="l">
+              <a:lnSpc>
+                <a:spcPct val="115000"/>
+              </a:lnSpc>
+              <a:spcBef>
+                <a:spcPts val="1200"/>
+              </a:spcBef>
+              <a:spcAft>
+                <a:spcPts val="0"/>
+              </a:spcAft>
+              <a:buSzPts val="1300"/>
+              <a:buNone/>
+            </a:pPr>
+            <a:r>
+              <a:t/>
+            </a:r>
+            <a:endParaRPr/>
+          </a:p>
+          <a:p>
+            <a:pPr indent="0" lvl="0" marL="0" rtl="0" algn="l">
+              <a:lnSpc>
+                <a:spcPct val="115000"/>
+              </a:lnSpc>
+              <a:spcBef>
+                <a:spcPts val="1200"/>
+              </a:spcBef>
+              <a:spcAft>
+                <a:spcPts val="0"/>
+              </a:spcAft>
+              <a:buSzPts val="1300"/>
+              <a:buNone/>
+            </a:pPr>
+            <a:r>
+              <a:t/>
+            </a:r>
+            <a:endParaRPr/>
+          </a:p>
+          <a:p>
+            <a:pPr indent="0" lvl="0" marL="0" rtl="0" algn="l">
+              <a:lnSpc>
+                <a:spcPct val="115000"/>
+              </a:lnSpc>
+              <a:spcBef>
+                <a:spcPts val="1200"/>
+              </a:spcBef>
+              <a:spcAft>
+                <a:spcPts val="0"/>
+              </a:spcAft>
+              <a:buSzPts val="1300"/>
+              <a:buNone/>
+            </a:pPr>
+            <a:r>
+              <a:t/>
+            </a:r>
+            <a:endParaRPr/>
+          </a:p>
+          <a:p>
+            <a:pPr indent="0" lvl="0" marL="0" rtl="0" algn="l">
+              <a:lnSpc>
+                <a:spcPct val="115000"/>
+              </a:lnSpc>
+              <a:spcBef>
+                <a:spcPts val="1200"/>
               </a:spcBef>
               <a:spcAft>
                 <a:spcPts val="1200"/>
@@ -15862,7 +17449,7 @@
       </p:sp>
       <p:pic>
         <p:nvPicPr>
-          <p:cNvPr id="143" name="Google Shape;143;p24"/>
+          <p:cNvPr id="141" name="Google Shape;141;p22"/>
           <p:cNvPicPr preferRelativeResize="0"/>
           <p:nvPr/>
         </p:nvPicPr>
@@ -15875,8 +17462,35 @@
         </p:blipFill>
         <p:spPr>
           <a:xfrm>
-            <a:off x="729450" y="2078875"/>
-            <a:ext cx="7688700" cy="2062159"/>
+            <a:off x="2407325" y="2777175"/>
+            <a:ext cx="4329349" cy="864500"/>
+          </a:xfrm>
+          <a:prstGeom prst="rect">
+            <a:avLst/>
+          </a:prstGeom>
+          <a:noFill/>
+          <a:ln>
+            <a:noFill/>
+          </a:ln>
+        </p:spPr>
+      </p:pic>
+      <p:pic>
+        <p:nvPicPr>
+          <p:cNvPr id="142" name="Google Shape;142;p22"/>
+          <p:cNvPicPr preferRelativeResize="0"/>
+          <p:nvPr/>
+        </p:nvPicPr>
+        <p:blipFill rotWithShape="1">
+          <a:blip r:embed="rId4">
+            <a:alphaModFix/>
+          </a:blip>
+          <a:srcRect b="0" l="0" r="0" t="0"/>
+          <a:stretch/>
+        </p:blipFill>
+        <p:spPr>
+          <a:xfrm>
+            <a:off x="2653225" y="3641675"/>
+            <a:ext cx="3841149" cy="1367925"/>
           </a:xfrm>
           <a:prstGeom prst="rect">
             <a:avLst/>
@@ -15896,6 +17510,285 @@
 </file>
 
 <file path=ppt/theme/theme1.xml><?xml version="1.0" encoding="utf-8"?>
+<a:theme xmlns:a="http://schemas.openxmlformats.org/drawingml/2006/main" xmlns:r="http://schemas.openxmlformats.org/officeDocument/2006/relationships">
+  <a:themeElements>
+    <a:clrScheme name="Default">
+      <a:dk1>
+        <a:srgbClr val="000000"/>
+      </a:dk1>
+      <a:lt1>
+        <a:srgbClr val="FFFFFF"/>
+      </a:lt1>
+      <a:dk2>
+        <a:srgbClr val="158158"/>
+      </a:dk2>
+      <a:lt2>
+        <a:srgbClr val="F3F3F3"/>
+      </a:lt2>
+      <a:accent1>
+        <a:srgbClr val="058DC7"/>
+      </a:accent1>
+      <a:accent2>
+        <a:srgbClr val="50B432"/>
+      </a:accent2>
+      <a:accent3>
+        <a:srgbClr val="ED561B"/>
+      </a:accent3>
+      <a:accent4>
+        <a:srgbClr val="EDEF00"/>
+      </a:accent4>
+      <a:accent5>
+        <a:srgbClr val="24CBE5"/>
+      </a:accent5>
+      <a:accent6>
+        <a:srgbClr val="64E572"/>
+      </a:accent6>
+      <a:hlink>
+        <a:srgbClr val="2200CC"/>
+      </a:hlink>
+      <a:folHlink>
+        <a:srgbClr val="551A8B"/>
+      </a:folHlink>
+    </a:clrScheme>
+    <a:fontScheme name="Office">
+      <a:majorFont>
+        <a:latin typeface="Arial"/>
+        <a:ea typeface=""/>
+        <a:cs typeface=""/>
+        <a:font script="Jpan" typeface="ＭＳ Ｐゴシック"/>
+        <a:font script="Hang" typeface="맑은 고딕"/>
+        <a:font script="Hans" typeface="宋体"/>
+        <a:font script="Hant" typeface="新細明體"/>
+        <a:font script="Arab" typeface="Times New Roman"/>
+        <a:font script="Hebr" typeface="Times New Roman"/>
+        <a:font script="Thai" typeface="Angsana New"/>
+        <a:font script="Ethi" typeface="Nyala"/>
+        <a:font script="Beng" typeface="Vrinda"/>
+        <a:font script="Gujr" typeface="Shruti"/>
+        <a:font script="Khmr" typeface="MoolBoran"/>
+        <a:font script="Knda" typeface="Tunga"/>
+        <a:font script="Guru" typeface="Raavi"/>
+        <a:font script="Cans" typeface="Euphemia"/>
+        <a:font script="Cher" typeface="Plantagenet Cherokee"/>
+        <a:font script="Yiii" typeface="Microsoft Yi Baiti"/>
+        <a:font script="Tibt" typeface="Microsoft Himalaya"/>
+        <a:font script="Thaa" typeface="MV Boli"/>
+        <a:font script="Deva" typeface="Mangal"/>
+        <a:font script="Telu" typeface="Gautami"/>
+        <a:font script="Taml" typeface="Latha"/>
+        <a:font script="Syrc" typeface="Estrangelo Edessa"/>
+        <a:font script="Orya" typeface="Kalinga"/>
+        <a:font script="Mlym" typeface="Kartika"/>
+        <a:font script="Laoo" typeface="DokChampa"/>
+        <a:font script="Sinh" typeface="Iskoola Pota"/>
+        <a:font script="Mong" typeface="Mongolian Baiti"/>
+        <a:font script="Viet" typeface="Times New Roman"/>
+        <a:font script="Uigh" typeface="Microsoft Uighur"/>
+        <a:font script="Geor" typeface="Sylfaen"/>
+      </a:majorFont>
+      <a:minorFont>
+        <a:latin typeface="Arial"/>
+        <a:ea typeface=""/>
+        <a:cs typeface=""/>
+        <a:font script="Jpan" typeface="ＭＳ Ｐゴシック"/>
+        <a:font script="Hang" typeface="맑은 고딕"/>
+        <a:font script="Hans" typeface="宋体"/>
+        <a:font script="Hant" typeface="新細明體"/>
+        <a:font script="Arab" typeface="Arial"/>
+        <a:font script="Hebr" typeface="Arial"/>
+        <a:font script="Thai" typeface="Cordia New"/>
+        <a:font script="Ethi" typeface="Nyala"/>
+        <a:font script="Beng" typeface="Vrinda"/>
+        <a:font script="Gujr" typeface="Shruti"/>
+        <a:font script="Khmr" typeface="DaunPenh"/>
+        <a:font script="Knda" typeface="Tunga"/>
+        <a:font script="Guru" typeface="Raavi"/>
+        <a:font script="Cans" typeface="Euphemia"/>
+        <a:font script="Cher" typeface="Plantagenet Cherokee"/>
+        <a:font script="Yiii" typeface="Microsoft Yi Baiti"/>
+        <a:font script="Tibt" typeface="Microsoft Himalaya"/>
+        <a:font script="Thaa" typeface="MV Boli"/>
+        <a:font script="Deva" typeface="Mangal"/>
+        <a:font script="Telu" typeface="Gautami"/>
+        <a:font script="Taml" typeface="Latha"/>
+        <a:font script="Syrc" typeface="Estrangelo Edessa"/>
+        <a:font script="Orya" typeface="Kalinga"/>
+        <a:font script="Mlym" typeface="Kartika"/>
+        <a:font script="Laoo" typeface="DokChampa"/>
+        <a:font script="Sinh" typeface="Iskoola Pota"/>
+        <a:font script="Mong" typeface="Mongolian Baiti"/>
+        <a:font script="Viet" typeface="Arial"/>
+        <a:font script="Uigh" typeface="Microsoft Uighur"/>
+        <a:font script="Geor" typeface="Sylfaen"/>
+      </a:minorFont>
+    </a:fontScheme>
+    <a:fmtScheme name="Office">
+      <a:fillStyleLst>
+        <a:solidFill>
+          <a:schemeClr val="phClr"/>
+        </a:solidFill>
+        <a:gradFill rotWithShape="1">
+          <a:gsLst>
+            <a:gs pos="0">
+              <a:schemeClr val="phClr">
+                <a:tint val="50000"/>
+                <a:satMod val="300000"/>
+              </a:schemeClr>
+            </a:gs>
+            <a:gs pos="35000">
+              <a:schemeClr val="phClr">
+                <a:tint val="37000"/>
+                <a:satMod val="300000"/>
+              </a:schemeClr>
+            </a:gs>
+            <a:gs pos="100000">
+              <a:schemeClr val="phClr">
+                <a:tint val="15000"/>
+                <a:satMod val="350000"/>
+              </a:schemeClr>
+            </a:gs>
+          </a:gsLst>
+          <a:lin ang="16200000" scaled="1"/>
+        </a:gradFill>
+        <a:gradFill rotWithShape="1">
+          <a:gsLst>
+            <a:gs pos="0">
+              <a:schemeClr val="phClr">
+                <a:tint val="100000"/>
+                <a:shade val="100000"/>
+                <a:satMod val="130000"/>
+              </a:schemeClr>
+            </a:gs>
+            <a:gs pos="100000">
+              <a:schemeClr val="phClr">
+                <a:tint val="50000"/>
+                <a:shade val="100000"/>
+                <a:satMod val="350000"/>
+              </a:schemeClr>
+            </a:gs>
+          </a:gsLst>
+          <a:lin ang="16200000" scaled="0"/>
+        </a:gradFill>
+      </a:fillStyleLst>
+      <a:lnStyleLst>
+        <a:ln w="9525" cap="flat" cmpd="sng" algn="ctr">
+          <a:solidFill>
+            <a:schemeClr val="phClr">
+              <a:shade val="95000"/>
+              <a:satMod val="105000"/>
+            </a:schemeClr>
+          </a:solidFill>
+          <a:prstDash val="solid"/>
+        </a:ln>
+        <a:ln w="25400" cap="flat" cmpd="sng" algn="ctr">
+          <a:solidFill>
+            <a:schemeClr val="phClr"/>
+          </a:solidFill>
+          <a:prstDash val="solid"/>
+        </a:ln>
+        <a:ln w="38100" cap="flat" cmpd="sng" algn="ctr">
+          <a:solidFill>
+            <a:schemeClr val="phClr"/>
+          </a:solidFill>
+          <a:prstDash val="solid"/>
+        </a:ln>
+      </a:lnStyleLst>
+      <a:effectStyleLst>
+        <a:effectStyle>
+          <a:effectLst>
+            <a:outerShdw blurRad="40000" dist="20000" dir="5400000" rotWithShape="0">
+              <a:srgbClr val="000000">
+                <a:alpha val="38000"/>
+              </a:srgbClr>
+            </a:outerShdw>
+          </a:effectLst>
+        </a:effectStyle>
+        <a:effectStyle>
+          <a:effectLst>
+            <a:outerShdw blurRad="40000" dist="23000" dir="5400000" rotWithShape="0">
+              <a:srgbClr val="000000">
+                <a:alpha val="35000"/>
+              </a:srgbClr>
+            </a:outerShdw>
+          </a:effectLst>
+        </a:effectStyle>
+        <a:effectStyle>
+          <a:effectLst>
+            <a:outerShdw blurRad="40000" dist="23000" dir="5400000" rotWithShape="0">
+              <a:srgbClr val="000000">
+                <a:alpha val="35000"/>
+              </a:srgbClr>
+            </a:outerShdw>
+          </a:effectLst>
+          <a:scene3d>
+            <a:camera prst="orthographicFront">
+              <a:rot lat="0" lon="0" rev="0"/>
+            </a:camera>
+            <a:lightRig rig="threePt" dir="t">
+              <a:rot lat="0" lon="0" rev="1200000"/>
+            </a:lightRig>
+          </a:scene3d>
+          <a:sp3d>
+            <a:bevelT w="63500" h="25400"/>
+          </a:sp3d>
+        </a:effectStyle>
+      </a:effectStyleLst>
+      <a:bgFillStyleLst>
+        <a:solidFill>
+          <a:schemeClr val="phClr"/>
+        </a:solidFill>
+        <a:gradFill rotWithShape="1">
+          <a:gsLst>
+            <a:gs pos="0">
+              <a:schemeClr val="phClr">
+                <a:tint val="40000"/>
+                <a:satMod val="350000"/>
+              </a:schemeClr>
+            </a:gs>
+            <a:gs pos="40000">
+              <a:schemeClr val="phClr">
+                <a:tint val="45000"/>
+                <a:shade val="99000"/>
+                <a:satMod val="350000"/>
+              </a:schemeClr>
+            </a:gs>
+            <a:gs pos="100000">
+              <a:schemeClr val="phClr">
+                <a:shade val="20000"/>
+                <a:satMod val="255000"/>
+              </a:schemeClr>
+            </a:gs>
+          </a:gsLst>
+          <a:path path="circle">
+            <a:fillToRect l="50000" t="-80000" r="50000" b="180000"/>
+          </a:path>
+        </a:gradFill>
+        <a:gradFill rotWithShape="1">
+          <a:gsLst>
+            <a:gs pos="0">
+              <a:schemeClr val="phClr">
+                <a:tint val="80000"/>
+                <a:satMod val="300000"/>
+              </a:schemeClr>
+            </a:gs>
+            <a:gs pos="100000">
+              <a:schemeClr val="phClr">
+                <a:shade val="30000"/>
+                <a:satMod val="200000"/>
+              </a:schemeClr>
+            </a:gs>
+          </a:gsLst>
+          <a:path path="circle">
+            <a:fillToRect l="50000" t="50000" r="50000" b="50000"/>
+          </a:path>
+        </a:gradFill>
+      </a:bgFillStyleLst>
+    </a:fmtScheme>
+  </a:themeElements>
+</a:theme>
+</file>
+
+<file path=ppt/theme/theme2.xml><?xml version="1.0" encoding="utf-8"?>
 <a:theme xmlns:a="http://schemas.openxmlformats.org/drawingml/2006/main" xmlns:r="http://schemas.openxmlformats.org/officeDocument/2006/relationships" name="Streamline">
   <a:themeElements>
     <a:clrScheme name="Streamline">
@@ -16172,283 +18065,4 @@
     </a:fmtScheme>
   </a:themeElements>
 </a:theme>
-</file>
-
-<file path=ppt/theme/theme2.xml><?xml version="1.0" encoding="utf-8"?>
-<a:theme xmlns:a="http://schemas.openxmlformats.org/drawingml/2006/main" xmlns:r="http://schemas.openxmlformats.org/officeDocument/2006/relationships">
-  <a:themeElements>
-    <a:clrScheme name="Default">
-      <a:dk1>
-        <a:srgbClr val="000000"/>
-      </a:dk1>
-      <a:lt1>
-        <a:srgbClr val="FFFFFF"/>
-      </a:lt1>
-      <a:dk2>
-        <a:srgbClr val="158158"/>
-      </a:dk2>
-      <a:lt2>
-        <a:srgbClr val="F3F3F3"/>
-      </a:lt2>
-      <a:accent1>
-        <a:srgbClr val="058DC7"/>
-      </a:accent1>
-      <a:accent2>
-        <a:srgbClr val="50B432"/>
-      </a:accent2>
-      <a:accent3>
-        <a:srgbClr val="ED561B"/>
-      </a:accent3>
-      <a:accent4>
-        <a:srgbClr val="EDEF00"/>
-      </a:accent4>
-      <a:accent5>
-        <a:srgbClr val="24CBE5"/>
-      </a:accent5>
-      <a:accent6>
-        <a:srgbClr val="64E572"/>
-      </a:accent6>
-      <a:hlink>
-        <a:srgbClr val="2200CC"/>
-      </a:hlink>
-      <a:folHlink>
-        <a:srgbClr val="551A8B"/>
-      </a:folHlink>
-    </a:clrScheme>
-    <a:fontScheme name="Office">
-      <a:majorFont>
-        <a:latin typeface="Arial"/>
-        <a:ea typeface=""/>
-        <a:cs typeface=""/>
-        <a:font script="Jpan" typeface="ＭＳ Ｐゴシック"/>
-        <a:font script="Hang" typeface="맑은 고딕"/>
-        <a:font script="Hans" typeface="宋体"/>
-        <a:font script="Hant" typeface="新細明體"/>
-        <a:font script="Arab" typeface="Times New Roman"/>
-        <a:font script="Hebr" typeface="Times New Roman"/>
-        <a:font script="Thai" typeface="Angsana New"/>
-        <a:font script="Ethi" typeface="Nyala"/>
-        <a:font script="Beng" typeface="Vrinda"/>
-        <a:font script="Gujr" typeface="Shruti"/>
-        <a:font script="Khmr" typeface="MoolBoran"/>
-        <a:font script="Knda" typeface="Tunga"/>
-        <a:font script="Guru" typeface="Raavi"/>
-        <a:font script="Cans" typeface="Euphemia"/>
-        <a:font script="Cher" typeface="Plantagenet Cherokee"/>
-        <a:font script="Yiii" typeface="Microsoft Yi Baiti"/>
-        <a:font script="Tibt" typeface="Microsoft Himalaya"/>
-        <a:font script="Thaa" typeface="MV Boli"/>
-        <a:font script="Deva" typeface="Mangal"/>
-        <a:font script="Telu" typeface="Gautami"/>
-        <a:font script="Taml" typeface="Latha"/>
-        <a:font script="Syrc" typeface="Estrangelo Edessa"/>
-        <a:font script="Orya" typeface="Kalinga"/>
-        <a:font script="Mlym" typeface="Kartika"/>
-        <a:font script="Laoo" typeface="DokChampa"/>
-        <a:font script="Sinh" typeface="Iskoola Pota"/>
-        <a:font script="Mong" typeface="Mongolian Baiti"/>
-        <a:font script="Viet" typeface="Times New Roman"/>
-        <a:font script="Uigh" typeface="Microsoft Uighur"/>
-        <a:font script="Geor" typeface="Sylfaen"/>
-      </a:majorFont>
-      <a:minorFont>
-        <a:latin typeface="Arial"/>
-        <a:ea typeface=""/>
-        <a:cs typeface=""/>
-        <a:font script="Jpan" typeface="ＭＳ Ｐゴシック"/>
-        <a:font script="Hang" typeface="맑은 고딕"/>
-        <a:font script="Hans" typeface="宋体"/>
-        <a:font script="Hant" typeface="新細明體"/>
-        <a:font script="Arab" typeface="Arial"/>
-        <a:font script="Hebr" typeface="Arial"/>
-        <a:font script="Thai" typeface="Cordia New"/>
-        <a:font script="Ethi" typeface="Nyala"/>
-        <a:font script="Beng" typeface="Vrinda"/>
-        <a:font script="Gujr" typeface="Shruti"/>
-        <a:font script="Khmr" typeface="DaunPenh"/>
-        <a:font script="Knda" typeface="Tunga"/>
-        <a:font script="Guru" typeface="Raavi"/>
-        <a:font script="Cans" typeface="Euphemia"/>
-        <a:font script="Cher" typeface="Plantagenet Cherokee"/>
-        <a:font script="Yiii" typeface="Microsoft Yi Baiti"/>
-        <a:font script="Tibt" typeface="Microsoft Himalaya"/>
-        <a:font script="Thaa" typeface="MV Boli"/>
-        <a:font script="Deva" typeface="Mangal"/>
-        <a:font script="Telu" typeface="Gautami"/>
-        <a:font script="Taml" typeface="Latha"/>
-        <a:font script="Syrc" typeface="Estrangelo Edessa"/>
-        <a:font script="Orya" typeface="Kalinga"/>
-        <a:font script="Mlym" typeface="Kartika"/>
-        <a:font script="Laoo" typeface="DokChampa"/>
-        <a:font script="Sinh" typeface="Iskoola Pota"/>
-        <a:font script="Mong" typeface="Mongolian Baiti"/>
-        <a:font script="Viet" typeface="Arial"/>
-        <a:font script="Uigh" typeface="Microsoft Uighur"/>
-        <a:font script="Geor" typeface="Sylfaen"/>
-      </a:minorFont>
-    </a:fontScheme>
-    <a:fmtScheme name="Office">
-      <a:fillStyleLst>
-        <a:solidFill>
-          <a:schemeClr val="phClr"/>
-        </a:solidFill>
-        <a:gradFill rotWithShape="1">
-          <a:gsLst>
-            <a:gs pos="0">
-              <a:schemeClr val="phClr">
-                <a:tint val="50000"/>
-                <a:satMod val="300000"/>
-              </a:schemeClr>
-            </a:gs>
-            <a:gs pos="35000">
-              <a:schemeClr val="phClr">
-                <a:tint val="37000"/>
-                <a:satMod val="300000"/>
-              </a:schemeClr>
-            </a:gs>
-            <a:gs pos="100000">
-              <a:schemeClr val="phClr">
-                <a:tint val="15000"/>
-                <a:satMod val="350000"/>
-              </a:schemeClr>
-            </a:gs>
-          </a:gsLst>
-          <a:lin ang="16200000" scaled="1"/>
-        </a:gradFill>
-        <a:gradFill rotWithShape="1">
-          <a:gsLst>
-            <a:gs pos="0">
-              <a:schemeClr val="phClr">
-                <a:tint val="100000"/>
-                <a:shade val="100000"/>
-                <a:satMod val="130000"/>
-              </a:schemeClr>
-            </a:gs>
-            <a:gs pos="100000">
-              <a:schemeClr val="phClr">
-                <a:tint val="50000"/>
-                <a:shade val="100000"/>
-                <a:satMod val="350000"/>
-              </a:schemeClr>
-            </a:gs>
-          </a:gsLst>
-          <a:lin ang="16200000" scaled="0"/>
-        </a:gradFill>
-      </a:fillStyleLst>
-      <a:lnStyleLst>
-        <a:ln w="9525" cap="flat" cmpd="sng" algn="ctr">
-          <a:solidFill>
-            <a:schemeClr val="phClr">
-              <a:shade val="95000"/>
-              <a:satMod val="105000"/>
-            </a:schemeClr>
-          </a:solidFill>
-          <a:prstDash val="solid"/>
-        </a:ln>
-        <a:ln w="25400" cap="flat" cmpd="sng" algn="ctr">
-          <a:solidFill>
-            <a:schemeClr val="phClr"/>
-          </a:solidFill>
-          <a:prstDash val="solid"/>
-        </a:ln>
-        <a:ln w="38100" cap="flat" cmpd="sng" algn="ctr">
-          <a:solidFill>
-            <a:schemeClr val="phClr"/>
-          </a:solidFill>
-          <a:prstDash val="solid"/>
-        </a:ln>
-      </a:lnStyleLst>
-      <a:effectStyleLst>
-        <a:effectStyle>
-          <a:effectLst>
-            <a:outerShdw blurRad="40000" dist="20000" dir="5400000" rotWithShape="0">
-              <a:srgbClr val="000000">
-                <a:alpha val="38000"/>
-              </a:srgbClr>
-            </a:outerShdw>
-          </a:effectLst>
-        </a:effectStyle>
-        <a:effectStyle>
-          <a:effectLst>
-            <a:outerShdw blurRad="40000" dist="23000" dir="5400000" rotWithShape="0">
-              <a:srgbClr val="000000">
-                <a:alpha val="35000"/>
-              </a:srgbClr>
-            </a:outerShdw>
-          </a:effectLst>
-        </a:effectStyle>
-        <a:effectStyle>
-          <a:effectLst>
-            <a:outerShdw blurRad="40000" dist="23000" dir="5400000" rotWithShape="0">
-              <a:srgbClr val="000000">
-                <a:alpha val="35000"/>
-              </a:srgbClr>
-            </a:outerShdw>
-          </a:effectLst>
-          <a:scene3d>
-            <a:camera prst="orthographicFront">
-              <a:rot lat="0" lon="0" rev="0"/>
-            </a:camera>
-            <a:lightRig rig="threePt" dir="t">
-              <a:rot lat="0" lon="0" rev="1200000"/>
-            </a:lightRig>
-          </a:scene3d>
-          <a:sp3d>
-            <a:bevelT w="63500" h="25400"/>
-          </a:sp3d>
-        </a:effectStyle>
-      </a:effectStyleLst>
-      <a:bgFillStyleLst>
-        <a:solidFill>
-          <a:schemeClr val="phClr"/>
-        </a:solidFill>
-        <a:gradFill rotWithShape="1">
-          <a:gsLst>
-            <a:gs pos="0">
-              <a:schemeClr val="phClr">
-                <a:tint val="40000"/>
-                <a:satMod val="350000"/>
-              </a:schemeClr>
-            </a:gs>
-            <a:gs pos="40000">
-              <a:schemeClr val="phClr">
-                <a:tint val="45000"/>
-                <a:shade val="99000"/>
-                <a:satMod val="350000"/>
-              </a:schemeClr>
-            </a:gs>
-            <a:gs pos="100000">
-              <a:schemeClr val="phClr">
-                <a:shade val="20000"/>
-                <a:satMod val="255000"/>
-              </a:schemeClr>
-            </a:gs>
-          </a:gsLst>
-          <a:path path="circle">
-            <a:fillToRect l="50000" t="-80000" r="50000" b="180000"/>
-          </a:path>
-        </a:gradFill>
-        <a:gradFill rotWithShape="1">
-          <a:gsLst>
-            <a:gs pos="0">
-              <a:schemeClr val="phClr">
-                <a:tint val="80000"/>
-                <a:satMod val="300000"/>
-              </a:schemeClr>
-            </a:gs>
-            <a:gs pos="100000">
-              <a:schemeClr val="phClr">
-                <a:shade val="30000"/>
-                <a:satMod val="200000"/>
-              </a:schemeClr>
-            </a:gs>
-          </a:gsLst>
-          <a:path path="circle">
-            <a:fillToRect l="50000" t="50000" r="50000" b="50000"/>
-          </a:path>
-        </a:gradFill>
-      </a:bgFillStyleLst>
-    </a:fmtScheme>
-  </a:themeElements>
-</a:theme>
 </file>